--- a/docs/images/flowchart.pptx
+++ b/docs/images/flowchart.pptx
@@ -245,7 +245,7 @@
           <a:p>
             <a:fld id="{C4BA104D-BBF9-4279-8CEB-A5CF88D2DFAC}" type="datetimeFigureOut">
               <a:rPr lang="en-US" smtClean="0"/>
-              <a:t>10/30/2025</a:t>
+              <a:t>3/20/2026</a:t>
             </a:fld>
             <a:endParaRPr lang="en-US"/>
           </a:p>
@@ -415,7 +415,7 @@
           <a:p>
             <a:fld id="{C4BA104D-BBF9-4279-8CEB-A5CF88D2DFAC}" type="datetimeFigureOut">
               <a:rPr lang="en-US" smtClean="0"/>
-              <a:t>10/30/2025</a:t>
+              <a:t>3/20/2026</a:t>
             </a:fld>
             <a:endParaRPr lang="en-US"/>
           </a:p>
@@ -595,7 +595,7 @@
           <a:p>
             <a:fld id="{C4BA104D-BBF9-4279-8CEB-A5CF88D2DFAC}" type="datetimeFigureOut">
               <a:rPr lang="en-US" smtClean="0"/>
-              <a:t>10/30/2025</a:t>
+              <a:t>3/20/2026</a:t>
             </a:fld>
             <a:endParaRPr lang="en-US"/>
           </a:p>
@@ -895,7 +895,7 @@
           <a:p>
             <a:fld id="{C4BA104D-BBF9-4279-8CEB-A5CF88D2DFAC}" type="datetimeFigureOut">
               <a:rPr lang="en-US" smtClean="0"/>
-              <a:t>10/30/2025</a:t>
+              <a:t>3/20/2026</a:t>
             </a:fld>
             <a:endParaRPr lang="en-US"/>
           </a:p>
@@ -1141,7 +1141,7 @@
           <a:p>
             <a:fld id="{C4BA104D-BBF9-4279-8CEB-A5CF88D2DFAC}" type="datetimeFigureOut">
               <a:rPr lang="en-US" smtClean="0"/>
-              <a:t>10/30/2025</a:t>
+              <a:t>3/20/2026</a:t>
             </a:fld>
             <a:endParaRPr lang="en-US"/>
           </a:p>
@@ -1373,7 +1373,7 @@
           <a:p>
             <a:fld id="{C4BA104D-BBF9-4279-8CEB-A5CF88D2DFAC}" type="datetimeFigureOut">
               <a:rPr lang="en-US" smtClean="0"/>
-              <a:t>10/30/2025</a:t>
+              <a:t>3/20/2026</a:t>
             </a:fld>
             <a:endParaRPr lang="en-US"/>
           </a:p>
@@ -1740,7 +1740,7 @@
           <a:p>
             <a:fld id="{C4BA104D-BBF9-4279-8CEB-A5CF88D2DFAC}" type="datetimeFigureOut">
               <a:rPr lang="en-US" smtClean="0"/>
-              <a:t>10/30/2025</a:t>
+              <a:t>3/20/2026</a:t>
             </a:fld>
             <a:endParaRPr lang="en-US"/>
           </a:p>
@@ -1858,7 +1858,7 @@
           <a:p>
             <a:fld id="{C4BA104D-BBF9-4279-8CEB-A5CF88D2DFAC}" type="datetimeFigureOut">
               <a:rPr lang="en-US" smtClean="0"/>
-              <a:t>10/30/2025</a:t>
+              <a:t>3/20/2026</a:t>
             </a:fld>
             <a:endParaRPr lang="en-US"/>
           </a:p>
@@ -1953,7 +1953,7 @@
           <a:p>
             <a:fld id="{C4BA104D-BBF9-4279-8CEB-A5CF88D2DFAC}" type="datetimeFigureOut">
               <a:rPr lang="en-US" smtClean="0"/>
-              <a:t>10/30/2025</a:t>
+              <a:t>3/20/2026</a:t>
             </a:fld>
             <a:endParaRPr lang="en-US"/>
           </a:p>
@@ -2230,7 +2230,7 @@
           <a:p>
             <a:fld id="{C4BA104D-BBF9-4279-8CEB-A5CF88D2DFAC}" type="datetimeFigureOut">
               <a:rPr lang="en-US" smtClean="0"/>
-              <a:t>10/30/2025</a:t>
+              <a:t>3/20/2026</a:t>
             </a:fld>
             <a:endParaRPr lang="en-US"/>
           </a:p>
@@ -2487,7 +2487,7 @@
           <a:p>
             <a:fld id="{C4BA104D-BBF9-4279-8CEB-A5CF88D2DFAC}" type="datetimeFigureOut">
               <a:rPr lang="en-US" smtClean="0"/>
-              <a:t>10/30/2025</a:t>
+              <a:t>3/20/2026</a:t>
             </a:fld>
             <a:endParaRPr lang="en-US"/>
           </a:p>
@@ -2700,7 +2700,7 @@
           <a:p>
             <a:fld id="{C4BA104D-BBF9-4279-8CEB-A5CF88D2DFAC}" type="datetimeFigureOut">
               <a:rPr lang="en-US" smtClean="0"/>
-              <a:t>10/30/2025</a:t>
+              <a:t>3/20/2026</a:t>
             </a:fld>
             <a:endParaRPr lang="en-US"/>
           </a:p>
@@ -6114,7 +6114,7 @@
         <p:spPr>
           <a:xfrm>
             <a:off x="507019" y="2491740"/>
-            <a:ext cx="6318305" cy="6350000"/>
+            <a:ext cx="6345901" cy="6350000"/>
           </a:xfrm>
           <a:prstGeom prst="rect">
             <a:avLst/>
@@ -7141,8 +7141,8 @@
         </p:nvSpPr>
         <p:spPr>
           <a:xfrm>
-            <a:off x="3717468" y="5785595"/>
-            <a:ext cx="2754572" cy="411994"/>
+            <a:off x="3717468" y="5850266"/>
+            <a:ext cx="2754572" cy="282652"/>
           </a:xfrm>
           <a:prstGeom prst="rect">
             <a:avLst/>
@@ -7197,36 +7197,7 @@
                 <a:ea typeface="Fira Code" pitchFamily="1" charset="0"/>
                 <a:cs typeface="Fira Code" pitchFamily="1" charset="0"/>
               </a:rPr>
-              <a:t>load_model_coordinates()</a:t>
-            </a:r>
-          </a:p>
-          <a:p>
-            <a:pPr>
-              <a:spcAft>
-                <a:spcPts val="200"/>
-              </a:spcAft>
-            </a:pPr>
-            <a:r>
-              <a:rPr lang="en-US" sz="800" noProof="1">
-                <a:solidFill>
-                  <a:schemeClr val="tx1"/>
-                </a:solidFill>
-                <a:latin typeface="Fira Code" pitchFamily="1" charset="0"/>
-                <a:ea typeface="Fira Code" pitchFamily="1" charset="0"/>
-                <a:cs typeface="Fira Code" pitchFamily="1" charset="0"/>
-              </a:rPr>
-              <a:t>model.</a:t>
-            </a:r>
-            <a:r>
-              <a:rPr lang="en-US" sz="800" b="1" noProof="1">
-                <a:solidFill>
-                  <a:schemeClr val="tx1"/>
-                </a:solidFill>
-                <a:latin typeface="Fira Code" pitchFamily="1" charset="0"/>
-                <a:ea typeface="Fira Code" pitchFamily="1" charset="0"/>
-                <a:cs typeface="Fira Code" pitchFamily="1" charset="0"/>
-              </a:rPr>
-              <a:t>initialize_blank_data_structure()</a:t>
+              <a:t>initialize_model_environment()</a:t>
             </a:r>
           </a:p>
         </p:txBody>
@@ -7912,8 +7883,8 @@
         </p:nvSpPr>
         <p:spPr>
           <a:xfrm>
-            <a:off x="3717468" y="7034994"/>
-            <a:ext cx="3045281" cy="367226"/>
+            <a:off x="3717468" y="7072869"/>
+            <a:ext cx="3135452" cy="290805"/>
           </a:xfrm>
           <a:prstGeom prst="rect">
             <a:avLst/>
@@ -7968,44 +7939,7 @@
                 <a:ea typeface="Fira Code" pitchFamily="1" charset="0"/>
                 <a:cs typeface="Fira Code" pitchFamily="1" charset="0"/>
               </a:rPr>
-              <a:t>load_exogenous_data_to_sqlite_database()</a:t>
-            </a:r>
-            <a:endParaRPr lang="en-US" sz="800" noProof="1">
-              <a:solidFill>
-                <a:schemeClr val="tx1"/>
-              </a:solidFill>
-              <a:latin typeface="Fira Code" pitchFamily="1" charset="0"/>
-              <a:ea typeface="Fira Code" pitchFamily="1" charset="0"/>
-              <a:cs typeface="Fira Code" pitchFamily="1" charset="0"/>
-            </a:endParaRPr>
-          </a:p>
-          <a:p>
-            <a:pPr>
-              <a:spcAft>
-                <a:spcPts val="200"/>
-              </a:spcAft>
-            </a:pPr>
-            <a:r>
-              <a:rPr lang="en-US" sz="800" noProof="1">
-                <a:solidFill>
-                  <a:schemeClr val="tx1"/>
-                </a:solidFill>
-                <a:latin typeface="Fira Code" pitchFamily="1" charset="0"/>
-                <a:ea typeface="Fira Code" pitchFamily="1" charset="0"/>
-                <a:cs typeface="Fira Code" pitchFamily="1" charset="0"/>
-              </a:rPr>
-              <a:t>model.</a:t>
-            </a:r>
-            <a:r>
-              <a:rPr lang="en-US" sz="800" b="1" noProof="1">
-                <a:solidFill>
-                  <a:schemeClr val="tx1"/>
-                </a:solidFill>
-                <a:latin typeface="Fira Code" pitchFamily="1" charset="0"/>
-                <a:ea typeface="Fira Code" pitchFamily="1" charset="0"/>
-                <a:cs typeface="Fira Code" pitchFamily="1" charset="0"/>
-              </a:rPr>
-              <a:t>initialize_problems()</a:t>
+              <a:t>refresh_database_and_initialize_problem()</a:t>
             </a:r>
           </a:p>
         </p:txBody>
@@ -8024,8 +7958,8 @@
         </p:nvSpPr>
         <p:spPr>
           <a:xfrm>
-            <a:off x="507019" y="10097394"/>
-            <a:ext cx="6318305" cy="3215791"/>
+            <a:off x="507019" y="10103744"/>
+            <a:ext cx="7436831" cy="3215791"/>
           </a:xfrm>
           <a:prstGeom prst="rect">
             <a:avLst/>
@@ -8464,7 +8398,7 @@
         <p:spPr>
           <a:xfrm>
             <a:off x="4410086" y="10357530"/>
-            <a:ext cx="2191719" cy="232872"/>
+            <a:ext cx="3082914" cy="215751"/>
           </a:xfrm>
           <a:prstGeom prst="rect">
             <a:avLst/>
@@ -8514,7 +8448,29 @@
                 <a:ea typeface="Fira Code" pitchFamily="1" charset="0"/>
                 <a:cs typeface="Fira Code" pitchFamily="1" charset="0"/>
               </a:rPr>
-              <a:t>Model()</a:t>
+              <a:t>Model(</a:t>
+            </a:r>
+            <a:r>
+              <a:rPr lang="en-US" sz="800" noProof="1">
+                <a:solidFill>
+                  <a:schemeClr val="tx1"/>
+                </a:solidFill>
+                <a:latin typeface="Fira Code" pitchFamily="1" charset="0"/>
+                <a:ea typeface="Fira Code" pitchFamily="1" charset="0"/>
+                <a:cs typeface="Fira Code" pitchFamily="1" charset="0"/>
+              </a:rPr>
+              <a:t>use_existing_data=True</a:t>
+            </a:r>
+            <a:r>
+              <a:rPr lang="en-US" sz="800" b="1" noProof="1">
+                <a:solidFill>
+                  <a:schemeClr val="tx1"/>
+                </a:solidFill>
+                <a:latin typeface="Fira Code" pitchFamily="1" charset="0"/>
+                <a:ea typeface="Fira Code" pitchFamily="1" charset="0"/>
+                <a:cs typeface="Fira Code" pitchFamily="1" charset="0"/>
+              </a:rPr>
+              <a:t>)</a:t>
             </a:r>
           </a:p>
         </p:txBody>
@@ -8822,7 +8778,7 @@
         <p:spPr>
           <a:xfrm>
             <a:off x="4410086" y="11620687"/>
-            <a:ext cx="2415238" cy="189079"/>
+            <a:ext cx="3184514" cy="189079"/>
           </a:xfrm>
           <a:prstGeom prst="rect">
             <a:avLst/>
@@ -8877,7 +8833,7 @@
                 <a:ea typeface="Fira Code" pitchFamily="1" charset="0"/>
                 <a:cs typeface="Fira Code" pitchFamily="1" charset="0"/>
               </a:rPr>
-              <a:t>update_database_and_problem()</a:t>
+              <a:t>refresh_database_and_initialize_problem()</a:t>
             </a:r>
           </a:p>
         </p:txBody>
@@ -9039,8 +8995,8 @@
         </p:nvSpPr>
         <p:spPr>
           <a:xfrm>
-            <a:off x="4410086" y="11026243"/>
-            <a:ext cx="2270114" cy="189079"/>
+            <a:off x="4410085" y="11026243"/>
+            <a:ext cx="3476017" cy="189079"/>
           </a:xfrm>
           <a:prstGeom prst="rect">
             <a:avLst/>
@@ -9095,17 +9051,39 @@
                 <a:ea typeface="Fira Code" pitchFamily="1" charset="0"/>
                 <a:cs typeface="Fira Code" pitchFamily="1" charset="0"/>
               </a:rPr>
-              <a:t>generate_input_data_files()</a:t>
+              <a:t>generate_input_data_files(</a:t>
+            </a:r>
+            <a:r>
+              <a:rPr lang="en-US" sz="800" noProof="1">
+                <a:solidFill>
+                  <a:schemeClr val="tx1"/>
+                </a:solidFill>
+                <a:latin typeface="Fira Code" pitchFamily="1" charset="0"/>
+                <a:ea typeface="Fira Code" pitchFamily="1" charset="0"/>
+                <a:cs typeface="Fira Code" pitchFamily="1" charset="0"/>
+              </a:rPr>
+              <a:t>table_key_list=[...]</a:t>
+            </a:r>
+            <a:r>
+              <a:rPr lang="en-US" sz="800" b="1" noProof="1">
+                <a:solidFill>
+                  <a:schemeClr val="tx1"/>
+                </a:solidFill>
+                <a:latin typeface="Fira Code" pitchFamily="1" charset="0"/>
+                <a:ea typeface="Fira Code" pitchFamily="1" charset="0"/>
+                <a:cs typeface="Fira Code" pitchFamily="1" charset="0"/>
+              </a:rPr>
+              <a:t>)</a:t>
             </a:r>
           </a:p>
         </p:txBody>
       </p:sp>
       <p:pic>
         <p:nvPicPr>
-          <p:cNvPr id="38" name="Picture 37">
-            <a:extLst>
-              <a:ext uri="{FF2B5EF4-FFF2-40B4-BE49-F238E27FC236}">
-                <a16:creationId xmlns:a16="http://schemas.microsoft.com/office/drawing/2014/main" id="{D406F134-ED6E-7C35-B99A-ED619660F62E}"/>
+          <p:cNvPr id="5" name="Picture 4">
+            <a:extLst>
+              <a:ext uri="{FF2B5EF4-FFF2-40B4-BE49-F238E27FC236}">
+                <a16:creationId xmlns:a16="http://schemas.microsoft.com/office/drawing/2014/main" id="{E3BC47EF-845F-EF3B-A693-C59144B59A10}"/>
               </a:ext>
             </a:extLst>
           </p:cNvPr>
@@ -9122,8 +9100,8 @@
         </p:blipFill>
         <p:spPr>
           <a:xfrm>
-            <a:off x="7417635" y="2495254"/>
-            <a:ext cx="6322100" cy="6346486"/>
+            <a:off x="6142327" y="11963837"/>
+            <a:ext cx="7437765" cy="3218967"/>
           </a:xfrm>
           <a:prstGeom prst="rect">
             <a:avLst/>
@@ -9132,10 +9110,10 @@
       </p:pic>
       <p:pic>
         <p:nvPicPr>
-          <p:cNvPr id="39" name="Picture 38">
-            <a:extLst>
-              <a:ext uri="{FF2B5EF4-FFF2-40B4-BE49-F238E27FC236}">
-                <a16:creationId xmlns:a16="http://schemas.microsoft.com/office/drawing/2014/main" id="{C9650B60-AEB7-7AB1-14A4-53CF4A5320F6}"/>
+          <p:cNvPr id="2" name="Picture 1">
+            <a:extLst>
+              <a:ext uri="{FF2B5EF4-FFF2-40B4-BE49-F238E27FC236}">
+                <a16:creationId xmlns:a16="http://schemas.microsoft.com/office/drawing/2014/main" id="{A39E0929-888F-CC96-6B1C-68F78D9069A6}"/>
               </a:ext>
             </a:extLst>
           </p:cNvPr>
@@ -9152,8 +9130,8 @@
         </p:blipFill>
         <p:spPr>
           <a:xfrm>
-            <a:off x="7417635" y="10094218"/>
-            <a:ext cx="6322100" cy="3218967"/>
+            <a:off x="7475877" y="2490293"/>
+            <a:ext cx="6346486" cy="6346486"/>
           </a:xfrm>
           <a:prstGeom prst="rect">
             <a:avLst/>

--- a/docs/images/flowchart.pptx
+++ b/docs/images/flowchart.pptx
@@ -6,8 +6,9 @@
   </p:sldMasterIdLst>
   <p:sldIdLst>
     <p:sldId id="256" r:id="rId2"/>
-    <p:sldId id="259" r:id="rId3"/>
-    <p:sldId id="1814" r:id="rId4"/>
+    <p:sldId id="1815" r:id="rId3"/>
+    <p:sldId id="259" r:id="rId4"/>
+    <p:sldId id="1814" r:id="rId5"/>
   </p:sldIdLst>
   <p:sldSz cx="14400213" cy="21599525"/>
   <p:notesSz cx="6858000" cy="9144000"/>
@@ -245,7 +246,7 @@
           <a:p>
             <a:fld id="{C4BA104D-BBF9-4279-8CEB-A5CF88D2DFAC}" type="datetimeFigureOut">
               <a:rPr lang="en-US" smtClean="0"/>
-              <a:t>3/20/2026</a:t>
+              <a:t>3/24/2026</a:t>
             </a:fld>
             <a:endParaRPr lang="en-US"/>
           </a:p>
@@ -415,7 +416,7 @@
           <a:p>
             <a:fld id="{C4BA104D-BBF9-4279-8CEB-A5CF88D2DFAC}" type="datetimeFigureOut">
               <a:rPr lang="en-US" smtClean="0"/>
-              <a:t>3/20/2026</a:t>
+              <a:t>3/24/2026</a:t>
             </a:fld>
             <a:endParaRPr lang="en-US"/>
           </a:p>
@@ -595,7 +596,7 @@
           <a:p>
             <a:fld id="{C4BA104D-BBF9-4279-8CEB-A5CF88D2DFAC}" type="datetimeFigureOut">
               <a:rPr lang="en-US" smtClean="0"/>
-              <a:t>3/20/2026</a:t>
+              <a:t>3/24/2026</a:t>
             </a:fld>
             <a:endParaRPr lang="en-US"/>
           </a:p>
@@ -895,7 +896,7 @@
           <a:p>
             <a:fld id="{C4BA104D-BBF9-4279-8CEB-A5CF88D2DFAC}" type="datetimeFigureOut">
               <a:rPr lang="en-US" smtClean="0"/>
-              <a:t>3/20/2026</a:t>
+              <a:t>3/24/2026</a:t>
             </a:fld>
             <a:endParaRPr lang="en-US"/>
           </a:p>
@@ -1141,7 +1142,7 @@
           <a:p>
             <a:fld id="{C4BA104D-BBF9-4279-8CEB-A5CF88D2DFAC}" type="datetimeFigureOut">
               <a:rPr lang="en-US" smtClean="0"/>
-              <a:t>3/20/2026</a:t>
+              <a:t>3/24/2026</a:t>
             </a:fld>
             <a:endParaRPr lang="en-US"/>
           </a:p>
@@ -1373,7 +1374,7 @@
           <a:p>
             <a:fld id="{C4BA104D-BBF9-4279-8CEB-A5CF88D2DFAC}" type="datetimeFigureOut">
               <a:rPr lang="en-US" smtClean="0"/>
-              <a:t>3/20/2026</a:t>
+              <a:t>3/24/2026</a:t>
             </a:fld>
             <a:endParaRPr lang="en-US"/>
           </a:p>
@@ -1740,7 +1741,7 @@
           <a:p>
             <a:fld id="{C4BA104D-BBF9-4279-8CEB-A5CF88D2DFAC}" type="datetimeFigureOut">
               <a:rPr lang="en-US" smtClean="0"/>
-              <a:t>3/20/2026</a:t>
+              <a:t>3/24/2026</a:t>
             </a:fld>
             <a:endParaRPr lang="en-US"/>
           </a:p>
@@ -1858,7 +1859,7 @@
           <a:p>
             <a:fld id="{C4BA104D-BBF9-4279-8CEB-A5CF88D2DFAC}" type="datetimeFigureOut">
               <a:rPr lang="en-US" smtClean="0"/>
-              <a:t>3/20/2026</a:t>
+              <a:t>3/24/2026</a:t>
             </a:fld>
             <a:endParaRPr lang="en-US"/>
           </a:p>
@@ -1953,7 +1954,7 @@
           <a:p>
             <a:fld id="{C4BA104D-BBF9-4279-8CEB-A5CF88D2DFAC}" type="datetimeFigureOut">
               <a:rPr lang="en-US" smtClean="0"/>
-              <a:t>3/20/2026</a:t>
+              <a:t>3/24/2026</a:t>
             </a:fld>
             <a:endParaRPr lang="en-US"/>
           </a:p>
@@ -2230,7 +2231,7 @@
           <a:p>
             <a:fld id="{C4BA104D-BBF9-4279-8CEB-A5CF88D2DFAC}" type="datetimeFigureOut">
               <a:rPr lang="en-US" smtClean="0"/>
-              <a:t>3/20/2026</a:t>
+              <a:t>3/24/2026</a:t>
             </a:fld>
             <a:endParaRPr lang="en-US"/>
           </a:p>
@@ -2487,7 +2488,7 @@
           <a:p>
             <a:fld id="{C4BA104D-BBF9-4279-8CEB-A5CF88D2DFAC}" type="datetimeFigureOut">
               <a:rPr lang="en-US" smtClean="0"/>
-              <a:t>3/20/2026</a:t>
+              <a:t>3/24/2026</a:t>
             </a:fld>
             <a:endParaRPr lang="en-US"/>
           </a:p>
@@ -2700,7 +2701,7 @@
           <a:p>
             <a:fld id="{C4BA104D-BBF9-4279-8CEB-A5CF88D2DFAC}" type="datetimeFigureOut">
               <a:rPr lang="en-US" smtClean="0"/>
-              <a:t>3/20/2026</a:t>
+              <a:t>3/24/2026</a:t>
             </a:fld>
             <a:endParaRPr lang="en-US"/>
           </a:p>
@@ -6101,6 +6102,5300 @@
       </p:grpSpPr>
       <p:sp>
         <p:nvSpPr>
+          <p:cNvPr id="2" name="Rettangolo 19">
+            <a:extLst>
+              <a:ext uri="{FF2B5EF4-FFF2-40B4-BE49-F238E27FC236}">
+                <a16:creationId xmlns:a16="http://schemas.microsoft.com/office/drawing/2014/main" id="{20C0A8D1-A40B-7F63-ABBD-AA5E1F8149C7}"/>
+              </a:ext>
+            </a:extLst>
+          </p:cNvPr>
+          <p:cNvSpPr/>
+          <p:nvPr/>
+        </p:nvSpPr>
+        <p:spPr>
+          <a:xfrm>
+            <a:off x="2113093" y="12504280"/>
+            <a:ext cx="1476775" cy="367229"/>
+          </a:xfrm>
+          <a:prstGeom prst="rect">
+            <a:avLst/>
+          </a:prstGeom>
+          <a:noFill/>
+          <a:ln w="12700">
+            <a:solidFill>
+              <a:schemeClr val="tx1"/>
+            </a:solidFill>
+          </a:ln>
+        </p:spPr>
+        <p:style>
+          <a:lnRef idx="2">
+            <a:schemeClr val="accent1">
+              <a:shade val="50000"/>
+            </a:schemeClr>
+          </a:lnRef>
+          <a:fillRef idx="1">
+            <a:schemeClr val="accent1"/>
+          </a:fillRef>
+          <a:effectRef idx="0">
+            <a:schemeClr val="accent1"/>
+          </a:effectRef>
+          <a:fontRef idx="minor">
+            <a:schemeClr val="lt1"/>
+          </a:fontRef>
+        </p:style>
+        <p:txBody>
+          <a:bodyPr rtlCol="0" anchor="ctr"/>
+          <a:lstStyle/>
+          <a:p>
+            <a:pPr algn="ctr"/>
+            <a:r>
+              <a:rPr lang="en-US" sz="1200" b="1" noProof="1">
+                <a:solidFill>
+                  <a:schemeClr val="tx1"/>
+                </a:solidFill>
+                <a:latin typeface="+mj-lt"/>
+                <a:ea typeface="Fira Code" pitchFamily="1" charset="0"/>
+                <a:cs typeface="Fira Code" pitchFamily="1" charset="0"/>
+              </a:rPr>
+              <a:t>cvxlab.Model</a:t>
+            </a:r>
+          </a:p>
+        </p:txBody>
+      </p:sp>
+      <p:cxnSp>
+        <p:nvCxnSpPr>
+          <p:cNvPr id="6" name="Connettore diritto 4">
+            <a:extLst>
+              <a:ext uri="{FF2B5EF4-FFF2-40B4-BE49-F238E27FC236}">
+                <a16:creationId xmlns:a16="http://schemas.microsoft.com/office/drawing/2014/main" id="{11E24FFE-0B0E-068A-1219-24F0E1B5A524}"/>
+              </a:ext>
+            </a:extLst>
+          </p:cNvPr>
+          <p:cNvCxnSpPr>
+            <a:cxnSpLocks/>
+          </p:cNvCxnSpPr>
+          <p:nvPr/>
+        </p:nvCxnSpPr>
+        <p:spPr>
+          <a:xfrm flipH="1">
+            <a:off x="3589868" y="12687894"/>
+            <a:ext cx="389689" cy="0"/>
+          </a:xfrm>
+          <a:prstGeom prst="line">
+            <a:avLst/>
+          </a:prstGeom>
+          <a:ln w="12700">
+            <a:solidFill>
+              <a:schemeClr val="tx1"/>
+            </a:solidFill>
+            <a:headEnd type="none" w="med" len="med"/>
+            <a:tailEnd type="triangle" w="med" len="med"/>
+          </a:ln>
+        </p:spPr>
+        <p:style>
+          <a:lnRef idx="1">
+            <a:schemeClr val="accent1"/>
+          </a:lnRef>
+          <a:fillRef idx="0">
+            <a:schemeClr val="accent1"/>
+          </a:fillRef>
+          <a:effectRef idx="0">
+            <a:schemeClr val="accent1"/>
+          </a:effectRef>
+          <a:fontRef idx="minor">
+            <a:schemeClr val="tx1"/>
+          </a:fontRef>
+        </p:style>
+      </p:cxnSp>
+      <p:sp>
+        <p:nvSpPr>
+          <p:cNvPr id="25" name="Rettangolo 19">
+            <a:extLst>
+              <a:ext uri="{FF2B5EF4-FFF2-40B4-BE49-F238E27FC236}">
+                <a16:creationId xmlns:a16="http://schemas.microsoft.com/office/drawing/2014/main" id="{7195E273-BC7B-A117-CAFB-3C11A52BB59E}"/>
+              </a:ext>
+            </a:extLst>
+          </p:cNvPr>
+          <p:cNvSpPr/>
+          <p:nvPr/>
+        </p:nvSpPr>
+        <p:spPr>
+          <a:xfrm>
+            <a:off x="4000983" y="12504278"/>
+            <a:ext cx="1476775" cy="367229"/>
+          </a:xfrm>
+          <a:prstGeom prst="rect">
+            <a:avLst/>
+          </a:prstGeom>
+          <a:noFill/>
+          <a:ln w="12700">
+            <a:solidFill>
+              <a:schemeClr val="tx1"/>
+            </a:solidFill>
+          </a:ln>
+        </p:spPr>
+        <p:style>
+          <a:lnRef idx="2">
+            <a:schemeClr val="accent1">
+              <a:shade val="50000"/>
+            </a:schemeClr>
+          </a:lnRef>
+          <a:fillRef idx="1">
+            <a:schemeClr val="accent1"/>
+          </a:fillRef>
+          <a:effectRef idx="0">
+            <a:schemeClr val="accent1"/>
+          </a:effectRef>
+          <a:fontRef idx="minor">
+            <a:schemeClr val="lt1"/>
+          </a:fontRef>
+        </p:style>
+        <p:txBody>
+          <a:bodyPr rtlCol="0" anchor="ctr"/>
+          <a:lstStyle/>
+          <a:p>
+            <a:pPr algn="ctr"/>
+            <a:r>
+              <a:rPr lang="en-US" sz="1200" b="1" noProof="1">
+                <a:solidFill>
+                  <a:schemeClr val="tx1"/>
+                </a:solidFill>
+                <a:latin typeface="+mj-lt"/>
+                <a:ea typeface="Fira Code" pitchFamily="1" charset="0"/>
+                <a:cs typeface="Fira Code" pitchFamily="1" charset="0"/>
+              </a:rPr>
+              <a:t>cvxlab.Model.Core</a:t>
+            </a:r>
+          </a:p>
+        </p:txBody>
+      </p:sp>
+      <p:sp>
+        <p:nvSpPr>
+          <p:cNvPr id="65" name="Rettangolo 19">
+            <a:extLst>
+              <a:ext uri="{FF2B5EF4-FFF2-40B4-BE49-F238E27FC236}">
+                <a16:creationId xmlns:a16="http://schemas.microsoft.com/office/drawing/2014/main" id="{717E0688-2AEB-0EFF-B16F-4EACF667088D}"/>
+              </a:ext>
+            </a:extLst>
+          </p:cNvPr>
+          <p:cNvSpPr/>
+          <p:nvPr/>
+        </p:nvSpPr>
+        <p:spPr>
+          <a:xfrm>
+            <a:off x="5772001" y="5358617"/>
+            <a:ext cx="1173060" cy="345845"/>
+          </a:xfrm>
+          <a:prstGeom prst="rect">
+            <a:avLst/>
+          </a:prstGeom>
+          <a:noFill/>
+          <a:ln>
+            <a:solidFill>
+              <a:schemeClr val="tx1"/>
+            </a:solidFill>
+          </a:ln>
+        </p:spPr>
+        <p:style>
+          <a:lnRef idx="2">
+            <a:schemeClr val="accent1">
+              <a:shade val="50000"/>
+            </a:schemeClr>
+          </a:lnRef>
+          <a:fillRef idx="1">
+            <a:schemeClr val="accent1"/>
+          </a:fillRef>
+          <a:effectRef idx="0">
+            <a:schemeClr val="accent1"/>
+          </a:effectRef>
+          <a:fontRef idx="minor">
+            <a:schemeClr val="lt1"/>
+          </a:fontRef>
+        </p:style>
+        <p:txBody>
+          <a:bodyPr rtlCol="0" anchor="ctr"/>
+          <a:lstStyle/>
+          <a:p>
+            <a:pPr algn="ctr"/>
+            <a:r>
+              <a:rPr lang="en-US" sz="1400" b="1" noProof="1">
+                <a:solidFill>
+                  <a:schemeClr val="tx1"/>
+                </a:solidFill>
+                <a:latin typeface="Fira Code" pitchFamily="1" charset="0"/>
+                <a:ea typeface="Fira Code" pitchFamily="1" charset="0"/>
+                <a:cs typeface="Fira Code" pitchFamily="1" charset="0"/>
+              </a:rPr>
+              <a:t>Model()</a:t>
+            </a:r>
+          </a:p>
+        </p:txBody>
+      </p:sp>
+      <p:sp>
+        <p:nvSpPr>
+          <p:cNvPr id="66" name="Rettangolo 19">
+            <a:extLst>
+              <a:ext uri="{FF2B5EF4-FFF2-40B4-BE49-F238E27FC236}">
+                <a16:creationId xmlns:a16="http://schemas.microsoft.com/office/drawing/2014/main" id="{BFC407C3-6D1C-6633-FE87-98E9E806E3B2}"/>
+              </a:ext>
+            </a:extLst>
+          </p:cNvPr>
+          <p:cNvSpPr/>
+          <p:nvPr/>
+        </p:nvSpPr>
+        <p:spPr>
+          <a:xfrm>
+            <a:off x="8639175" y="6426924"/>
+            <a:ext cx="1457802" cy="331371"/>
+          </a:xfrm>
+          <a:prstGeom prst="rect">
+            <a:avLst/>
+          </a:prstGeom>
+          <a:noFill/>
+          <a:ln>
+            <a:solidFill>
+              <a:schemeClr val="tx1"/>
+            </a:solidFill>
+          </a:ln>
+        </p:spPr>
+        <p:style>
+          <a:lnRef idx="2">
+            <a:schemeClr val="accent1">
+              <a:shade val="50000"/>
+            </a:schemeClr>
+          </a:lnRef>
+          <a:fillRef idx="1">
+            <a:schemeClr val="accent1"/>
+          </a:fillRef>
+          <a:effectRef idx="0">
+            <a:schemeClr val="accent1"/>
+          </a:effectRef>
+          <a:fontRef idx="minor">
+            <a:schemeClr val="lt1"/>
+          </a:fontRef>
+        </p:style>
+        <p:txBody>
+          <a:bodyPr rtlCol="0" anchor="ctr"/>
+          <a:lstStyle/>
+          <a:p>
+            <a:pPr algn="ctr"/>
+            <a:r>
+              <a:rPr lang="en-US" sz="1200" b="1" noProof="1">
+                <a:solidFill>
+                  <a:schemeClr val="tx1"/>
+                </a:solidFill>
+                <a:latin typeface="Fira Code" pitchFamily="1" charset="0"/>
+                <a:ea typeface="Fira Code" pitchFamily="1" charset="0"/>
+                <a:cs typeface="Fira Code" pitchFamily="1" charset="0"/>
+              </a:rPr>
+              <a:t>PBIManager()</a:t>
+            </a:r>
+          </a:p>
+        </p:txBody>
+      </p:sp>
+      <p:sp>
+        <p:nvSpPr>
+          <p:cNvPr id="67" name="Rettangolo 19">
+            <a:extLst>
+              <a:ext uri="{FF2B5EF4-FFF2-40B4-BE49-F238E27FC236}">
+                <a16:creationId xmlns:a16="http://schemas.microsoft.com/office/drawing/2014/main" id="{52B672EA-FCB8-9638-37BC-3CF5F2C34AA6}"/>
+              </a:ext>
+            </a:extLst>
+          </p:cNvPr>
+          <p:cNvSpPr/>
+          <p:nvPr/>
+        </p:nvSpPr>
+        <p:spPr>
+          <a:xfrm>
+            <a:off x="6771632" y="6426924"/>
+            <a:ext cx="1173060" cy="331371"/>
+          </a:xfrm>
+          <a:prstGeom prst="rect">
+            <a:avLst/>
+          </a:prstGeom>
+          <a:noFill/>
+          <a:ln>
+            <a:solidFill>
+              <a:schemeClr val="tx1"/>
+            </a:solidFill>
+          </a:ln>
+        </p:spPr>
+        <p:style>
+          <a:lnRef idx="2">
+            <a:schemeClr val="accent1">
+              <a:shade val="50000"/>
+            </a:schemeClr>
+          </a:lnRef>
+          <a:fillRef idx="1">
+            <a:schemeClr val="accent1"/>
+          </a:fillRef>
+          <a:effectRef idx="0">
+            <a:schemeClr val="accent1"/>
+          </a:effectRef>
+          <a:fontRef idx="minor">
+            <a:schemeClr val="lt1"/>
+          </a:fontRef>
+        </p:style>
+        <p:txBody>
+          <a:bodyPr rtlCol="0" anchor="ctr"/>
+          <a:lstStyle/>
+          <a:p>
+            <a:pPr algn="ctr"/>
+            <a:r>
+              <a:rPr lang="en-US" sz="1400" b="1" noProof="1">
+                <a:solidFill>
+                  <a:schemeClr val="tx1"/>
+                </a:solidFill>
+                <a:latin typeface="Fira Code" pitchFamily="1" charset="0"/>
+                <a:ea typeface="Fira Code" pitchFamily="1" charset="0"/>
+                <a:cs typeface="Fira Code" pitchFamily="1" charset="0"/>
+              </a:rPr>
+              <a:t>Core()</a:t>
+            </a:r>
+          </a:p>
+        </p:txBody>
+      </p:sp>
+      <p:cxnSp>
+        <p:nvCxnSpPr>
+          <p:cNvPr id="68" name="Connettore diritto 4">
+            <a:extLst>
+              <a:ext uri="{FF2B5EF4-FFF2-40B4-BE49-F238E27FC236}">
+                <a16:creationId xmlns:a16="http://schemas.microsoft.com/office/drawing/2014/main" id="{4EED7354-F839-576F-0933-30552CEF68C2}"/>
+              </a:ext>
+            </a:extLst>
+          </p:cNvPr>
+          <p:cNvCxnSpPr>
+            <a:cxnSpLocks/>
+          </p:cNvCxnSpPr>
+          <p:nvPr/>
+        </p:nvCxnSpPr>
+        <p:spPr>
+          <a:xfrm flipV="1">
+            <a:off x="6358531" y="5763564"/>
+            <a:ext cx="0" cy="294392"/>
+          </a:xfrm>
+          <a:prstGeom prst="line">
+            <a:avLst/>
+          </a:prstGeom>
+          <a:ln w="12700">
+            <a:solidFill>
+              <a:schemeClr val="tx1"/>
+            </a:solidFill>
+            <a:headEnd type="none" w="med" len="med"/>
+            <a:tailEnd type="arrow" w="med" len="med"/>
+          </a:ln>
+        </p:spPr>
+        <p:style>
+          <a:lnRef idx="1">
+            <a:schemeClr val="accent1"/>
+          </a:lnRef>
+          <a:fillRef idx="0">
+            <a:schemeClr val="accent1"/>
+          </a:fillRef>
+          <a:effectRef idx="0">
+            <a:schemeClr val="accent1"/>
+          </a:effectRef>
+          <a:fontRef idx="minor">
+            <a:schemeClr val="tx1"/>
+          </a:fontRef>
+        </p:style>
+      </p:cxnSp>
+      <p:sp>
+        <p:nvSpPr>
+          <p:cNvPr id="69" name="Rettangolo 19">
+            <a:extLst>
+              <a:ext uri="{FF2B5EF4-FFF2-40B4-BE49-F238E27FC236}">
+                <a16:creationId xmlns:a16="http://schemas.microsoft.com/office/drawing/2014/main" id="{F519C50E-4668-3DE5-0993-AAD9F4694826}"/>
+              </a:ext>
+            </a:extLst>
+          </p:cNvPr>
+          <p:cNvSpPr/>
+          <p:nvPr/>
+        </p:nvSpPr>
+        <p:spPr>
+          <a:xfrm>
+            <a:off x="3123481" y="6426926"/>
+            <a:ext cx="1049831" cy="331370"/>
+          </a:xfrm>
+          <a:prstGeom prst="rect">
+            <a:avLst/>
+          </a:prstGeom>
+          <a:noFill/>
+          <a:ln>
+            <a:solidFill>
+              <a:schemeClr val="tx1"/>
+            </a:solidFill>
+          </a:ln>
+        </p:spPr>
+        <p:style>
+          <a:lnRef idx="2">
+            <a:schemeClr val="accent1">
+              <a:shade val="50000"/>
+            </a:schemeClr>
+          </a:lnRef>
+          <a:fillRef idx="1">
+            <a:schemeClr val="accent1"/>
+          </a:fillRef>
+          <a:effectRef idx="0">
+            <a:schemeClr val="accent1"/>
+          </a:effectRef>
+          <a:fontRef idx="minor">
+            <a:schemeClr val="lt1"/>
+          </a:fontRef>
+        </p:style>
+        <p:txBody>
+          <a:bodyPr rtlCol="0" anchor="ctr"/>
+          <a:lstStyle/>
+          <a:p>
+            <a:pPr algn="ctr"/>
+            <a:r>
+              <a:rPr lang="en-US" sz="1200" b="1" noProof="1">
+                <a:solidFill>
+                  <a:schemeClr val="tx1"/>
+                </a:solidFill>
+                <a:latin typeface="Fira Code" pitchFamily="1" charset="0"/>
+                <a:ea typeface="Fira Code" pitchFamily="1" charset="0"/>
+                <a:cs typeface="Fira Code" pitchFamily="1" charset="0"/>
+              </a:rPr>
+              <a:t>Logger()</a:t>
+            </a:r>
+          </a:p>
+        </p:txBody>
+      </p:sp>
+      <p:sp>
+        <p:nvSpPr>
+          <p:cNvPr id="70" name="Rettangolo 19">
+            <a:extLst>
+              <a:ext uri="{FF2B5EF4-FFF2-40B4-BE49-F238E27FC236}">
+                <a16:creationId xmlns:a16="http://schemas.microsoft.com/office/drawing/2014/main" id="{5589EF4D-B617-993A-2ACB-B320ACF26DCF}"/>
+              </a:ext>
+            </a:extLst>
+          </p:cNvPr>
+          <p:cNvSpPr/>
+          <p:nvPr/>
+        </p:nvSpPr>
+        <p:spPr>
+          <a:xfrm>
+            <a:off x="3693546" y="7875232"/>
+            <a:ext cx="1371769" cy="323134"/>
+          </a:xfrm>
+          <a:prstGeom prst="rect">
+            <a:avLst/>
+          </a:prstGeom>
+          <a:noFill/>
+          <a:ln>
+            <a:solidFill>
+              <a:schemeClr val="tx1"/>
+            </a:solidFill>
+          </a:ln>
+        </p:spPr>
+        <p:style>
+          <a:lnRef idx="2">
+            <a:schemeClr val="accent1">
+              <a:shade val="50000"/>
+            </a:schemeClr>
+          </a:lnRef>
+          <a:fillRef idx="1">
+            <a:schemeClr val="accent1"/>
+          </a:fillRef>
+          <a:effectRef idx="0">
+            <a:schemeClr val="accent1"/>
+          </a:effectRef>
+          <a:fontRef idx="minor">
+            <a:schemeClr val="lt1"/>
+          </a:fontRef>
+        </p:style>
+        <p:txBody>
+          <a:bodyPr rtlCol="0" anchor="ctr"/>
+          <a:lstStyle/>
+          <a:p>
+            <a:pPr algn="ctr"/>
+            <a:r>
+              <a:rPr lang="en-US" sz="1200" b="1" noProof="1">
+                <a:solidFill>
+                  <a:schemeClr val="tx1"/>
+                </a:solidFill>
+                <a:latin typeface="Fira Code" pitchFamily="1" charset="0"/>
+                <a:ea typeface="Fira Code" pitchFamily="1" charset="0"/>
+                <a:cs typeface="Fira Code" pitchFamily="1" charset="0"/>
+              </a:rPr>
+              <a:t>SQLManager()</a:t>
+            </a:r>
+          </a:p>
+        </p:txBody>
+      </p:sp>
+      <p:sp>
+        <p:nvSpPr>
+          <p:cNvPr id="71" name="Right Brace 70">
+            <a:extLst>
+              <a:ext uri="{FF2B5EF4-FFF2-40B4-BE49-F238E27FC236}">
+                <a16:creationId xmlns:a16="http://schemas.microsoft.com/office/drawing/2014/main" id="{65019F4D-7A8E-AF72-013F-541689273227}"/>
+              </a:ext>
+            </a:extLst>
+          </p:cNvPr>
+          <p:cNvSpPr/>
+          <p:nvPr/>
+        </p:nvSpPr>
+        <p:spPr>
+          <a:xfrm rot="16200000">
+            <a:off x="6415234" y="3369883"/>
+            <a:ext cx="209643" cy="5696040"/>
+          </a:xfrm>
+          <a:prstGeom prst="rightBrace">
+            <a:avLst>
+              <a:gd name="adj1" fmla="val 8333"/>
+              <a:gd name="adj2" fmla="val 47216"/>
+            </a:avLst>
+          </a:prstGeom>
+          <a:ln w="12700">
+            <a:solidFill>
+              <a:schemeClr val="tx1"/>
+            </a:solidFill>
+            <a:headEnd type="none" w="med" len="med"/>
+            <a:tailEnd type="none" w="med" len="med"/>
+          </a:ln>
+        </p:spPr>
+        <p:style>
+          <a:lnRef idx="1">
+            <a:schemeClr val="accent1"/>
+          </a:lnRef>
+          <a:fillRef idx="0">
+            <a:schemeClr val="accent1"/>
+          </a:fillRef>
+          <a:effectRef idx="0">
+            <a:schemeClr val="accent1"/>
+          </a:effectRef>
+          <a:fontRef idx="minor">
+            <a:schemeClr val="tx1"/>
+          </a:fontRef>
+        </p:style>
+        <p:txBody>
+          <a:bodyPr rtlCol="0" anchor="ctr"/>
+          <a:lstStyle/>
+          <a:p>
+            <a:pPr algn="ctr"/>
+            <a:endParaRPr lang="en-US" noProof="1"/>
+          </a:p>
+        </p:txBody>
+      </p:sp>
+      <p:sp>
+        <p:nvSpPr>
+          <p:cNvPr id="72" name="Right Brace 71">
+            <a:extLst>
+              <a:ext uri="{FF2B5EF4-FFF2-40B4-BE49-F238E27FC236}">
+                <a16:creationId xmlns:a16="http://schemas.microsoft.com/office/drawing/2014/main" id="{2C36FE0F-6556-49E8-1908-CC70212A02C7}"/>
+              </a:ext>
+            </a:extLst>
+          </p:cNvPr>
+          <p:cNvSpPr/>
+          <p:nvPr/>
+        </p:nvSpPr>
+        <p:spPr>
+          <a:xfrm rot="16200000">
+            <a:off x="7424771" y="4492574"/>
+            <a:ext cx="209643" cy="6347275"/>
+          </a:xfrm>
+          <a:prstGeom prst="rightBrace">
+            <a:avLst>
+              <a:gd name="adj1" fmla="val 8333"/>
+              <a:gd name="adj2" fmla="val 47226"/>
+            </a:avLst>
+          </a:prstGeom>
+          <a:ln w="12700">
+            <a:solidFill>
+              <a:schemeClr val="tx1"/>
+            </a:solidFill>
+            <a:headEnd type="none" w="med" len="med"/>
+            <a:tailEnd type="none" w="med" len="med"/>
+          </a:ln>
+        </p:spPr>
+        <p:style>
+          <a:lnRef idx="1">
+            <a:schemeClr val="accent1"/>
+          </a:lnRef>
+          <a:fillRef idx="0">
+            <a:schemeClr val="accent1"/>
+          </a:fillRef>
+          <a:effectRef idx="0">
+            <a:schemeClr val="accent1"/>
+          </a:effectRef>
+          <a:fontRef idx="minor">
+            <a:schemeClr val="tx1"/>
+          </a:fontRef>
+        </p:style>
+        <p:txBody>
+          <a:bodyPr rtlCol="0" anchor="ctr"/>
+          <a:lstStyle/>
+          <a:p>
+            <a:pPr algn="ctr"/>
+            <a:endParaRPr lang="en-US" noProof="1"/>
+          </a:p>
+        </p:txBody>
+      </p:sp>
+      <p:sp>
+        <p:nvSpPr>
+          <p:cNvPr id="73" name="Rettangolo 19">
+            <a:extLst>
+              <a:ext uri="{FF2B5EF4-FFF2-40B4-BE49-F238E27FC236}">
+                <a16:creationId xmlns:a16="http://schemas.microsoft.com/office/drawing/2014/main" id="{8D88458D-44E9-9B5A-AEE0-D6ECE1DE4ED3}"/>
+              </a:ext>
+            </a:extLst>
+          </p:cNvPr>
+          <p:cNvSpPr/>
+          <p:nvPr/>
+        </p:nvSpPr>
+        <p:spPr>
+          <a:xfrm>
+            <a:off x="6713617" y="6774620"/>
+            <a:ext cx="1217792" cy="344911"/>
+          </a:xfrm>
+          <a:prstGeom prst="rect">
+            <a:avLst/>
+          </a:prstGeom>
+          <a:noFill/>
+          <a:ln>
+            <a:noFill/>
+          </a:ln>
+        </p:spPr>
+        <p:style>
+          <a:lnRef idx="2">
+            <a:schemeClr val="accent1">
+              <a:shade val="50000"/>
+            </a:schemeClr>
+          </a:lnRef>
+          <a:fillRef idx="1">
+            <a:schemeClr val="accent1"/>
+          </a:fillRef>
+          <a:effectRef idx="0">
+            <a:schemeClr val="accent1"/>
+          </a:effectRef>
+          <a:fontRef idx="minor">
+            <a:schemeClr val="lt1"/>
+          </a:fontRef>
+        </p:style>
+        <p:txBody>
+          <a:bodyPr rtlCol="0" anchor="ctr"/>
+          <a:lstStyle/>
+          <a:p>
+            <a:r>
+              <a:rPr lang="en-US" sz="1000" b="1" noProof="1">
+                <a:solidFill>
+                  <a:schemeClr val="tx1"/>
+                </a:solidFill>
+                <a:latin typeface="Fira Code" pitchFamily="1" charset="0"/>
+                <a:ea typeface="Fira Code" pitchFamily="1" charset="0"/>
+                <a:cs typeface="Fira Code" pitchFamily="1" charset="0"/>
+              </a:rPr>
+              <a:t>Logger()</a:t>
+            </a:r>
+          </a:p>
+          <a:p>
+            <a:r>
+              <a:rPr lang="en-US" sz="1000" b="1" noProof="1">
+                <a:solidFill>
+                  <a:schemeClr val="tx1"/>
+                </a:solidFill>
+                <a:latin typeface="Fira Code" pitchFamily="1" charset="0"/>
+                <a:ea typeface="Fira Code" pitchFamily="1" charset="0"/>
+                <a:cs typeface="Fira Code" pitchFamily="1" charset="0"/>
+              </a:rPr>
+              <a:t>FileManager()</a:t>
+            </a:r>
+          </a:p>
+        </p:txBody>
+      </p:sp>
+      <p:sp>
+        <p:nvSpPr>
+          <p:cNvPr id="74" name="Rettangolo 19">
+            <a:extLst>
+              <a:ext uri="{FF2B5EF4-FFF2-40B4-BE49-F238E27FC236}">
+                <a16:creationId xmlns:a16="http://schemas.microsoft.com/office/drawing/2014/main" id="{93B7FEF8-1126-2735-28D4-B6EFF71D03E5}"/>
+              </a:ext>
+            </a:extLst>
+          </p:cNvPr>
+          <p:cNvSpPr/>
+          <p:nvPr/>
+        </p:nvSpPr>
+        <p:spPr>
+          <a:xfrm>
+            <a:off x="8561947" y="6758295"/>
+            <a:ext cx="806129" cy="243765"/>
+          </a:xfrm>
+          <a:prstGeom prst="rect">
+            <a:avLst/>
+          </a:prstGeom>
+          <a:noFill/>
+          <a:ln>
+            <a:noFill/>
+          </a:ln>
+        </p:spPr>
+        <p:style>
+          <a:lnRef idx="2">
+            <a:schemeClr val="accent1">
+              <a:shade val="50000"/>
+            </a:schemeClr>
+          </a:lnRef>
+          <a:fillRef idx="1">
+            <a:schemeClr val="accent1"/>
+          </a:fillRef>
+          <a:effectRef idx="0">
+            <a:schemeClr val="accent1"/>
+          </a:effectRef>
+          <a:fontRef idx="minor">
+            <a:schemeClr val="lt1"/>
+          </a:fontRef>
+        </p:style>
+        <p:txBody>
+          <a:bodyPr rtlCol="0" anchor="ctr"/>
+          <a:lstStyle/>
+          <a:p>
+            <a:r>
+              <a:rPr lang="en-US" sz="1000" b="1" noProof="1">
+                <a:solidFill>
+                  <a:schemeClr val="tx1"/>
+                </a:solidFill>
+                <a:latin typeface="Fira Code" pitchFamily="1" charset="0"/>
+                <a:ea typeface="Fira Code" pitchFamily="1" charset="0"/>
+                <a:cs typeface="Fira Code" pitchFamily="1" charset="0"/>
+              </a:rPr>
+              <a:t>Logger()</a:t>
+            </a:r>
+          </a:p>
+        </p:txBody>
+      </p:sp>
+      <p:sp>
+        <p:nvSpPr>
+          <p:cNvPr id="75" name="Rettangolo 19">
+            <a:extLst>
+              <a:ext uri="{FF2B5EF4-FFF2-40B4-BE49-F238E27FC236}">
+                <a16:creationId xmlns:a16="http://schemas.microsoft.com/office/drawing/2014/main" id="{1F74D205-0242-2EBE-2B62-7CEBF237B71E}"/>
+              </a:ext>
+            </a:extLst>
+          </p:cNvPr>
+          <p:cNvSpPr/>
+          <p:nvPr/>
+        </p:nvSpPr>
+        <p:spPr>
+          <a:xfrm>
+            <a:off x="5851499" y="7875233"/>
+            <a:ext cx="883172" cy="323133"/>
+          </a:xfrm>
+          <a:prstGeom prst="rect">
+            <a:avLst/>
+          </a:prstGeom>
+          <a:noFill/>
+          <a:ln>
+            <a:solidFill>
+              <a:schemeClr val="tx1"/>
+            </a:solidFill>
+          </a:ln>
+        </p:spPr>
+        <p:style>
+          <a:lnRef idx="2">
+            <a:schemeClr val="accent1">
+              <a:shade val="50000"/>
+            </a:schemeClr>
+          </a:lnRef>
+          <a:fillRef idx="1">
+            <a:schemeClr val="accent1"/>
+          </a:fillRef>
+          <a:effectRef idx="0">
+            <a:schemeClr val="accent1"/>
+          </a:effectRef>
+          <a:fontRef idx="minor">
+            <a:schemeClr val="lt1"/>
+          </a:fontRef>
+        </p:style>
+        <p:txBody>
+          <a:bodyPr rtlCol="0" anchor="ctr"/>
+          <a:lstStyle/>
+          <a:p>
+            <a:pPr algn="ctr"/>
+            <a:r>
+              <a:rPr lang="en-US" sz="1200" b="1" noProof="1">
+                <a:solidFill>
+                  <a:schemeClr val="tx1"/>
+                </a:solidFill>
+                <a:latin typeface="Fira Code" pitchFamily="1" charset="0"/>
+                <a:ea typeface="Fira Code" pitchFamily="1" charset="0"/>
+                <a:cs typeface="Fira Code" pitchFamily="1" charset="0"/>
+              </a:rPr>
+              <a:t>Index()</a:t>
+            </a:r>
+          </a:p>
+        </p:txBody>
+      </p:sp>
+      <p:sp>
+        <p:nvSpPr>
+          <p:cNvPr id="76" name="Rettangolo 19">
+            <a:extLst>
+              <a:ext uri="{FF2B5EF4-FFF2-40B4-BE49-F238E27FC236}">
+                <a16:creationId xmlns:a16="http://schemas.microsoft.com/office/drawing/2014/main" id="{E8C53BF4-CE96-8ECD-242D-18D3594CD633}"/>
+              </a:ext>
+            </a:extLst>
+          </p:cNvPr>
+          <p:cNvSpPr/>
+          <p:nvPr/>
+        </p:nvSpPr>
+        <p:spPr>
+          <a:xfrm>
+            <a:off x="7671455" y="7875232"/>
+            <a:ext cx="1204326" cy="323133"/>
+          </a:xfrm>
+          <a:prstGeom prst="rect">
+            <a:avLst/>
+          </a:prstGeom>
+          <a:noFill/>
+          <a:ln>
+            <a:solidFill>
+              <a:schemeClr val="tx1"/>
+            </a:solidFill>
+          </a:ln>
+        </p:spPr>
+        <p:style>
+          <a:lnRef idx="2">
+            <a:schemeClr val="accent1">
+              <a:shade val="50000"/>
+            </a:schemeClr>
+          </a:lnRef>
+          <a:fillRef idx="1">
+            <a:schemeClr val="accent1"/>
+          </a:fillRef>
+          <a:effectRef idx="0">
+            <a:schemeClr val="accent1"/>
+          </a:effectRef>
+          <a:fontRef idx="minor">
+            <a:schemeClr val="lt1"/>
+          </a:fontRef>
+        </p:style>
+        <p:txBody>
+          <a:bodyPr rtlCol="0" anchor="ctr"/>
+          <a:lstStyle/>
+          <a:p>
+            <a:pPr algn="ctr"/>
+            <a:r>
+              <a:rPr lang="en-US" sz="1200" b="1" noProof="1">
+                <a:solidFill>
+                  <a:schemeClr val="tx1"/>
+                </a:solidFill>
+                <a:latin typeface="Fira Code" pitchFamily="1" charset="0"/>
+                <a:ea typeface="Fira Code" pitchFamily="1" charset="0"/>
+                <a:cs typeface="Fira Code" pitchFamily="1" charset="0"/>
+              </a:rPr>
+              <a:t>Database()</a:t>
+            </a:r>
+          </a:p>
+        </p:txBody>
+      </p:sp>
+      <p:sp>
+        <p:nvSpPr>
+          <p:cNvPr id="77" name="Rettangolo 19">
+            <a:extLst>
+              <a:ext uri="{FF2B5EF4-FFF2-40B4-BE49-F238E27FC236}">
+                <a16:creationId xmlns:a16="http://schemas.microsoft.com/office/drawing/2014/main" id="{FBF4BAFE-A920-6BF1-002E-ECAB96A7CDA7}"/>
+              </a:ext>
+            </a:extLst>
+          </p:cNvPr>
+          <p:cNvSpPr/>
+          <p:nvPr/>
+        </p:nvSpPr>
+        <p:spPr>
+          <a:xfrm>
+            <a:off x="10085238" y="7876605"/>
+            <a:ext cx="1204326" cy="323133"/>
+          </a:xfrm>
+          <a:prstGeom prst="rect">
+            <a:avLst/>
+          </a:prstGeom>
+          <a:noFill/>
+          <a:ln>
+            <a:solidFill>
+              <a:schemeClr val="tx1"/>
+            </a:solidFill>
+          </a:ln>
+        </p:spPr>
+        <p:style>
+          <a:lnRef idx="2">
+            <a:schemeClr val="accent1">
+              <a:shade val="50000"/>
+            </a:schemeClr>
+          </a:lnRef>
+          <a:fillRef idx="1">
+            <a:schemeClr val="accent1"/>
+          </a:fillRef>
+          <a:effectRef idx="0">
+            <a:schemeClr val="accent1"/>
+          </a:effectRef>
+          <a:fontRef idx="minor">
+            <a:schemeClr val="lt1"/>
+          </a:fontRef>
+        </p:style>
+        <p:txBody>
+          <a:bodyPr rtlCol="0" anchor="ctr"/>
+          <a:lstStyle/>
+          <a:p>
+            <a:pPr algn="ctr"/>
+            <a:r>
+              <a:rPr lang="en-US" sz="1200" b="1" noProof="1">
+                <a:solidFill>
+                  <a:schemeClr val="tx1"/>
+                </a:solidFill>
+                <a:latin typeface="Fira Code" pitchFamily="1" charset="0"/>
+                <a:ea typeface="Fira Code" pitchFamily="1" charset="0"/>
+                <a:cs typeface="Fira Code" pitchFamily="1" charset="0"/>
+              </a:rPr>
+              <a:t>Problem()</a:t>
+            </a:r>
+          </a:p>
+        </p:txBody>
+      </p:sp>
+      <p:sp>
+        <p:nvSpPr>
+          <p:cNvPr id="81" name="Rettangolo 19">
+            <a:extLst>
+              <a:ext uri="{FF2B5EF4-FFF2-40B4-BE49-F238E27FC236}">
+                <a16:creationId xmlns:a16="http://schemas.microsoft.com/office/drawing/2014/main" id="{FA764A8B-9D3F-180C-F5AC-76E2E2B96027}"/>
+              </a:ext>
+            </a:extLst>
+          </p:cNvPr>
+          <p:cNvSpPr/>
+          <p:nvPr/>
+        </p:nvSpPr>
+        <p:spPr>
+          <a:xfrm>
+            <a:off x="3672035" y="8223179"/>
+            <a:ext cx="806129" cy="243765"/>
+          </a:xfrm>
+          <a:prstGeom prst="rect">
+            <a:avLst/>
+          </a:prstGeom>
+          <a:noFill/>
+          <a:ln>
+            <a:noFill/>
+          </a:ln>
+        </p:spPr>
+        <p:style>
+          <a:lnRef idx="2">
+            <a:schemeClr val="accent1">
+              <a:shade val="50000"/>
+            </a:schemeClr>
+          </a:lnRef>
+          <a:fillRef idx="1">
+            <a:schemeClr val="accent1"/>
+          </a:fillRef>
+          <a:effectRef idx="0">
+            <a:schemeClr val="accent1"/>
+          </a:effectRef>
+          <a:fontRef idx="minor">
+            <a:schemeClr val="lt1"/>
+          </a:fontRef>
+        </p:style>
+        <p:txBody>
+          <a:bodyPr rtlCol="0" anchor="ctr"/>
+          <a:lstStyle/>
+          <a:p>
+            <a:r>
+              <a:rPr lang="en-US" sz="1000" b="1" noProof="1">
+                <a:solidFill>
+                  <a:schemeClr val="tx1"/>
+                </a:solidFill>
+                <a:latin typeface="Fira Code" pitchFamily="1" charset="0"/>
+                <a:ea typeface="Fira Code" pitchFamily="1" charset="0"/>
+                <a:cs typeface="Fira Code" pitchFamily="1" charset="0"/>
+              </a:rPr>
+              <a:t>Logger()</a:t>
+            </a:r>
+          </a:p>
+        </p:txBody>
+      </p:sp>
+      <p:sp>
+        <p:nvSpPr>
+          <p:cNvPr id="82" name="Rettangolo 19">
+            <a:extLst>
+              <a:ext uri="{FF2B5EF4-FFF2-40B4-BE49-F238E27FC236}">
+                <a16:creationId xmlns:a16="http://schemas.microsoft.com/office/drawing/2014/main" id="{322F9839-B26F-483D-00B7-135A040666FF}"/>
+              </a:ext>
+            </a:extLst>
+          </p:cNvPr>
+          <p:cNvSpPr/>
+          <p:nvPr/>
+        </p:nvSpPr>
+        <p:spPr>
+          <a:xfrm>
+            <a:off x="4741241" y="6426926"/>
+            <a:ext cx="1455941" cy="331370"/>
+          </a:xfrm>
+          <a:prstGeom prst="rect">
+            <a:avLst/>
+          </a:prstGeom>
+          <a:noFill/>
+          <a:ln>
+            <a:solidFill>
+              <a:schemeClr val="tx1"/>
+            </a:solidFill>
+          </a:ln>
+        </p:spPr>
+        <p:style>
+          <a:lnRef idx="2">
+            <a:schemeClr val="accent1">
+              <a:shade val="50000"/>
+            </a:schemeClr>
+          </a:lnRef>
+          <a:fillRef idx="1">
+            <a:schemeClr val="accent1"/>
+          </a:fillRef>
+          <a:effectRef idx="0">
+            <a:schemeClr val="accent1"/>
+          </a:effectRef>
+          <a:fontRef idx="minor">
+            <a:schemeClr val="lt1"/>
+          </a:fontRef>
+        </p:style>
+        <p:txBody>
+          <a:bodyPr rtlCol="0" anchor="ctr"/>
+          <a:lstStyle/>
+          <a:p>
+            <a:pPr algn="ctr"/>
+            <a:r>
+              <a:rPr lang="en-US" sz="1200" b="1" noProof="1">
+                <a:solidFill>
+                  <a:schemeClr val="tx1"/>
+                </a:solidFill>
+                <a:latin typeface="Fira Code" pitchFamily="1" charset="0"/>
+                <a:ea typeface="Fira Code" pitchFamily="1" charset="0"/>
+                <a:cs typeface="Fira Code" pitchFamily="1" charset="0"/>
+              </a:rPr>
+              <a:t>FileManager()</a:t>
+            </a:r>
+          </a:p>
+        </p:txBody>
+      </p:sp>
+      <p:sp>
+        <p:nvSpPr>
+          <p:cNvPr id="85" name="Rettangolo 19">
+            <a:extLst>
+              <a:ext uri="{FF2B5EF4-FFF2-40B4-BE49-F238E27FC236}">
+                <a16:creationId xmlns:a16="http://schemas.microsoft.com/office/drawing/2014/main" id="{095503C4-5E65-8482-CC1B-54F52C8316B5}"/>
+              </a:ext>
+            </a:extLst>
+          </p:cNvPr>
+          <p:cNvSpPr/>
+          <p:nvPr/>
+        </p:nvSpPr>
+        <p:spPr>
+          <a:xfrm>
+            <a:off x="5793436" y="8239762"/>
+            <a:ext cx="1217792" cy="344911"/>
+          </a:xfrm>
+          <a:prstGeom prst="rect">
+            <a:avLst/>
+          </a:prstGeom>
+          <a:noFill/>
+          <a:ln>
+            <a:noFill/>
+          </a:ln>
+        </p:spPr>
+        <p:style>
+          <a:lnRef idx="2">
+            <a:schemeClr val="accent1">
+              <a:shade val="50000"/>
+            </a:schemeClr>
+          </a:lnRef>
+          <a:fillRef idx="1">
+            <a:schemeClr val="accent1"/>
+          </a:fillRef>
+          <a:effectRef idx="0">
+            <a:schemeClr val="accent1"/>
+          </a:effectRef>
+          <a:fontRef idx="minor">
+            <a:schemeClr val="lt1"/>
+          </a:fontRef>
+        </p:style>
+        <p:txBody>
+          <a:bodyPr rtlCol="0" anchor="ctr"/>
+          <a:lstStyle/>
+          <a:p>
+            <a:r>
+              <a:rPr lang="en-US" sz="1000" b="1" noProof="1">
+                <a:solidFill>
+                  <a:schemeClr val="tx1"/>
+                </a:solidFill>
+                <a:latin typeface="Fira Code" pitchFamily="1" charset="0"/>
+                <a:ea typeface="Fira Code" pitchFamily="1" charset="0"/>
+                <a:cs typeface="Fira Code" pitchFamily="1" charset="0"/>
+              </a:rPr>
+              <a:t>Logger()</a:t>
+            </a:r>
+          </a:p>
+          <a:p>
+            <a:r>
+              <a:rPr lang="en-US" sz="1000" b="1" noProof="1">
+                <a:solidFill>
+                  <a:schemeClr val="tx1"/>
+                </a:solidFill>
+                <a:latin typeface="Fira Code" pitchFamily="1" charset="0"/>
+                <a:ea typeface="Fira Code" pitchFamily="1" charset="0"/>
+                <a:cs typeface="Fira Code" pitchFamily="1" charset="0"/>
+              </a:rPr>
+              <a:t>FileManager()</a:t>
+            </a:r>
+          </a:p>
+        </p:txBody>
+      </p:sp>
+      <p:sp>
+        <p:nvSpPr>
+          <p:cNvPr id="86" name="Rettangolo 19">
+            <a:extLst>
+              <a:ext uri="{FF2B5EF4-FFF2-40B4-BE49-F238E27FC236}">
+                <a16:creationId xmlns:a16="http://schemas.microsoft.com/office/drawing/2014/main" id="{1F265DA9-A5E9-C00B-639F-E3357B002176}"/>
+              </a:ext>
+            </a:extLst>
+          </p:cNvPr>
+          <p:cNvSpPr/>
+          <p:nvPr/>
+        </p:nvSpPr>
+        <p:spPr>
+          <a:xfrm>
+            <a:off x="7632008" y="8233147"/>
+            <a:ext cx="1217792" cy="646328"/>
+          </a:xfrm>
+          <a:prstGeom prst="rect">
+            <a:avLst/>
+          </a:prstGeom>
+          <a:noFill/>
+          <a:ln>
+            <a:noFill/>
+          </a:ln>
+        </p:spPr>
+        <p:style>
+          <a:lnRef idx="2">
+            <a:schemeClr val="accent1">
+              <a:shade val="50000"/>
+            </a:schemeClr>
+          </a:lnRef>
+          <a:fillRef idx="1">
+            <a:schemeClr val="accent1"/>
+          </a:fillRef>
+          <a:effectRef idx="0">
+            <a:schemeClr val="accent1"/>
+          </a:effectRef>
+          <a:fontRef idx="minor">
+            <a:schemeClr val="lt1"/>
+          </a:fontRef>
+        </p:style>
+        <p:txBody>
+          <a:bodyPr rtlCol="0" anchor="ctr"/>
+          <a:lstStyle/>
+          <a:p>
+            <a:r>
+              <a:rPr lang="en-US" sz="1000" b="1" noProof="1">
+                <a:solidFill>
+                  <a:schemeClr val="tx1"/>
+                </a:solidFill>
+                <a:latin typeface="Fira Code" pitchFamily="1" charset="0"/>
+                <a:ea typeface="Fira Code" pitchFamily="1" charset="0"/>
+                <a:cs typeface="Fira Code" pitchFamily="1" charset="0"/>
+              </a:rPr>
+              <a:t>Logger()</a:t>
+            </a:r>
+          </a:p>
+          <a:p>
+            <a:r>
+              <a:rPr lang="en-US" sz="1000" b="1" noProof="1">
+                <a:solidFill>
+                  <a:schemeClr val="tx1"/>
+                </a:solidFill>
+                <a:latin typeface="Fira Code" pitchFamily="1" charset="0"/>
+                <a:ea typeface="Fira Code" pitchFamily="1" charset="0"/>
+                <a:cs typeface="Fira Code" pitchFamily="1" charset="0"/>
+              </a:rPr>
+              <a:t>FileManager()</a:t>
+            </a:r>
+          </a:p>
+          <a:p>
+            <a:r>
+              <a:rPr lang="en-US" sz="1000" b="1" noProof="1">
+                <a:solidFill>
+                  <a:schemeClr val="tx1"/>
+                </a:solidFill>
+                <a:latin typeface="Fira Code" pitchFamily="1" charset="0"/>
+                <a:ea typeface="Fira Code" pitchFamily="1" charset="0"/>
+                <a:cs typeface="Fira Code" pitchFamily="1" charset="0"/>
+              </a:rPr>
+              <a:t>SQLManager()</a:t>
+            </a:r>
+          </a:p>
+          <a:p>
+            <a:r>
+              <a:rPr lang="en-US" sz="1000" b="1" noProof="1">
+                <a:solidFill>
+                  <a:schemeClr val="tx1"/>
+                </a:solidFill>
+                <a:latin typeface="Fira Code" pitchFamily="1" charset="0"/>
+                <a:ea typeface="Fira Code" pitchFamily="1" charset="0"/>
+                <a:cs typeface="Fira Code" pitchFamily="1" charset="0"/>
+              </a:rPr>
+              <a:t>Index()</a:t>
+            </a:r>
+          </a:p>
+        </p:txBody>
+      </p:sp>
+      <p:sp>
+        <p:nvSpPr>
+          <p:cNvPr id="87" name="Rettangolo 19">
+            <a:extLst>
+              <a:ext uri="{FF2B5EF4-FFF2-40B4-BE49-F238E27FC236}">
+                <a16:creationId xmlns:a16="http://schemas.microsoft.com/office/drawing/2014/main" id="{5B3FEDA5-6FA0-C8AD-00A9-A7911D136BBB}"/>
+              </a:ext>
+            </a:extLst>
+          </p:cNvPr>
+          <p:cNvSpPr/>
+          <p:nvPr/>
+        </p:nvSpPr>
+        <p:spPr>
+          <a:xfrm>
+            <a:off x="10060658" y="8233147"/>
+            <a:ext cx="1217792" cy="527668"/>
+          </a:xfrm>
+          <a:prstGeom prst="rect">
+            <a:avLst/>
+          </a:prstGeom>
+          <a:noFill/>
+          <a:ln>
+            <a:noFill/>
+          </a:ln>
+        </p:spPr>
+        <p:style>
+          <a:lnRef idx="2">
+            <a:schemeClr val="accent1">
+              <a:shade val="50000"/>
+            </a:schemeClr>
+          </a:lnRef>
+          <a:fillRef idx="1">
+            <a:schemeClr val="accent1"/>
+          </a:fillRef>
+          <a:effectRef idx="0">
+            <a:schemeClr val="accent1"/>
+          </a:effectRef>
+          <a:fontRef idx="minor">
+            <a:schemeClr val="lt1"/>
+          </a:fontRef>
+        </p:style>
+        <p:txBody>
+          <a:bodyPr rtlCol="0" anchor="ctr"/>
+          <a:lstStyle/>
+          <a:p>
+            <a:r>
+              <a:rPr lang="en-US" sz="1000" b="1" noProof="1">
+                <a:solidFill>
+                  <a:schemeClr val="tx1"/>
+                </a:solidFill>
+                <a:latin typeface="Fira Code" pitchFamily="1" charset="0"/>
+                <a:ea typeface="Fira Code" pitchFamily="1" charset="0"/>
+                <a:cs typeface="Fira Code" pitchFamily="1" charset="0"/>
+              </a:rPr>
+              <a:t>Logger()</a:t>
+            </a:r>
+          </a:p>
+          <a:p>
+            <a:r>
+              <a:rPr lang="en-US" sz="1000" b="1" noProof="1">
+                <a:solidFill>
+                  <a:schemeClr val="tx1"/>
+                </a:solidFill>
+                <a:latin typeface="Fira Code" pitchFamily="1" charset="0"/>
+                <a:ea typeface="Fira Code" pitchFamily="1" charset="0"/>
+                <a:cs typeface="Fira Code" pitchFamily="1" charset="0"/>
+              </a:rPr>
+              <a:t>FileManager()</a:t>
+            </a:r>
+          </a:p>
+          <a:p>
+            <a:r>
+              <a:rPr lang="en-US" sz="1000" b="1" noProof="1">
+                <a:solidFill>
+                  <a:schemeClr val="tx1"/>
+                </a:solidFill>
+                <a:latin typeface="Fira Code" pitchFamily="1" charset="0"/>
+                <a:ea typeface="Fira Code" pitchFamily="1" charset="0"/>
+                <a:cs typeface="Fira Code" pitchFamily="1" charset="0"/>
+              </a:rPr>
+              <a:t>Index()</a:t>
+            </a:r>
+          </a:p>
+        </p:txBody>
+      </p:sp>
+      <p:cxnSp>
+        <p:nvCxnSpPr>
+          <p:cNvPr id="88" name="Connettore diritto 4">
+            <a:extLst>
+              <a:ext uri="{FF2B5EF4-FFF2-40B4-BE49-F238E27FC236}">
+                <a16:creationId xmlns:a16="http://schemas.microsoft.com/office/drawing/2014/main" id="{EDA0EC3C-0FC2-E1EB-9CD4-16806EB504D3}"/>
+              </a:ext>
+            </a:extLst>
+          </p:cNvPr>
+          <p:cNvCxnSpPr>
+            <a:cxnSpLocks/>
+          </p:cNvCxnSpPr>
+          <p:nvPr/>
+        </p:nvCxnSpPr>
+        <p:spPr>
+          <a:xfrm flipV="1">
+            <a:off x="6297550" y="8678754"/>
+            <a:ext cx="0" cy="363071"/>
+          </a:xfrm>
+          <a:prstGeom prst="line">
+            <a:avLst/>
+          </a:prstGeom>
+          <a:ln w="12700">
+            <a:solidFill>
+              <a:schemeClr val="tx1"/>
+            </a:solidFill>
+            <a:headEnd type="none" w="med" len="med"/>
+            <a:tailEnd type="arrow" w="med" len="med"/>
+          </a:ln>
+        </p:spPr>
+        <p:style>
+          <a:lnRef idx="1">
+            <a:schemeClr val="accent1"/>
+          </a:lnRef>
+          <a:fillRef idx="0">
+            <a:schemeClr val="accent1"/>
+          </a:fillRef>
+          <a:effectRef idx="0">
+            <a:schemeClr val="accent1"/>
+          </a:effectRef>
+          <a:fontRef idx="minor">
+            <a:schemeClr val="tx1"/>
+          </a:fontRef>
+        </p:style>
+      </p:cxnSp>
+      <p:sp>
+        <p:nvSpPr>
+          <p:cNvPr id="89" name="Right Brace 88">
+            <a:extLst>
+              <a:ext uri="{FF2B5EF4-FFF2-40B4-BE49-F238E27FC236}">
+                <a16:creationId xmlns:a16="http://schemas.microsoft.com/office/drawing/2014/main" id="{4B3721DD-B02A-6470-264D-DEBEEA7894AB}"/>
+              </a:ext>
+            </a:extLst>
+          </p:cNvPr>
+          <p:cNvSpPr/>
+          <p:nvPr/>
+        </p:nvSpPr>
+        <p:spPr>
+          <a:xfrm rot="16200000">
+            <a:off x="6476776" y="7254834"/>
+            <a:ext cx="209644" cy="3890464"/>
+          </a:xfrm>
+          <a:prstGeom prst="rightBrace">
+            <a:avLst>
+              <a:gd name="adj1" fmla="val 8333"/>
+              <a:gd name="adj2" fmla="val 42592"/>
+            </a:avLst>
+          </a:prstGeom>
+          <a:ln w="12700">
+            <a:solidFill>
+              <a:schemeClr val="tx1"/>
+            </a:solidFill>
+            <a:headEnd type="none" w="med" len="med"/>
+            <a:tailEnd type="none" w="med" len="med"/>
+          </a:ln>
+        </p:spPr>
+        <p:style>
+          <a:lnRef idx="1">
+            <a:schemeClr val="accent1"/>
+          </a:lnRef>
+          <a:fillRef idx="0">
+            <a:schemeClr val="accent1"/>
+          </a:fillRef>
+          <a:effectRef idx="0">
+            <a:schemeClr val="accent1"/>
+          </a:effectRef>
+          <a:fontRef idx="minor">
+            <a:schemeClr val="tx1"/>
+          </a:fontRef>
+        </p:style>
+        <p:txBody>
+          <a:bodyPr rtlCol="0" anchor="ctr"/>
+          <a:lstStyle/>
+          <a:p>
+            <a:pPr algn="ctr"/>
+            <a:endParaRPr lang="en-US" noProof="1"/>
+          </a:p>
+        </p:txBody>
+      </p:sp>
+      <p:sp>
+        <p:nvSpPr>
+          <p:cNvPr id="90" name="Rettangolo 19">
+            <a:extLst>
+              <a:ext uri="{FF2B5EF4-FFF2-40B4-BE49-F238E27FC236}">
+                <a16:creationId xmlns:a16="http://schemas.microsoft.com/office/drawing/2014/main" id="{C5F027DC-2478-31D8-67E6-35C15FEF2E14}"/>
+              </a:ext>
+            </a:extLst>
+          </p:cNvPr>
+          <p:cNvSpPr/>
+          <p:nvPr/>
+        </p:nvSpPr>
+        <p:spPr>
+          <a:xfrm>
+            <a:off x="4090294" y="9427483"/>
+            <a:ext cx="1205206" cy="323133"/>
+          </a:xfrm>
+          <a:prstGeom prst="rect">
+            <a:avLst/>
+          </a:prstGeom>
+          <a:noFill/>
+          <a:ln>
+            <a:solidFill>
+              <a:schemeClr val="tx1"/>
+            </a:solidFill>
+          </a:ln>
+        </p:spPr>
+        <p:style>
+          <a:lnRef idx="2">
+            <a:schemeClr val="accent1">
+              <a:shade val="50000"/>
+            </a:schemeClr>
+          </a:lnRef>
+          <a:fillRef idx="1">
+            <a:schemeClr val="accent1"/>
+          </a:fillRef>
+          <a:effectRef idx="0">
+            <a:schemeClr val="accent1"/>
+          </a:effectRef>
+          <a:fontRef idx="minor">
+            <a:schemeClr val="lt1"/>
+          </a:fontRef>
+        </p:style>
+        <p:txBody>
+          <a:bodyPr rtlCol="0" anchor="ctr"/>
+          <a:lstStyle/>
+          <a:p>
+            <a:pPr algn="ctr"/>
+            <a:r>
+              <a:rPr lang="en-US" sz="1200" b="1" noProof="1">
+                <a:solidFill>
+                  <a:schemeClr val="tx1"/>
+                </a:solidFill>
+                <a:latin typeface="Fira Code" pitchFamily="1" charset="0"/>
+                <a:ea typeface="Fira Code" pitchFamily="1" charset="0"/>
+                <a:cs typeface="Fira Code" pitchFamily="1" charset="0"/>
+              </a:rPr>
+              <a:t>SetTable()</a:t>
+            </a:r>
+          </a:p>
+        </p:txBody>
+      </p:sp>
+      <p:sp>
+        <p:nvSpPr>
+          <p:cNvPr id="91" name="Rettangolo 19">
+            <a:extLst>
+              <a:ext uri="{FF2B5EF4-FFF2-40B4-BE49-F238E27FC236}">
+                <a16:creationId xmlns:a16="http://schemas.microsoft.com/office/drawing/2014/main" id="{2E7FE958-56F6-604C-E3D8-D0ABDC1067CE}"/>
+              </a:ext>
+            </a:extLst>
+          </p:cNvPr>
+          <p:cNvSpPr/>
+          <p:nvPr/>
+        </p:nvSpPr>
+        <p:spPr>
+          <a:xfrm>
+            <a:off x="5641141" y="9427483"/>
+            <a:ext cx="1338018" cy="323133"/>
+          </a:xfrm>
+          <a:prstGeom prst="rect">
+            <a:avLst/>
+          </a:prstGeom>
+          <a:noFill/>
+          <a:ln>
+            <a:solidFill>
+              <a:schemeClr val="tx1"/>
+            </a:solidFill>
+          </a:ln>
+        </p:spPr>
+        <p:style>
+          <a:lnRef idx="2">
+            <a:schemeClr val="accent1">
+              <a:shade val="50000"/>
+            </a:schemeClr>
+          </a:lnRef>
+          <a:fillRef idx="1">
+            <a:schemeClr val="accent1"/>
+          </a:fillRef>
+          <a:effectRef idx="0">
+            <a:schemeClr val="accent1"/>
+          </a:effectRef>
+          <a:fontRef idx="minor">
+            <a:schemeClr val="lt1"/>
+          </a:fontRef>
+        </p:style>
+        <p:txBody>
+          <a:bodyPr rtlCol="0" anchor="ctr"/>
+          <a:lstStyle/>
+          <a:p>
+            <a:pPr algn="ctr"/>
+            <a:r>
+              <a:rPr lang="en-US" sz="1200" b="1" noProof="1">
+                <a:solidFill>
+                  <a:schemeClr val="tx1"/>
+                </a:solidFill>
+                <a:latin typeface="Fira Code" pitchFamily="1" charset="0"/>
+                <a:ea typeface="Fira Code" pitchFamily="1" charset="0"/>
+                <a:cs typeface="Fira Code" pitchFamily="1" charset="0"/>
+              </a:rPr>
+              <a:t>DataTable()</a:t>
+            </a:r>
+          </a:p>
+        </p:txBody>
+      </p:sp>
+      <p:sp>
+        <p:nvSpPr>
+          <p:cNvPr id="92" name="Rettangolo 19">
+            <a:extLst>
+              <a:ext uri="{FF2B5EF4-FFF2-40B4-BE49-F238E27FC236}">
+                <a16:creationId xmlns:a16="http://schemas.microsoft.com/office/drawing/2014/main" id="{2E574F1C-0731-1A48-FEEB-22C035EB7FDA}"/>
+              </a:ext>
+            </a:extLst>
+          </p:cNvPr>
+          <p:cNvSpPr/>
+          <p:nvPr/>
+        </p:nvSpPr>
+        <p:spPr>
+          <a:xfrm>
+            <a:off x="4056587" y="9787001"/>
+            <a:ext cx="806129" cy="243765"/>
+          </a:xfrm>
+          <a:prstGeom prst="rect">
+            <a:avLst/>
+          </a:prstGeom>
+          <a:noFill/>
+          <a:ln>
+            <a:noFill/>
+          </a:ln>
+        </p:spPr>
+        <p:style>
+          <a:lnRef idx="2">
+            <a:schemeClr val="accent1">
+              <a:shade val="50000"/>
+            </a:schemeClr>
+          </a:lnRef>
+          <a:fillRef idx="1">
+            <a:schemeClr val="accent1"/>
+          </a:fillRef>
+          <a:effectRef idx="0">
+            <a:schemeClr val="accent1"/>
+          </a:effectRef>
+          <a:fontRef idx="minor">
+            <a:schemeClr val="lt1"/>
+          </a:fontRef>
+        </p:style>
+        <p:txBody>
+          <a:bodyPr rtlCol="0" anchor="ctr"/>
+          <a:lstStyle/>
+          <a:p>
+            <a:r>
+              <a:rPr lang="en-US" sz="1000" b="1" noProof="1">
+                <a:solidFill>
+                  <a:schemeClr val="tx1"/>
+                </a:solidFill>
+                <a:latin typeface="Fira Code" pitchFamily="1" charset="0"/>
+                <a:ea typeface="Fira Code" pitchFamily="1" charset="0"/>
+                <a:cs typeface="Fira Code" pitchFamily="1" charset="0"/>
+              </a:rPr>
+              <a:t>Logger()</a:t>
+            </a:r>
+          </a:p>
+        </p:txBody>
+      </p:sp>
+      <p:sp>
+        <p:nvSpPr>
+          <p:cNvPr id="93" name="Rettangolo 19">
+            <a:extLst>
+              <a:ext uri="{FF2B5EF4-FFF2-40B4-BE49-F238E27FC236}">
+                <a16:creationId xmlns:a16="http://schemas.microsoft.com/office/drawing/2014/main" id="{5FFB443D-5170-1F5D-AE45-282E2F7EA141}"/>
+              </a:ext>
+            </a:extLst>
+          </p:cNvPr>
+          <p:cNvSpPr/>
+          <p:nvPr/>
+        </p:nvSpPr>
+        <p:spPr>
+          <a:xfrm>
+            <a:off x="5678757" y="9787001"/>
+            <a:ext cx="806129" cy="243765"/>
+          </a:xfrm>
+          <a:prstGeom prst="rect">
+            <a:avLst/>
+          </a:prstGeom>
+          <a:noFill/>
+          <a:ln>
+            <a:noFill/>
+          </a:ln>
+        </p:spPr>
+        <p:style>
+          <a:lnRef idx="2">
+            <a:schemeClr val="accent1">
+              <a:shade val="50000"/>
+            </a:schemeClr>
+          </a:lnRef>
+          <a:fillRef idx="1">
+            <a:schemeClr val="accent1"/>
+          </a:fillRef>
+          <a:effectRef idx="0">
+            <a:schemeClr val="accent1"/>
+          </a:effectRef>
+          <a:fontRef idx="minor">
+            <a:schemeClr val="lt1"/>
+          </a:fontRef>
+        </p:style>
+        <p:txBody>
+          <a:bodyPr rtlCol="0" anchor="ctr"/>
+          <a:lstStyle/>
+          <a:p>
+            <a:r>
+              <a:rPr lang="en-US" sz="1000" b="1" noProof="1">
+                <a:solidFill>
+                  <a:schemeClr val="tx1"/>
+                </a:solidFill>
+                <a:latin typeface="Fira Code" pitchFamily="1" charset="0"/>
+                <a:ea typeface="Fira Code" pitchFamily="1" charset="0"/>
+                <a:cs typeface="Fira Code" pitchFamily="1" charset="0"/>
+              </a:rPr>
+              <a:t>Logger()</a:t>
+            </a:r>
+          </a:p>
+        </p:txBody>
+      </p:sp>
+      <p:sp>
+        <p:nvSpPr>
+          <p:cNvPr id="94" name="Rettangolo 19">
+            <a:extLst>
+              <a:ext uri="{FF2B5EF4-FFF2-40B4-BE49-F238E27FC236}">
+                <a16:creationId xmlns:a16="http://schemas.microsoft.com/office/drawing/2014/main" id="{EE1B8A08-DF4E-3490-FAA1-95B75671FC79}"/>
+              </a:ext>
+            </a:extLst>
+          </p:cNvPr>
+          <p:cNvSpPr/>
+          <p:nvPr/>
+        </p:nvSpPr>
+        <p:spPr>
+          <a:xfrm>
+            <a:off x="4741241" y="6758295"/>
+            <a:ext cx="806129" cy="243765"/>
+          </a:xfrm>
+          <a:prstGeom prst="rect">
+            <a:avLst/>
+          </a:prstGeom>
+          <a:noFill/>
+          <a:ln>
+            <a:noFill/>
+          </a:ln>
+        </p:spPr>
+        <p:style>
+          <a:lnRef idx="2">
+            <a:schemeClr val="accent1">
+              <a:shade val="50000"/>
+            </a:schemeClr>
+          </a:lnRef>
+          <a:fillRef idx="1">
+            <a:schemeClr val="accent1"/>
+          </a:fillRef>
+          <a:effectRef idx="0">
+            <a:schemeClr val="accent1"/>
+          </a:effectRef>
+          <a:fontRef idx="minor">
+            <a:schemeClr val="lt1"/>
+          </a:fontRef>
+        </p:style>
+        <p:txBody>
+          <a:bodyPr rtlCol="0" anchor="ctr"/>
+          <a:lstStyle/>
+          <a:p>
+            <a:r>
+              <a:rPr lang="en-US" sz="1000" b="1" noProof="1">
+                <a:solidFill>
+                  <a:schemeClr val="tx1"/>
+                </a:solidFill>
+                <a:latin typeface="Fira Code" pitchFamily="1" charset="0"/>
+                <a:ea typeface="Fira Code" pitchFamily="1" charset="0"/>
+                <a:cs typeface="Fira Code" pitchFamily="1" charset="0"/>
+              </a:rPr>
+              <a:t>Logger()</a:t>
+            </a:r>
+          </a:p>
+        </p:txBody>
+      </p:sp>
+      <p:cxnSp>
+        <p:nvCxnSpPr>
+          <p:cNvPr id="95" name="Connettore diritto 4">
+            <a:extLst>
+              <a:ext uri="{FF2B5EF4-FFF2-40B4-BE49-F238E27FC236}">
+                <a16:creationId xmlns:a16="http://schemas.microsoft.com/office/drawing/2014/main" id="{9C38E6E4-1877-2B0F-92EE-48E2E58119C3}"/>
+              </a:ext>
+            </a:extLst>
+          </p:cNvPr>
+          <p:cNvCxnSpPr>
+            <a:cxnSpLocks/>
+          </p:cNvCxnSpPr>
+          <p:nvPr/>
+        </p:nvCxnSpPr>
+        <p:spPr>
+          <a:xfrm flipV="1">
+            <a:off x="7353221" y="7204302"/>
+            <a:ext cx="0" cy="294392"/>
+          </a:xfrm>
+          <a:prstGeom prst="line">
+            <a:avLst/>
+          </a:prstGeom>
+          <a:ln w="12700">
+            <a:solidFill>
+              <a:schemeClr val="tx1"/>
+            </a:solidFill>
+            <a:headEnd type="none" w="med" len="med"/>
+            <a:tailEnd type="arrow" w="med" len="med"/>
+          </a:ln>
+        </p:spPr>
+        <p:style>
+          <a:lnRef idx="1">
+            <a:schemeClr val="accent1"/>
+          </a:lnRef>
+          <a:fillRef idx="0">
+            <a:schemeClr val="accent1"/>
+          </a:fillRef>
+          <a:effectRef idx="0">
+            <a:schemeClr val="accent1"/>
+          </a:effectRef>
+          <a:fontRef idx="minor">
+            <a:schemeClr val="tx1"/>
+          </a:fontRef>
+        </p:style>
+      </p:cxnSp>
+      <p:sp>
+        <p:nvSpPr>
+          <p:cNvPr id="96" name="Rettangolo 19">
+            <a:extLst>
+              <a:ext uri="{FF2B5EF4-FFF2-40B4-BE49-F238E27FC236}">
+                <a16:creationId xmlns:a16="http://schemas.microsoft.com/office/drawing/2014/main" id="{D4CE0B48-832B-9701-B5A4-BBD4022F329B}"/>
+              </a:ext>
+            </a:extLst>
+          </p:cNvPr>
+          <p:cNvSpPr/>
+          <p:nvPr/>
+        </p:nvSpPr>
+        <p:spPr>
+          <a:xfrm>
+            <a:off x="7324800" y="9427483"/>
+            <a:ext cx="1202058" cy="323133"/>
+          </a:xfrm>
+          <a:prstGeom prst="rect">
+            <a:avLst/>
+          </a:prstGeom>
+          <a:noFill/>
+          <a:ln>
+            <a:solidFill>
+              <a:schemeClr val="tx1"/>
+            </a:solidFill>
+          </a:ln>
+        </p:spPr>
+        <p:style>
+          <a:lnRef idx="2">
+            <a:schemeClr val="accent1">
+              <a:shade val="50000"/>
+            </a:schemeClr>
+          </a:lnRef>
+          <a:fillRef idx="1">
+            <a:schemeClr val="accent1"/>
+          </a:fillRef>
+          <a:effectRef idx="0">
+            <a:schemeClr val="accent1"/>
+          </a:effectRef>
+          <a:fontRef idx="minor">
+            <a:schemeClr val="lt1"/>
+          </a:fontRef>
+        </p:style>
+        <p:txBody>
+          <a:bodyPr rtlCol="0" anchor="ctr"/>
+          <a:lstStyle/>
+          <a:p>
+            <a:pPr algn="ctr"/>
+            <a:r>
+              <a:rPr lang="en-US" sz="1200" b="1" noProof="1">
+                <a:solidFill>
+                  <a:schemeClr val="tx1"/>
+                </a:solidFill>
+                <a:latin typeface="Fira Code" pitchFamily="1" charset="0"/>
+                <a:ea typeface="Fira Code" pitchFamily="1" charset="0"/>
+                <a:cs typeface="Fira Code" pitchFamily="1" charset="0"/>
+              </a:rPr>
+              <a:t>Variable()</a:t>
+            </a:r>
+          </a:p>
+        </p:txBody>
+      </p:sp>
+      <p:sp>
+        <p:nvSpPr>
+          <p:cNvPr id="97" name="Rettangolo 19">
+            <a:extLst>
+              <a:ext uri="{FF2B5EF4-FFF2-40B4-BE49-F238E27FC236}">
+                <a16:creationId xmlns:a16="http://schemas.microsoft.com/office/drawing/2014/main" id="{95E8AB05-B24A-6827-E7FE-DDE3910A8F05}"/>
+              </a:ext>
+            </a:extLst>
+          </p:cNvPr>
+          <p:cNvSpPr/>
+          <p:nvPr/>
+        </p:nvSpPr>
+        <p:spPr>
+          <a:xfrm>
+            <a:off x="7278560" y="9787001"/>
+            <a:ext cx="806129" cy="243765"/>
+          </a:xfrm>
+          <a:prstGeom prst="rect">
+            <a:avLst/>
+          </a:prstGeom>
+          <a:noFill/>
+          <a:ln>
+            <a:noFill/>
+          </a:ln>
+        </p:spPr>
+        <p:style>
+          <a:lnRef idx="2">
+            <a:schemeClr val="accent1">
+              <a:shade val="50000"/>
+            </a:schemeClr>
+          </a:lnRef>
+          <a:fillRef idx="1">
+            <a:schemeClr val="accent1"/>
+          </a:fillRef>
+          <a:effectRef idx="0">
+            <a:schemeClr val="accent1"/>
+          </a:effectRef>
+          <a:fontRef idx="minor">
+            <a:schemeClr val="lt1"/>
+          </a:fontRef>
+        </p:style>
+        <p:txBody>
+          <a:bodyPr rtlCol="0" anchor="ctr"/>
+          <a:lstStyle/>
+          <a:p>
+            <a:r>
+              <a:rPr lang="en-US" sz="1000" b="1" noProof="1">
+                <a:solidFill>
+                  <a:schemeClr val="tx1"/>
+                </a:solidFill>
+                <a:latin typeface="Fira Code" pitchFamily="1" charset="0"/>
+                <a:ea typeface="Fira Code" pitchFamily="1" charset="0"/>
+                <a:cs typeface="Fira Code" pitchFamily="1" charset="0"/>
+              </a:rPr>
+              <a:t>Logger()</a:t>
+            </a:r>
+          </a:p>
+        </p:txBody>
+      </p:sp>
+      <p:sp>
+        <p:nvSpPr>
+          <p:cNvPr id="98" name="Rettangolo 19">
+            <a:extLst>
+              <a:ext uri="{FF2B5EF4-FFF2-40B4-BE49-F238E27FC236}">
+                <a16:creationId xmlns:a16="http://schemas.microsoft.com/office/drawing/2014/main" id="{A39FFF98-26F8-9C61-1683-0DC5F7FBE004}"/>
+              </a:ext>
+            </a:extLst>
+          </p:cNvPr>
+          <p:cNvSpPr/>
+          <p:nvPr/>
+        </p:nvSpPr>
+        <p:spPr>
+          <a:xfrm>
+            <a:off x="8424998" y="5358617"/>
+            <a:ext cx="1533770" cy="345845"/>
+          </a:xfrm>
+          <a:prstGeom prst="rect">
+            <a:avLst/>
+          </a:prstGeom>
+          <a:noFill/>
+          <a:ln>
+            <a:solidFill>
+              <a:schemeClr val="tx1"/>
+            </a:solidFill>
+          </a:ln>
+        </p:spPr>
+        <p:style>
+          <a:lnRef idx="2">
+            <a:schemeClr val="accent1">
+              <a:shade val="50000"/>
+            </a:schemeClr>
+          </a:lnRef>
+          <a:fillRef idx="1">
+            <a:schemeClr val="accent1"/>
+          </a:fillRef>
+          <a:effectRef idx="0">
+            <a:schemeClr val="accent1"/>
+          </a:effectRef>
+          <a:fontRef idx="minor">
+            <a:schemeClr val="lt1"/>
+          </a:fontRef>
+        </p:style>
+        <p:txBody>
+          <a:bodyPr rtlCol="0" anchor="ctr"/>
+          <a:lstStyle/>
+          <a:p>
+            <a:pPr algn="ctr"/>
+            <a:r>
+              <a:rPr lang="en-US" sz="1400" b="1" noProof="1">
+                <a:solidFill>
+                  <a:schemeClr val="tx1"/>
+                </a:solidFill>
+                <a:latin typeface="Fira Code" pitchFamily="1" charset="0"/>
+                <a:ea typeface="Fira Code" pitchFamily="1" charset="0"/>
+                <a:cs typeface="Fira Code" pitchFamily="1" charset="0"/>
+              </a:rPr>
+              <a:t>Constants()</a:t>
+            </a:r>
+          </a:p>
+        </p:txBody>
+      </p:sp>
+      <p:sp>
+        <p:nvSpPr>
+          <p:cNvPr id="3" name="Rectangle 2">
+            <a:extLst>
+              <a:ext uri="{FF2B5EF4-FFF2-40B4-BE49-F238E27FC236}">
+                <a16:creationId xmlns:a16="http://schemas.microsoft.com/office/drawing/2014/main" id="{49905594-BFAE-F51B-E56C-E746163EC54C}"/>
+              </a:ext>
+            </a:extLst>
+          </p:cNvPr>
+          <p:cNvSpPr/>
+          <p:nvPr/>
+        </p:nvSpPr>
+        <p:spPr>
+          <a:xfrm>
+            <a:off x="3517565" y="16352851"/>
+            <a:ext cx="1156386" cy="641942"/>
+          </a:xfrm>
+          <a:prstGeom prst="rect">
+            <a:avLst/>
+          </a:prstGeom>
+          <a:solidFill>
+            <a:srgbClr val="1A1A5B"/>
+          </a:solidFill>
+          <a:ln>
+            <a:noFill/>
+          </a:ln>
+        </p:spPr>
+        <p:style>
+          <a:lnRef idx="1">
+            <a:schemeClr val="accent1"/>
+          </a:lnRef>
+          <a:fillRef idx="3">
+            <a:schemeClr val="accent1"/>
+          </a:fillRef>
+          <a:effectRef idx="2">
+            <a:schemeClr val="accent1"/>
+          </a:effectRef>
+          <a:fontRef idx="minor">
+            <a:schemeClr val="lt1"/>
+          </a:fontRef>
+        </p:style>
+        <p:txBody>
+          <a:bodyPr rtlCol="0" anchor="ctr"/>
+          <a:lstStyle>
+            <a:defPPr>
+              <a:defRPr lang="en-US"/>
+            </a:defPPr>
+            <a:lvl1pPr marL="0" algn="l" defTabSz="914400" rtl="0" eaLnBrk="1" latinLnBrk="0" hangingPunct="1">
+              <a:defRPr sz="1800" kern="1200">
+                <a:solidFill>
+                  <a:schemeClr val="lt1"/>
+                </a:solidFill>
+                <a:latin typeface="+mn-lt"/>
+                <a:ea typeface="+mn-ea"/>
+                <a:cs typeface="+mn-cs"/>
+              </a:defRPr>
+            </a:lvl1pPr>
+            <a:lvl2pPr marL="457200" algn="l" defTabSz="914400" rtl="0" eaLnBrk="1" latinLnBrk="0" hangingPunct="1">
+              <a:defRPr sz="1800" kern="1200">
+                <a:solidFill>
+                  <a:schemeClr val="lt1"/>
+                </a:solidFill>
+                <a:latin typeface="+mn-lt"/>
+                <a:ea typeface="+mn-ea"/>
+                <a:cs typeface="+mn-cs"/>
+              </a:defRPr>
+            </a:lvl2pPr>
+            <a:lvl3pPr marL="914400" algn="l" defTabSz="914400" rtl="0" eaLnBrk="1" latinLnBrk="0" hangingPunct="1">
+              <a:defRPr sz="1800" kern="1200">
+                <a:solidFill>
+                  <a:schemeClr val="lt1"/>
+                </a:solidFill>
+                <a:latin typeface="+mn-lt"/>
+                <a:ea typeface="+mn-ea"/>
+                <a:cs typeface="+mn-cs"/>
+              </a:defRPr>
+            </a:lvl3pPr>
+            <a:lvl4pPr marL="1371600" algn="l" defTabSz="914400" rtl="0" eaLnBrk="1" latinLnBrk="0" hangingPunct="1">
+              <a:defRPr sz="1800" kern="1200">
+                <a:solidFill>
+                  <a:schemeClr val="lt1"/>
+                </a:solidFill>
+                <a:latin typeface="+mn-lt"/>
+                <a:ea typeface="+mn-ea"/>
+                <a:cs typeface="+mn-cs"/>
+              </a:defRPr>
+            </a:lvl4pPr>
+            <a:lvl5pPr marL="1828800" algn="l" defTabSz="914400" rtl="0" eaLnBrk="1" latinLnBrk="0" hangingPunct="1">
+              <a:defRPr sz="1800" kern="1200">
+                <a:solidFill>
+                  <a:schemeClr val="lt1"/>
+                </a:solidFill>
+                <a:latin typeface="+mn-lt"/>
+                <a:ea typeface="+mn-ea"/>
+                <a:cs typeface="+mn-cs"/>
+              </a:defRPr>
+            </a:lvl5pPr>
+            <a:lvl6pPr marL="2286000" algn="l" defTabSz="914400" rtl="0" eaLnBrk="1" latinLnBrk="0" hangingPunct="1">
+              <a:defRPr sz="1800" kern="1200">
+                <a:solidFill>
+                  <a:schemeClr val="lt1"/>
+                </a:solidFill>
+                <a:latin typeface="+mn-lt"/>
+                <a:ea typeface="+mn-ea"/>
+                <a:cs typeface="+mn-cs"/>
+              </a:defRPr>
+            </a:lvl6pPr>
+            <a:lvl7pPr marL="2743200" algn="l" defTabSz="914400" rtl="0" eaLnBrk="1" latinLnBrk="0" hangingPunct="1">
+              <a:defRPr sz="1800" kern="1200">
+                <a:solidFill>
+                  <a:schemeClr val="lt1"/>
+                </a:solidFill>
+                <a:latin typeface="+mn-lt"/>
+                <a:ea typeface="+mn-ea"/>
+                <a:cs typeface="+mn-cs"/>
+              </a:defRPr>
+            </a:lvl7pPr>
+            <a:lvl8pPr marL="3200400" algn="l" defTabSz="914400" rtl="0" eaLnBrk="1" latinLnBrk="0" hangingPunct="1">
+              <a:defRPr sz="1800" kern="1200">
+                <a:solidFill>
+                  <a:schemeClr val="lt1"/>
+                </a:solidFill>
+                <a:latin typeface="+mn-lt"/>
+                <a:ea typeface="+mn-ea"/>
+                <a:cs typeface="+mn-cs"/>
+              </a:defRPr>
+            </a:lvl8pPr>
+            <a:lvl9pPr marL="3657600" algn="l" defTabSz="914400" rtl="0" eaLnBrk="1" latinLnBrk="0" hangingPunct="1">
+              <a:defRPr sz="1800" kern="1200">
+                <a:solidFill>
+                  <a:schemeClr val="lt1"/>
+                </a:solidFill>
+                <a:latin typeface="+mn-lt"/>
+                <a:ea typeface="+mn-ea"/>
+                <a:cs typeface="+mn-cs"/>
+              </a:defRPr>
+            </a:lvl9pPr>
+          </a:lstStyle>
+          <a:p>
+            <a:r>
+              <a:rPr lang="it-IT" sz="1600" dirty="0"/>
+              <a:t>Energy </a:t>
+            </a:r>
+          </a:p>
+          <a:p>
+            <a:r>
+              <a:rPr lang="it-IT" sz="1600" dirty="0"/>
+              <a:t>model</a:t>
+            </a:r>
+          </a:p>
+        </p:txBody>
+      </p:sp>
+      <p:pic>
+        <p:nvPicPr>
+          <p:cNvPr id="4" name="Picture 3" descr="database icon">
+            <a:hlinkClick r:id="rId2" tooltip="database icon"/>
+            <a:extLst>
+              <a:ext uri="{FF2B5EF4-FFF2-40B4-BE49-F238E27FC236}">
+                <a16:creationId xmlns:a16="http://schemas.microsoft.com/office/drawing/2014/main" id="{B1C9C6A4-A087-9D81-4066-B5F7A8C22B5B}"/>
+              </a:ext>
+            </a:extLst>
+          </p:cNvPr>
+          <p:cNvPicPr>
+            <a:picLocks noChangeAspect="1" noChangeArrowheads="1"/>
+          </p:cNvPicPr>
+          <p:nvPr/>
+        </p:nvPicPr>
+        <p:blipFill>
+          <a:blip r:embed="rId3">
+            <a:extLst>
+              <a:ext uri="{28A0092B-C50C-407E-A947-70E740481C1C}">
+                <a14:useLocalDpi xmlns:a14="http://schemas.microsoft.com/office/drawing/2010/main" val="0"/>
+              </a:ext>
+            </a:extLst>
+          </a:blip>
+          <a:srcRect/>
+          <a:stretch>
+            <a:fillRect/>
+          </a:stretch>
+        </p:blipFill>
+        <p:spPr bwMode="auto">
+          <a:xfrm>
+            <a:off x="5266921" y="16841412"/>
+            <a:ext cx="808936" cy="808934"/>
+          </a:xfrm>
+          <a:prstGeom prst="rect">
+            <a:avLst/>
+          </a:prstGeom>
+          <a:noFill/>
+          <a:extLst>
+            <a:ext uri="{909E8E84-426E-40DD-AFC4-6F175D3DCCD1}">
+              <a14:hiddenFill xmlns:a14="http://schemas.microsoft.com/office/drawing/2010/main">
+                <a:solidFill>
+                  <a:srgbClr val="FFFFFF"/>
+                </a:solidFill>
+              </a14:hiddenFill>
+            </a:ext>
+          </a:extLst>
+        </p:spPr>
+      </p:pic>
+      <mc:AlternateContent xmlns:mc="http://schemas.openxmlformats.org/markup-compatibility/2006">
+        <mc:Choice xmlns:a14="http://schemas.microsoft.com/office/drawing/2010/main" Requires="a14">
+          <p:sp>
+            <p:nvSpPr>
+              <p:cNvPr id="5" name="TextBox 14">
+                <a:extLst>
+                  <a:ext uri="{FF2B5EF4-FFF2-40B4-BE49-F238E27FC236}">
+                    <a16:creationId xmlns:a16="http://schemas.microsoft.com/office/drawing/2014/main" id="{5C78A347-FF1F-BD7B-00E0-EC0256C9C27E}"/>
+                  </a:ext>
+                </a:extLst>
+              </p:cNvPr>
+              <p:cNvSpPr txBox="1"/>
+              <p:nvPr/>
+            </p:nvSpPr>
+            <p:spPr>
+              <a:xfrm>
+                <a:off x="3460577" y="15556455"/>
+                <a:ext cx="1270361" cy="523220"/>
+              </a:xfrm>
+              <a:prstGeom prst="rect">
+                <a:avLst/>
+              </a:prstGeom>
+              <a:noFill/>
+            </p:spPr>
+            <p:txBody>
+              <a:bodyPr wrap="square">
+                <a:spAutoFit/>
+              </a:bodyPr>
+              <a:lstStyle>
+                <a:defPPr>
+                  <a:defRPr lang="en-US"/>
+                </a:defPPr>
+                <a:lvl1pPr marL="0" algn="l" defTabSz="914400" rtl="0" eaLnBrk="1" latinLnBrk="0" hangingPunct="1">
+                  <a:defRPr sz="1800" kern="1200">
+                    <a:solidFill>
+                      <a:schemeClr val="tx1"/>
+                    </a:solidFill>
+                    <a:latin typeface="+mn-lt"/>
+                    <a:ea typeface="+mn-ea"/>
+                    <a:cs typeface="+mn-cs"/>
+                  </a:defRPr>
+                </a:lvl1pPr>
+                <a:lvl2pPr marL="457200" algn="l" defTabSz="914400" rtl="0" eaLnBrk="1" latinLnBrk="0" hangingPunct="1">
+                  <a:defRPr sz="1800" kern="1200">
+                    <a:solidFill>
+                      <a:schemeClr val="tx1"/>
+                    </a:solidFill>
+                    <a:latin typeface="+mn-lt"/>
+                    <a:ea typeface="+mn-ea"/>
+                    <a:cs typeface="+mn-cs"/>
+                  </a:defRPr>
+                </a:lvl2pPr>
+                <a:lvl3pPr marL="914400" algn="l" defTabSz="914400" rtl="0" eaLnBrk="1" latinLnBrk="0" hangingPunct="1">
+                  <a:defRPr sz="1800" kern="1200">
+                    <a:solidFill>
+                      <a:schemeClr val="tx1"/>
+                    </a:solidFill>
+                    <a:latin typeface="+mn-lt"/>
+                    <a:ea typeface="+mn-ea"/>
+                    <a:cs typeface="+mn-cs"/>
+                  </a:defRPr>
+                </a:lvl3pPr>
+                <a:lvl4pPr marL="1371600" algn="l" defTabSz="914400" rtl="0" eaLnBrk="1" latinLnBrk="0" hangingPunct="1">
+                  <a:defRPr sz="1800" kern="1200">
+                    <a:solidFill>
+                      <a:schemeClr val="tx1"/>
+                    </a:solidFill>
+                    <a:latin typeface="+mn-lt"/>
+                    <a:ea typeface="+mn-ea"/>
+                    <a:cs typeface="+mn-cs"/>
+                  </a:defRPr>
+                </a:lvl4pPr>
+                <a:lvl5pPr marL="1828800" algn="l" defTabSz="914400" rtl="0" eaLnBrk="1" latinLnBrk="0" hangingPunct="1">
+                  <a:defRPr sz="1800" kern="1200">
+                    <a:solidFill>
+                      <a:schemeClr val="tx1"/>
+                    </a:solidFill>
+                    <a:latin typeface="+mn-lt"/>
+                    <a:ea typeface="+mn-ea"/>
+                    <a:cs typeface="+mn-cs"/>
+                  </a:defRPr>
+                </a:lvl5pPr>
+                <a:lvl6pPr marL="2286000" algn="l" defTabSz="914400" rtl="0" eaLnBrk="1" latinLnBrk="0" hangingPunct="1">
+                  <a:defRPr sz="1800" kern="1200">
+                    <a:solidFill>
+                      <a:schemeClr val="tx1"/>
+                    </a:solidFill>
+                    <a:latin typeface="+mn-lt"/>
+                    <a:ea typeface="+mn-ea"/>
+                    <a:cs typeface="+mn-cs"/>
+                  </a:defRPr>
+                </a:lvl6pPr>
+                <a:lvl7pPr marL="2743200" algn="l" defTabSz="914400" rtl="0" eaLnBrk="1" latinLnBrk="0" hangingPunct="1">
+                  <a:defRPr sz="1800" kern="1200">
+                    <a:solidFill>
+                      <a:schemeClr val="tx1"/>
+                    </a:solidFill>
+                    <a:latin typeface="+mn-lt"/>
+                    <a:ea typeface="+mn-ea"/>
+                    <a:cs typeface="+mn-cs"/>
+                  </a:defRPr>
+                </a:lvl7pPr>
+                <a:lvl8pPr marL="3200400" algn="l" defTabSz="914400" rtl="0" eaLnBrk="1" latinLnBrk="0" hangingPunct="1">
+                  <a:defRPr sz="1800" kern="1200">
+                    <a:solidFill>
+                      <a:schemeClr val="tx1"/>
+                    </a:solidFill>
+                    <a:latin typeface="+mn-lt"/>
+                    <a:ea typeface="+mn-ea"/>
+                    <a:cs typeface="+mn-cs"/>
+                  </a:defRPr>
+                </a:lvl8pPr>
+                <a:lvl9pPr marL="3657600" algn="l" defTabSz="914400" rtl="0" eaLnBrk="1" latinLnBrk="0" hangingPunct="1">
+                  <a:defRPr sz="1800" kern="1200">
+                    <a:solidFill>
+                      <a:schemeClr val="tx1"/>
+                    </a:solidFill>
+                    <a:latin typeface="+mn-lt"/>
+                    <a:ea typeface="+mn-ea"/>
+                    <a:cs typeface="+mn-cs"/>
+                  </a:defRPr>
+                </a:lvl9pPr>
+              </a:lstStyle>
+              <a:p>
+                <a:pPr algn="ctr"/>
+                <a:r>
+                  <a:rPr lang="en-US" sz="1400" b="1" dirty="0">
+                    <a:latin typeface="Trebuchet MS" panose="020B0603020202020204" pitchFamily="34" charset="0"/>
+                  </a:rPr>
+                  <a:t>Iteration</a:t>
+                </a:r>
+                <a:endParaRPr lang="it-IT" sz="1400" b="1" i="0" dirty="0">
+                  <a:latin typeface="Cambria Math" panose="02040503050406030204" pitchFamily="18" charset="0"/>
+                </a:endParaRPr>
+              </a:p>
+              <a:p>
+                <a:pPr algn="ctr"/>
+                <a14:m>
+                  <m:oMathPara xmlns:m="http://schemas.openxmlformats.org/officeDocument/2006/math">
+                    <m:oMathParaPr>
+                      <m:jc m:val="centerGroup"/>
+                    </m:oMathParaPr>
+                    <m:oMath xmlns:m="http://schemas.openxmlformats.org/officeDocument/2006/math">
+                      <m:r>
+                        <a:rPr lang="en-US" sz="1400" b="1" i="1" dirty="0" smtClean="0">
+                          <a:latin typeface="Cambria Math" panose="02040503050406030204" pitchFamily="18" charset="0"/>
+                        </a:rPr>
+                        <m:t>𝟏</m:t>
+                      </m:r>
+                      <m:r>
+                        <a:rPr lang="it-IT" sz="1400" b="1" i="0" dirty="0" smtClean="0">
+                          <a:latin typeface="Cambria Math" panose="02040503050406030204" pitchFamily="18" charset="0"/>
+                        </a:rPr>
+                        <m:t> </m:t>
+                      </m:r>
+                    </m:oMath>
+                  </m:oMathPara>
+                </a14:m>
+                <a:endParaRPr lang="it-IT" sz="1400" b="1" dirty="0"/>
+              </a:p>
+            </p:txBody>
+          </p:sp>
+        </mc:Choice>
+        <mc:Fallback>
+          <p:sp>
+            <p:nvSpPr>
+              <p:cNvPr id="5" name="TextBox 14">
+                <a:extLst>
+                  <a:ext uri="{FF2B5EF4-FFF2-40B4-BE49-F238E27FC236}">
+                    <a16:creationId xmlns:a16="http://schemas.microsoft.com/office/drawing/2014/main" id="{5C78A347-FF1F-BD7B-00E0-EC0256C9C27E}"/>
+                  </a:ext>
+                </a:extLst>
+              </p:cNvPr>
+              <p:cNvSpPr txBox="1">
+                <a:spLocks noRot="1" noChangeAspect="1" noMove="1" noResize="1" noEditPoints="1" noAdjustHandles="1" noChangeArrowheads="1" noChangeShapeType="1" noTextEdit="1"/>
+              </p:cNvSpPr>
+              <p:nvPr/>
+            </p:nvSpPr>
+            <p:spPr>
+              <a:xfrm>
+                <a:off x="3460577" y="15556455"/>
+                <a:ext cx="1270361" cy="523220"/>
+              </a:xfrm>
+              <a:prstGeom prst="rect">
+                <a:avLst/>
+              </a:prstGeom>
+              <a:blipFill>
+                <a:blip r:embed="rId4"/>
+                <a:stretch>
+                  <a:fillRect t="-3488"/>
+                </a:stretch>
+              </a:blipFill>
+            </p:spPr>
+            <p:txBody>
+              <a:bodyPr/>
+              <a:lstStyle/>
+              <a:p>
+                <a:r>
+                  <a:rPr lang="it-IT">
+                    <a:noFill/>
+                  </a:rPr>
+                  <a:t> </a:t>
+                </a:r>
+              </a:p>
+            </p:txBody>
+          </p:sp>
+        </mc:Fallback>
+      </mc:AlternateContent>
+      <p:sp>
+        <p:nvSpPr>
+          <p:cNvPr id="7" name="Rectangle 6">
+            <a:extLst>
+              <a:ext uri="{FF2B5EF4-FFF2-40B4-BE49-F238E27FC236}">
+                <a16:creationId xmlns:a16="http://schemas.microsoft.com/office/drawing/2014/main" id="{572E1262-8676-51B0-0D77-150992321C0E}"/>
+              </a:ext>
+            </a:extLst>
+          </p:cNvPr>
+          <p:cNvSpPr/>
+          <p:nvPr/>
+        </p:nvSpPr>
+        <p:spPr>
+          <a:xfrm>
+            <a:off x="3517565" y="17529579"/>
+            <a:ext cx="1156386" cy="641942"/>
+          </a:xfrm>
+          <a:prstGeom prst="rect">
+            <a:avLst/>
+          </a:prstGeom>
+          <a:solidFill>
+            <a:srgbClr val="8393A1"/>
+          </a:solidFill>
+          <a:ln>
+            <a:noFill/>
+          </a:ln>
+        </p:spPr>
+        <p:style>
+          <a:lnRef idx="1">
+            <a:schemeClr val="accent1"/>
+          </a:lnRef>
+          <a:fillRef idx="3">
+            <a:schemeClr val="accent1"/>
+          </a:fillRef>
+          <a:effectRef idx="2">
+            <a:schemeClr val="accent1"/>
+          </a:effectRef>
+          <a:fontRef idx="minor">
+            <a:schemeClr val="lt1"/>
+          </a:fontRef>
+        </p:style>
+        <p:txBody>
+          <a:bodyPr rtlCol="0" anchor="ctr"/>
+          <a:lstStyle>
+            <a:defPPr>
+              <a:defRPr lang="en-US"/>
+            </a:defPPr>
+            <a:lvl1pPr marL="0" algn="l" defTabSz="914400" rtl="0" eaLnBrk="1" latinLnBrk="0" hangingPunct="1">
+              <a:defRPr sz="1800" kern="1200">
+                <a:solidFill>
+                  <a:schemeClr val="lt1"/>
+                </a:solidFill>
+                <a:latin typeface="+mn-lt"/>
+                <a:ea typeface="+mn-ea"/>
+                <a:cs typeface="+mn-cs"/>
+              </a:defRPr>
+            </a:lvl1pPr>
+            <a:lvl2pPr marL="457200" algn="l" defTabSz="914400" rtl="0" eaLnBrk="1" latinLnBrk="0" hangingPunct="1">
+              <a:defRPr sz="1800" kern="1200">
+                <a:solidFill>
+                  <a:schemeClr val="lt1"/>
+                </a:solidFill>
+                <a:latin typeface="+mn-lt"/>
+                <a:ea typeface="+mn-ea"/>
+                <a:cs typeface="+mn-cs"/>
+              </a:defRPr>
+            </a:lvl2pPr>
+            <a:lvl3pPr marL="914400" algn="l" defTabSz="914400" rtl="0" eaLnBrk="1" latinLnBrk="0" hangingPunct="1">
+              <a:defRPr sz="1800" kern="1200">
+                <a:solidFill>
+                  <a:schemeClr val="lt1"/>
+                </a:solidFill>
+                <a:latin typeface="+mn-lt"/>
+                <a:ea typeface="+mn-ea"/>
+                <a:cs typeface="+mn-cs"/>
+              </a:defRPr>
+            </a:lvl3pPr>
+            <a:lvl4pPr marL="1371600" algn="l" defTabSz="914400" rtl="0" eaLnBrk="1" latinLnBrk="0" hangingPunct="1">
+              <a:defRPr sz="1800" kern="1200">
+                <a:solidFill>
+                  <a:schemeClr val="lt1"/>
+                </a:solidFill>
+                <a:latin typeface="+mn-lt"/>
+                <a:ea typeface="+mn-ea"/>
+                <a:cs typeface="+mn-cs"/>
+              </a:defRPr>
+            </a:lvl4pPr>
+            <a:lvl5pPr marL="1828800" algn="l" defTabSz="914400" rtl="0" eaLnBrk="1" latinLnBrk="0" hangingPunct="1">
+              <a:defRPr sz="1800" kern="1200">
+                <a:solidFill>
+                  <a:schemeClr val="lt1"/>
+                </a:solidFill>
+                <a:latin typeface="+mn-lt"/>
+                <a:ea typeface="+mn-ea"/>
+                <a:cs typeface="+mn-cs"/>
+              </a:defRPr>
+            </a:lvl5pPr>
+            <a:lvl6pPr marL="2286000" algn="l" defTabSz="914400" rtl="0" eaLnBrk="1" latinLnBrk="0" hangingPunct="1">
+              <a:defRPr sz="1800" kern="1200">
+                <a:solidFill>
+                  <a:schemeClr val="lt1"/>
+                </a:solidFill>
+                <a:latin typeface="+mn-lt"/>
+                <a:ea typeface="+mn-ea"/>
+                <a:cs typeface="+mn-cs"/>
+              </a:defRPr>
+            </a:lvl6pPr>
+            <a:lvl7pPr marL="2743200" algn="l" defTabSz="914400" rtl="0" eaLnBrk="1" latinLnBrk="0" hangingPunct="1">
+              <a:defRPr sz="1800" kern="1200">
+                <a:solidFill>
+                  <a:schemeClr val="lt1"/>
+                </a:solidFill>
+                <a:latin typeface="+mn-lt"/>
+                <a:ea typeface="+mn-ea"/>
+                <a:cs typeface="+mn-cs"/>
+              </a:defRPr>
+            </a:lvl7pPr>
+            <a:lvl8pPr marL="3200400" algn="l" defTabSz="914400" rtl="0" eaLnBrk="1" latinLnBrk="0" hangingPunct="1">
+              <a:defRPr sz="1800" kern="1200">
+                <a:solidFill>
+                  <a:schemeClr val="lt1"/>
+                </a:solidFill>
+                <a:latin typeface="+mn-lt"/>
+                <a:ea typeface="+mn-ea"/>
+                <a:cs typeface="+mn-cs"/>
+              </a:defRPr>
+            </a:lvl8pPr>
+            <a:lvl9pPr marL="3657600" algn="l" defTabSz="914400" rtl="0" eaLnBrk="1" latinLnBrk="0" hangingPunct="1">
+              <a:defRPr sz="1800" kern="1200">
+                <a:solidFill>
+                  <a:schemeClr val="lt1"/>
+                </a:solidFill>
+                <a:latin typeface="+mn-lt"/>
+                <a:ea typeface="+mn-ea"/>
+                <a:cs typeface="+mn-cs"/>
+              </a:defRPr>
+            </a:lvl9pPr>
+          </a:lstStyle>
+          <a:p>
+            <a:r>
+              <a:rPr lang="it-IT" sz="1600" dirty="0" err="1"/>
+              <a:t>Economic</a:t>
+            </a:r>
+            <a:r>
+              <a:rPr lang="it-IT" sz="1600" dirty="0"/>
+              <a:t> </a:t>
+            </a:r>
+          </a:p>
+          <a:p>
+            <a:r>
+              <a:rPr lang="it-IT" sz="1600" dirty="0"/>
+              <a:t>model</a:t>
+            </a:r>
+          </a:p>
+        </p:txBody>
+      </p:sp>
+      <p:cxnSp>
+        <p:nvCxnSpPr>
+          <p:cNvPr id="8" name="Straight Arrow Connector 7">
+            <a:extLst>
+              <a:ext uri="{FF2B5EF4-FFF2-40B4-BE49-F238E27FC236}">
+                <a16:creationId xmlns:a16="http://schemas.microsoft.com/office/drawing/2014/main" id="{A7EFDC0B-44E2-B1C3-25D4-78E7BCF4E237}"/>
+              </a:ext>
+            </a:extLst>
+          </p:cNvPr>
+          <p:cNvCxnSpPr>
+            <a:cxnSpLocks/>
+            <a:endCxn id="7" idx="1"/>
+          </p:cNvCxnSpPr>
+          <p:nvPr/>
+        </p:nvCxnSpPr>
+        <p:spPr>
+          <a:xfrm>
+            <a:off x="3077824" y="17850550"/>
+            <a:ext cx="439741" cy="0"/>
+          </a:xfrm>
+          <a:prstGeom prst="straightConnector1">
+            <a:avLst/>
+          </a:prstGeom>
+          <a:ln w="19050">
+            <a:solidFill>
+              <a:schemeClr val="tx1"/>
+            </a:solidFill>
+            <a:headEnd type="none" w="med" len="med"/>
+            <a:tailEnd type="arrow" w="med" len="med"/>
+          </a:ln>
+        </p:spPr>
+        <p:style>
+          <a:lnRef idx="1">
+            <a:schemeClr val="accent1"/>
+          </a:lnRef>
+          <a:fillRef idx="0">
+            <a:schemeClr val="accent1"/>
+          </a:fillRef>
+          <a:effectRef idx="0">
+            <a:schemeClr val="accent1"/>
+          </a:effectRef>
+          <a:fontRef idx="minor">
+            <a:schemeClr val="tx1"/>
+          </a:fontRef>
+        </p:style>
+      </p:cxnSp>
+      <p:sp>
+        <p:nvSpPr>
+          <p:cNvPr id="9" name="TextBox 29">
+            <a:extLst>
+              <a:ext uri="{FF2B5EF4-FFF2-40B4-BE49-F238E27FC236}">
+                <a16:creationId xmlns:a16="http://schemas.microsoft.com/office/drawing/2014/main" id="{A0F92A42-E070-5FCA-F709-CCD5F2B6D107}"/>
+              </a:ext>
+            </a:extLst>
+          </p:cNvPr>
+          <p:cNvSpPr txBox="1"/>
+          <p:nvPr/>
+        </p:nvSpPr>
+        <p:spPr>
+          <a:xfrm>
+            <a:off x="1189596" y="16892853"/>
+            <a:ext cx="1484025" cy="738664"/>
+          </a:xfrm>
+          <a:prstGeom prst="rect">
+            <a:avLst/>
+          </a:prstGeom>
+          <a:noFill/>
+        </p:spPr>
+        <p:txBody>
+          <a:bodyPr wrap="square">
+            <a:spAutoFit/>
+          </a:bodyPr>
+          <a:lstStyle>
+            <a:defPPr>
+              <a:defRPr lang="en-US"/>
+            </a:defPPr>
+            <a:lvl1pPr marL="0" algn="l" defTabSz="914400" rtl="0" eaLnBrk="1" latinLnBrk="0" hangingPunct="1">
+              <a:defRPr sz="1800" kern="1200">
+                <a:solidFill>
+                  <a:schemeClr val="tx1"/>
+                </a:solidFill>
+                <a:latin typeface="+mn-lt"/>
+                <a:ea typeface="+mn-ea"/>
+                <a:cs typeface="+mn-cs"/>
+              </a:defRPr>
+            </a:lvl1pPr>
+            <a:lvl2pPr marL="457200" algn="l" defTabSz="914400" rtl="0" eaLnBrk="1" latinLnBrk="0" hangingPunct="1">
+              <a:defRPr sz="1800" kern="1200">
+                <a:solidFill>
+                  <a:schemeClr val="tx1"/>
+                </a:solidFill>
+                <a:latin typeface="+mn-lt"/>
+                <a:ea typeface="+mn-ea"/>
+                <a:cs typeface="+mn-cs"/>
+              </a:defRPr>
+            </a:lvl2pPr>
+            <a:lvl3pPr marL="914400" algn="l" defTabSz="914400" rtl="0" eaLnBrk="1" latinLnBrk="0" hangingPunct="1">
+              <a:defRPr sz="1800" kern="1200">
+                <a:solidFill>
+                  <a:schemeClr val="tx1"/>
+                </a:solidFill>
+                <a:latin typeface="+mn-lt"/>
+                <a:ea typeface="+mn-ea"/>
+                <a:cs typeface="+mn-cs"/>
+              </a:defRPr>
+            </a:lvl3pPr>
+            <a:lvl4pPr marL="1371600" algn="l" defTabSz="914400" rtl="0" eaLnBrk="1" latinLnBrk="0" hangingPunct="1">
+              <a:defRPr sz="1800" kern="1200">
+                <a:solidFill>
+                  <a:schemeClr val="tx1"/>
+                </a:solidFill>
+                <a:latin typeface="+mn-lt"/>
+                <a:ea typeface="+mn-ea"/>
+                <a:cs typeface="+mn-cs"/>
+              </a:defRPr>
+            </a:lvl4pPr>
+            <a:lvl5pPr marL="1828800" algn="l" defTabSz="914400" rtl="0" eaLnBrk="1" latinLnBrk="0" hangingPunct="1">
+              <a:defRPr sz="1800" kern="1200">
+                <a:solidFill>
+                  <a:schemeClr val="tx1"/>
+                </a:solidFill>
+                <a:latin typeface="+mn-lt"/>
+                <a:ea typeface="+mn-ea"/>
+                <a:cs typeface="+mn-cs"/>
+              </a:defRPr>
+            </a:lvl5pPr>
+            <a:lvl6pPr marL="2286000" algn="l" defTabSz="914400" rtl="0" eaLnBrk="1" latinLnBrk="0" hangingPunct="1">
+              <a:defRPr sz="1800" kern="1200">
+                <a:solidFill>
+                  <a:schemeClr val="tx1"/>
+                </a:solidFill>
+                <a:latin typeface="+mn-lt"/>
+                <a:ea typeface="+mn-ea"/>
+                <a:cs typeface="+mn-cs"/>
+              </a:defRPr>
+            </a:lvl6pPr>
+            <a:lvl7pPr marL="2743200" algn="l" defTabSz="914400" rtl="0" eaLnBrk="1" latinLnBrk="0" hangingPunct="1">
+              <a:defRPr sz="1800" kern="1200">
+                <a:solidFill>
+                  <a:schemeClr val="tx1"/>
+                </a:solidFill>
+                <a:latin typeface="+mn-lt"/>
+                <a:ea typeface="+mn-ea"/>
+                <a:cs typeface="+mn-cs"/>
+              </a:defRPr>
+            </a:lvl7pPr>
+            <a:lvl8pPr marL="3200400" algn="l" defTabSz="914400" rtl="0" eaLnBrk="1" latinLnBrk="0" hangingPunct="1">
+              <a:defRPr sz="1800" kern="1200">
+                <a:solidFill>
+                  <a:schemeClr val="tx1"/>
+                </a:solidFill>
+                <a:latin typeface="+mn-lt"/>
+                <a:ea typeface="+mn-ea"/>
+                <a:cs typeface="+mn-cs"/>
+              </a:defRPr>
+            </a:lvl8pPr>
+            <a:lvl9pPr marL="3657600" algn="l" defTabSz="914400" rtl="0" eaLnBrk="1" latinLnBrk="0" hangingPunct="1">
+              <a:defRPr sz="1800" kern="1200">
+                <a:solidFill>
+                  <a:schemeClr val="tx1"/>
+                </a:solidFill>
+                <a:latin typeface="+mn-lt"/>
+                <a:ea typeface="+mn-ea"/>
+                <a:cs typeface="+mn-cs"/>
+              </a:defRPr>
+            </a:lvl9pPr>
+          </a:lstStyle>
+          <a:p>
+            <a:pPr algn="r"/>
+            <a:r>
+              <a:rPr lang="en-US" sz="1400" b="1" dirty="0">
+                <a:latin typeface="Trebuchet MS" panose="020B0603020202020204" pitchFamily="34" charset="0"/>
+              </a:rPr>
+              <a:t>Exogenous </a:t>
+            </a:r>
+          </a:p>
+          <a:p>
+            <a:pPr algn="r"/>
+            <a:r>
+              <a:rPr lang="en-US" sz="1400" b="1" dirty="0">
+                <a:latin typeface="Trebuchet MS" panose="020B0603020202020204" pitchFamily="34" charset="0"/>
+              </a:rPr>
+              <a:t>parameters </a:t>
+            </a:r>
+          </a:p>
+          <a:p>
+            <a:pPr algn="r"/>
+            <a:r>
+              <a:rPr lang="en-US" sz="1400" b="1" dirty="0">
+                <a:latin typeface="Trebuchet MS" panose="020B0603020202020204" pitchFamily="34" charset="0"/>
+              </a:rPr>
+              <a:t>(first guesses)</a:t>
+            </a:r>
+            <a:endParaRPr lang="it-IT" sz="1400" b="1" i="0" dirty="0">
+              <a:latin typeface="Cambria Math" panose="02040503050406030204" pitchFamily="18" charset="0"/>
+            </a:endParaRPr>
+          </a:p>
+        </p:txBody>
+      </p:sp>
+      <p:sp>
+        <p:nvSpPr>
+          <p:cNvPr id="10" name="Left Brace 9">
+            <a:extLst>
+              <a:ext uri="{FF2B5EF4-FFF2-40B4-BE49-F238E27FC236}">
+                <a16:creationId xmlns:a16="http://schemas.microsoft.com/office/drawing/2014/main" id="{957A18A6-4DB7-1345-82D7-9665FF89280D}"/>
+              </a:ext>
+            </a:extLst>
+          </p:cNvPr>
+          <p:cNvSpPr/>
+          <p:nvPr/>
+        </p:nvSpPr>
+        <p:spPr>
+          <a:xfrm>
+            <a:off x="2740545" y="16673822"/>
+            <a:ext cx="224852" cy="1176726"/>
+          </a:xfrm>
+          <a:prstGeom prst="leftBrace">
+            <a:avLst/>
+          </a:prstGeom>
+          <a:ln w="19050">
+            <a:solidFill>
+              <a:schemeClr val="tx1"/>
+            </a:solidFill>
+          </a:ln>
+        </p:spPr>
+        <p:style>
+          <a:lnRef idx="1">
+            <a:schemeClr val="accent1"/>
+          </a:lnRef>
+          <a:fillRef idx="0">
+            <a:schemeClr val="accent1"/>
+          </a:fillRef>
+          <a:effectRef idx="0">
+            <a:schemeClr val="accent1"/>
+          </a:effectRef>
+          <a:fontRef idx="minor">
+            <a:schemeClr val="tx1"/>
+          </a:fontRef>
+        </p:style>
+        <p:txBody>
+          <a:bodyPr rtlCol="0" anchor="ctr"/>
+          <a:lstStyle>
+            <a:defPPr>
+              <a:defRPr lang="en-US"/>
+            </a:defPPr>
+            <a:lvl1pPr marL="0" algn="l" defTabSz="914400" rtl="0" eaLnBrk="1" latinLnBrk="0" hangingPunct="1">
+              <a:defRPr sz="1800" kern="1200">
+                <a:solidFill>
+                  <a:schemeClr val="tx1"/>
+                </a:solidFill>
+                <a:latin typeface="+mn-lt"/>
+                <a:ea typeface="+mn-ea"/>
+                <a:cs typeface="+mn-cs"/>
+              </a:defRPr>
+            </a:lvl1pPr>
+            <a:lvl2pPr marL="457200" algn="l" defTabSz="914400" rtl="0" eaLnBrk="1" latinLnBrk="0" hangingPunct="1">
+              <a:defRPr sz="1800" kern="1200">
+                <a:solidFill>
+                  <a:schemeClr val="tx1"/>
+                </a:solidFill>
+                <a:latin typeface="+mn-lt"/>
+                <a:ea typeface="+mn-ea"/>
+                <a:cs typeface="+mn-cs"/>
+              </a:defRPr>
+            </a:lvl2pPr>
+            <a:lvl3pPr marL="914400" algn="l" defTabSz="914400" rtl="0" eaLnBrk="1" latinLnBrk="0" hangingPunct="1">
+              <a:defRPr sz="1800" kern="1200">
+                <a:solidFill>
+                  <a:schemeClr val="tx1"/>
+                </a:solidFill>
+                <a:latin typeface="+mn-lt"/>
+                <a:ea typeface="+mn-ea"/>
+                <a:cs typeface="+mn-cs"/>
+              </a:defRPr>
+            </a:lvl3pPr>
+            <a:lvl4pPr marL="1371600" algn="l" defTabSz="914400" rtl="0" eaLnBrk="1" latinLnBrk="0" hangingPunct="1">
+              <a:defRPr sz="1800" kern="1200">
+                <a:solidFill>
+                  <a:schemeClr val="tx1"/>
+                </a:solidFill>
+                <a:latin typeface="+mn-lt"/>
+                <a:ea typeface="+mn-ea"/>
+                <a:cs typeface="+mn-cs"/>
+              </a:defRPr>
+            </a:lvl4pPr>
+            <a:lvl5pPr marL="1828800" algn="l" defTabSz="914400" rtl="0" eaLnBrk="1" latinLnBrk="0" hangingPunct="1">
+              <a:defRPr sz="1800" kern="1200">
+                <a:solidFill>
+                  <a:schemeClr val="tx1"/>
+                </a:solidFill>
+                <a:latin typeface="+mn-lt"/>
+                <a:ea typeface="+mn-ea"/>
+                <a:cs typeface="+mn-cs"/>
+              </a:defRPr>
+            </a:lvl5pPr>
+            <a:lvl6pPr marL="2286000" algn="l" defTabSz="914400" rtl="0" eaLnBrk="1" latinLnBrk="0" hangingPunct="1">
+              <a:defRPr sz="1800" kern="1200">
+                <a:solidFill>
+                  <a:schemeClr val="tx1"/>
+                </a:solidFill>
+                <a:latin typeface="+mn-lt"/>
+                <a:ea typeface="+mn-ea"/>
+                <a:cs typeface="+mn-cs"/>
+              </a:defRPr>
+            </a:lvl6pPr>
+            <a:lvl7pPr marL="2743200" algn="l" defTabSz="914400" rtl="0" eaLnBrk="1" latinLnBrk="0" hangingPunct="1">
+              <a:defRPr sz="1800" kern="1200">
+                <a:solidFill>
+                  <a:schemeClr val="tx1"/>
+                </a:solidFill>
+                <a:latin typeface="+mn-lt"/>
+                <a:ea typeface="+mn-ea"/>
+                <a:cs typeface="+mn-cs"/>
+              </a:defRPr>
+            </a:lvl7pPr>
+            <a:lvl8pPr marL="3200400" algn="l" defTabSz="914400" rtl="0" eaLnBrk="1" latinLnBrk="0" hangingPunct="1">
+              <a:defRPr sz="1800" kern="1200">
+                <a:solidFill>
+                  <a:schemeClr val="tx1"/>
+                </a:solidFill>
+                <a:latin typeface="+mn-lt"/>
+                <a:ea typeface="+mn-ea"/>
+                <a:cs typeface="+mn-cs"/>
+              </a:defRPr>
+            </a:lvl8pPr>
+            <a:lvl9pPr marL="3657600" algn="l" defTabSz="914400" rtl="0" eaLnBrk="1" latinLnBrk="0" hangingPunct="1">
+              <a:defRPr sz="1800" kern="1200">
+                <a:solidFill>
+                  <a:schemeClr val="tx1"/>
+                </a:solidFill>
+                <a:latin typeface="+mn-lt"/>
+                <a:ea typeface="+mn-ea"/>
+                <a:cs typeface="+mn-cs"/>
+              </a:defRPr>
+            </a:lvl9pPr>
+          </a:lstStyle>
+          <a:p>
+            <a:pPr algn="ctr"/>
+            <a:endParaRPr lang="it-IT"/>
+          </a:p>
+        </p:txBody>
+      </p:sp>
+      <p:sp>
+        <p:nvSpPr>
+          <p:cNvPr id="11" name="TextBox 31">
+            <a:extLst>
+              <a:ext uri="{FF2B5EF4-FFF2-40B4-BE49-F238E27FC236}">
+                <a16:creationId xmlns:a16="http://schemas.microsoft.com/office/drawing/2014/main" id="{2442A708-BB11-1322-AEED-56CBDF5D2597}"/>
+              </a:ext>
+            </a:extLst>
+          </p:cNvPr>
+          <p:cNvSpPr txBox="1"/>
+          <p:nvPr/>
+        </p:nvSpPr>
+        <p:spPr>
+          <a:xfrm>
+            <a:off x="4824696" y="15469525"/>
+            <a:ext cx="1693385" cy="738664"/>
+          </a:xfrm>
+          <a:prstGeom prst="rect">
+            <a:avLst/>
+          </a:prstGeom>
+          <a:noFill/>
+        </p:spPr>
+        <p:txBody>
+          <a:bodyPr wrap="square">
+            <a:spAutoFit/>
+          </a:bodyPr>
+          <a:lstStyle>
+            <a:defPPr>
+              <a:defRPr lang="en-US"/>
+            </a:defPPr>
+            <a:lvl1pPr marL="0" algn="l" defTabSz="914400" rtl="0" eaLnBrk="1" latinLnBrk="0" hangingPunct="1">
+              <a:defRPr sz="1800" kern="1200">
+                <a:solidFill>
+                  <a:schemeClr val="tx1"/>
+                </a:solidFill>
+                <a:latin typeface="+mn-lt"/>
+                <a:ea typeface="+mn-ea"/>
+                <a:cs typeface="+mn-cs"/>
+              </a:defRPr>
+            </a:lvl1pPr>
+            <a:lvl2pPr marL="457200" algn="l" defTabSz="914400" rtl="0" eaLnBrk="1" latinLnBrk="0" hangingPunct="1">
+              <a:defRPr sz="1800" kern="1200">
+                <a:solidFill>
+                  <a:schemeClr val="tx1"/>
+                </a:solidFill>
+                <a:latin typeface="+mn-lt"/>
+                <a:ea typeface="+mn-ea"/>
+                <a:cs typeface="+mn-cs"/>
+              </a:defRPr>
+            </a:lvl2pPr>
+            <a:lvl3pPr marL="914400" algn="l" defTabSz="914400" rtl="0" eaLnBrk="1" latinLnBrk="0" hangingPunct="1">
+              <a:defRPr sz="1800" kern="1200">
+                <a:solidFill>
+                  <a:schemeClr val="tx1"/>
+                </a:solidFill>
+                <a:latin typeface="+mn-lt"/>
+                <a:ea typeface="+mn-ea"/>
+                <a:cs typeface="+mn-cs"/>
+              </a:defRPr>
+            </a:lvl3pPr>
+            <a:lvl4pPr marL="1371600" algn="l" defTabSz="914400" rtl="0" eaLnBrk="1" latinLnBrk="0" hangingPunct="1">
+              <a:defRPr sz="1800" kern="1200">
+                <a:solidFill>
+                  <a:schemeClr val="tx1"/>
+                </a:solidFill>
+                <a:latin typeface="+mn-lt"/>
+                <a:ea typeface="+mn-ea"/>
+                <a:cs typeface="+mn-cs"/>
+              </a:defRPr>
+            </a:lvl4pPr>
+            <a:lvl5pPr marL="1828800" algn="l" defTabSz="914400" rtl="0" eaLnBrk="1" latinLnBrk="0" hangingPunct="1">
+              <a:defRPr sz="1800" kern="1200">
+                <a:solidFill>
+                  <a:schemeClr val="tx1"/>
+                </a:solidFill>
+                <a:latin typeface="+mn-lt"/>
+                <a:ea typeface="+mn-ea"/>
+                <a:cs typeface="+mn-cs"/>
+              </a:defRPr>
+            </a:lvl5pPr>
+            <a:lvl6pPr marL="2286000" algn="l" defTabSz="914400" rtl="0" eaLnBrk="1" latinLnBrk="0" hangingPunct="1">
+              <a:defRPr sz="1800" kern="1200">
+                <a:solidFill>
+                  <a:schemeClr val="tx1"/>
+                </a:solidFill>
+                <a:latin typeface="+mn-lt"/>
+                <a:ea typeface="+mn-ea"/>
+                <a:cs typeface="+mn-cs"/>
+              </a:defRPr>
+            </a:lvl6pPr>
+            <a:lvl7pPr marL="2743200" algn="l" defTabSz="914400" rtl="0" eaLnBrk="1" latinLnBrk="0" hangingPunct="1">
+              <a:defRPr sz="1800" kern="1200">
+                <a:solidFill>
+                  <a:schemeClr val="tx1"/>
+                </a:solidFill>
+                <a:latin typeface="+mn-lt"/>
+                <a:ea typeface="+mn-ea"/>
+                <a:cs typeface="+mn-cs"/>
+              </a:defRPr>
+            </a:lvl7pPr>
+            <a:lvl8pPr marL="3200400" algn="l" defTabSz="914400" rtl="0" eaLnBrk="1" latinLnBrk="0" hangingPunct="1">
+              <a:defRPr sz="1800" kern="1200">
+                <a:solidFill>
+                  <a:schemeClr val="tx1"/>
+                </a:solidFill>
+                <a:latin typeface="+mn-lt"/>
+                <a:ea typeface="+mn-ea"/>
+                <a:cs typeface="+mn-cs"/>
+              </a:defRPr>
+            </a:lvl8pPr>
+            <a:lvl9pPr marL="3657600" algn="l" defTabSz="914400" rtl="0" eaLnBrk="1" latinLnBrk="0" hangingPunct="1">
+              <a:defRPr sz="1800" kern="1200">
+                <a:solidFill>
+                  <a:schemeClr val="tx1"/>
+                </a:solidFill>
+                <a:latin typeface="+mn-lt"/>
+                <a:ea typeface="+mn-ea"/>
+                <a:cs typeface="+mn-cs"/>
+              </a:defRPr>
+            </a:lvl9pPr>
+          </a:lstStyle>
+          <a:p>
+            <a:pPr algn="ctr"/>
+            <a:r>
+              <a:rPr lang="en-US" sz="1400" b="1" noProof="0" dirty="0"/>
+              <a:t>Endogenous / exogenous data exchange</a:t>
+            </a:r>
+          </a:p>
+        </p:txBody>
+      </p:sp>
+      <p:cxnSp>
+        <p:nvCxnSpPr>
+          <p:cNvPr id="12" name="Straight Arrow Connector 11">
+            <a:extLst>
+              <a:ext uri="{FF2B5EF4-FFF2-40B4-BE49-F238E27FC236}">
+                <a16:creationId xmlns:a16="http://schemas.microsoft.com/office/drawing/2014/main" id="{3D60B45E-47A1-369D-435F-A2A0232F0C6C}"/>
+              </a:ext>
+            </a:extLst>
+          </p:cNvPr>
+          <p:cNvCxnSpPr>
+            <a:cxnSpLocks/>
+          </p:cNvCxnSpPr>
+          <p:nvPr/>
+        </p:nvCxnSpPr>
+        <p:spPr>
+          <a:xfrm>
+            <a:off x="3077824" y="16673822"/>
+            <a:ext cx="439741" cy="0"/>
+          </a:xfrm>
+          <a:prstGeom prst="straightConnector1">
+            <a:avLst/>
+          </a:prstGeom>
+          <a:ln w="19050">
+            <a:solidFill>
+              <a:schemeClr val="tx1"/>
+            </a:solidFill>
+            <a:headEnd type="none" w="med" len="med"/>
+            <a:tailEnd type="arrow" w="med" len="med"/>
+          </a:ln>
+        </p:spPr>
+        <p:style>
+          <a:lnRef idx="1">
+            <a:schemeClr val="accent1"/>
+          </a:lnRef>
+          <a:fillRef idx="0">
+            <a:schemeClr val="accent1"/>
+          </a:fillRef>
+          <a:effectRef idx="0">
+            <a:schemeClr val="accent1"/>
+          </a:effectRef>
+          <a:fontRef idx="minor">
+            <a:schemeClr val="tx1"/>
+          </a:fontRef>
+        </p:style>
+      </p:cxnSp>
+      <p:sp>
+        <p:nvSpPr>
+          <p:cNvPr id="13" name="Rectangle 12">
+            <a:extLst>
+              <a:ext uri="{FF2B5EF4-FFF2-40B4-BE49-F238E27FC236}">
+                <a16:creationId xmlns:a16="http://schemas.microsoft.com/office/drawing/2014/main" id="{D4B0676C-3C22-CC3E-FAC1-5ED7FE949A5D}"/>
+              </a:ext>
+            </a:extLst>
+          </p:cNvPr>
+          <p:cNvSpPr/>
+          <p:nvPr/>
+        </p:nvSpPr>
+        <p:spPr>
+          <a:xfrm>
+            <a:off x="6668826" y="16352851"/>
+            <a:ext cx="1156386" cy="641942"/>
+          </a:xfrm>
+          <a:prstGeom prst="rect">
+            <a:avLst/>
+          </a:prstGeom>
+          <a:solidFill>
+            <a:srgbClr val="1A1A5B"/>
+          </a:solidFill>
+          <a:ln>
+            <a:noFill/>
+          </a:ln>
+        </p:spPr>
+        <p:style>
+          <a:lnRef idx="1">
+            <a:schemeClr val="accent1"/>
+          </a:lnRef>
+          <a:fillRef idx="3">
+            <a:schemeClr val="accent1"/>
+          </a:fillRef>
+          <a:effectRef idx="2">
+            <a:schemeClr val="accent1"/>
+          </a:effectRef>
+          <a:fontRef idx="minor">
+            <a:schemeClr val="lt1"/>
+          </a:fontRef>
+        </p:style>
+        <p:txBody>
+          <a:bodyPr rtlCol="0" anchor="ctr"/>
+          <a:lstStyle>
+            <a:defPPr>
+              <a:defRPr lang="en-US"/>
+            </a:defPPr>
+            <a:lvl1pPr marL="0" algn="l" defTabSz="914400" rtl="0" eaLnBrk="1" latinLnBrk="0" hangingPunct="1">
+              <a:defRPr sz="1800" kern="1200">
+                <a:solidFill>
+                  <a:schemeClr val="lt1"/>
+                </a:solidFill>
+                <a:latin typeface="+mn-lt"/>
+                <a:ea typeface="+mn-ea"/>
+                <a:cs typeface="+mn-cs"/>
+              </a:defRPr>
+            </a:lvl1pPr>
+            <a:lvl2pPr marL="457200" algn="l" defTabSz="914400" rtl="0" eaLnBrk="1" latinLnBrk="0" hangingPunct="1">
+              <a:defRPr sz="1800" kern="1200">
+                <a:solidFill>
+                  <a:schemeClr val="lt1"/>
+                </a:solidFill>
+                <a:latin typeface="+mn-lt"/>
+                <a:ea typeface="+mn-ea"/>
+                <a:cs typeface="+mn-cs"/>
+              </a:defRPr>
+            </a:lvl2pPr>
+            <a:lvl3pPr marL="914400" algn="l" defTabSz="914400" rtl="0" eaLnBrk="1" latinLnBrk="0" hangingPunct="1">
+              <a:defRPr sz="1800" kern="1200">
+                <a:solidFill>
+                  <a:schemeClr val="lt1"/>
+                </a:solidFill>
+                <a:latin typeface="+mn-lt"/>
+                <a:ea typeface="+mn-ea"/>
+                <a:cs typeface="+mn-cs"/>
+              </a:defRPr>
+            </a:lvl3pPr>
+            <a:lvl4pPr marL="1371600" algn="l" defTabSz="914400" rtl="0" eaLnBrk="1" latinLnBrk="0" hangingPunct="1">
+              <a:defRPr sz="1800" kern="1200">
+                <a:solidFill>
+                  <a:schemeClr val="lt1"/>
+                </a:solidFill>
+                <a:latin typeface="+mn-lt"/>
+                <a:ea typeface="+mn-ea"/>
+                <a:cs typeface="+mn-cs"/>
+              </a:defRPr>
+            </a:lvl4pPr>
+            <a:lvl5pPr marL="1828800" algn="l" defTabSz="914400" rtl="0" eaLnBrk="1" latinLnBrk="0" hangingPunct="1">
+              <a:defRPr sz="1800" kern="1200">
+                <a:solidFill>
+                  <a:schemeClr val="lt1"/>
+                </a:solidFill>
+                <a:latin typeface="+mn-lt"/>
+                <a:ea typeface="+mn-ea"/>
+                <a:cs typeface="+mn-cs"/>
+              </a:defRPr>
+            </a:lvl5pPr>
+            <a:lvl6pPr marL="2286000" algn="l" defTabSz="914400" rtl="0" eaLnBrk="1" latinLnBrk="0" hangingPunct="1">
+              <a:defRPr sz="1800" kern="1200">
+                <a:solidFill>
+                  <a:schemeClr val="lt1"/>
+                </a:solidFill>
+                <a:latin typeface="+mn-lt"/>
+                <a:ea typeface="+mn-ea"/>
+                <a:cs typeface="+mn-cs"/>
+              </a:defRPr>
+            </a:lvl6pPr>
+            <a:lvl7pPr marL="2743200" algn="l" defTabSz="914400" rtl="0" eaLnBrk="1" latinLnBrk="0" hangingPunct="1">
+              <a:defRPr sz="1800" kern="1200">
+                <a:solidFill>
+                  <a:schemeClr val="lt1"/>
+                </a:solidFill>
+                <a:latin typeface="+mn-lt"/>
+                <a:ea typeface="+mn-ea"/>
+                <a:cs typeface="+mn-cs"/>
+              </a:defRPr>
+            </a:lvl7pPr>
+            <a:lvl8pPr marL="3200400" algn="l" defTabSz="914400" rtl="0" eaLnBrk="1" latinLnBrk="0" hangingPunct="1">
+              <a:defRPr sz="1800" kern="1200">
+                <a:solidFill>
+                  <a:schemeClr val="lt1"/>
+                </a:solidFill>
+                <a:latin typeface="+mn-lt"/>
+                <a:ea typeface="+mn-ea"/>
+                <a:cs typeface="+mn-cs"/>
+              </a:defRPr>
+            </a:lvl8pPr>
+            <a:lvl9pPr marL="3657600" algn="l" defTabSz="914400" rtl="0" eaLnBrk="1" latinLnBrk="0" hangingPunct="1">
+              <a:defRPr sz="1800" kern="1200">
+                <a:solidFill>
+                  <a:schemeClr val="lt1"/>
+                </a:solidFill>
+                <a:latin typeface="+mn-lt"/>
+                <a:ea typeface="+mn-ea"/>
+                <a:cs typeface="+mn-cs"/>
+              </a:defRPr>
+            </a:lvl9pPr>
+          </a:lstStyle>
+          <a:p>
+            <a:r>
+              <a:rPr lang="it-IT" sz="1600" dirty="0"/>
+              <a:t>Energy </a:t>
+            </a:r>
+          </a:p>
+          <a:p>
+            <a:r>
+              <a:rPr lang="it-IT" sz="1600" dirty="0"/>
+              <a:t>model</a:t>
+            </a:r>
+          </a:p>
+        </p:txBody>
+      </p:sp>
+      <p:sp>
+        <p:nvSpPr>
+          <p:cNvPr id="14" name="Rectangle 13">
+            <a:extLst>
+              <a:ext uri="{FF2B5EF4-FFF2-40B4-BE49-F238E27FC236}">
+                <a16:creationId xmlns:a16="http://schemas.microsoft.com/office/drawing/2014/main" id="{1B421088-6542-5189-9CAF-5A2F4D3CD9BF}"/>
+              </a:ext>
+            </a:extLst>
+          </p:cNvPr>
+          <p:cNvSpPr/>
+          <p:nvPr/>
+        </p:nvSpPr>
+        <p:spPr>
+          <a:xfrm>
+            <a:off x="6668826" y="17529579"/>
+            <a:ext cx="1156386" cy="641942"/>
+          </a:xfrm>
+          <a:prstGeom prst="rect">
+            <a:avLst/>
+          </a:prstGeom>
+          <a:solidFill>
+            <a:srgbClr val="8393A1"/>
+          </a:solidFill>
+          <a:ln>
+            <a:noFill/>
+          </a:ln>
+        </p:spPr>
+        <p:style>
+          <a:lnRef idx="1">
+            <a:schemeClr val="accent1"/>
+          </a:lnRef>
+          <a:fillRef idx="3">
+            <a:schemeClr val="accent1"/>
+          </a:fillRef>
+          <a:effectRef idx="2">
+            <a:schemeClr val="accent1"/>
+          </a:effectRef>
+          <a:fontRef idx="minor">
+            <a:schemeClr val="lt1"/>
+          </a:fontRef>
+        </p:style>
+        <p:txBody>
+          <a:bodyPr rtlCol="0" anchor="ctr"/>
+          <a:lstStyle>
+            <a:defPPr>
+              <a:defRPr lang="en-US"/>
+            </a:defPPr>
+            <a:lvl1pPr marL="0" algn="l" defTabSz="914400" rtl="0" eaLnBrk="1" latinLnBrk="0" hangingPunct="1">
+              <a:defRPr sz="1800" kern="1200">
+                <a:solidFill>
+                  <a:schemeClr val="lt1"/>
+                </a:solidFill>
+                <a:latin typeface="+mn-lt"/>
+                <a:ea typeface="+mn-ea"/>
+                <a:cs typeface="+mn-cs"/>
+              </a:defRPr>
+            </a:lvl1pPr>
+            <a:lvl2pPr marL="457200" algn="l" defTabSz="914400" rtl="0" eaLnBrk="1" latinLnBrk="0" hangingPunct="1">
+              <a:defRPr sz="1800" kern="1200">
+                <a:solidFill>
+                  <a:schemeClr val="lt1"/>
+                </a:solidFill>
+                <a:latin typeface="+mn-lt"/>
+                <a:ea typeface="+mn-ea"/>
+                <a:cs typeface="+mn-cs"/>
+              </a:defRPr>
+            </a:lvl2pPr>
+            <a:lvl3pPr marL="914400" algn="l" defTabSz="914400" rtl="0" eaLnBrk="1" latinLnBrk="0" hangingPunct="1">
+              <a:defRPr sz="1800" kern="1200">
+                <a:solidFill>
+                  <a:schemeClr val="lt1"/>
+                </a:solidFill>
+                <a:latin typeface="+mn-lt"/>
+                <a:ea typeface="+mn-ea"/>
+                <a:cs typeface="+mn-cs"/>
+              </a:defRPr>
+            </a:lvl3pPr>
+            <a:lvl4pPr marL="1371600" algn="l" defTabSz="914400" rtl="0" eaLnBrk="1" latinLnBrk="0" hangingPunct="1">
+              <a:defRPr sz="1800" kern="1200">
+                <a:solidFill>
+                  <a:schemeClr val="lt1"/>
+                </a:solidFill>
+                <a:latin typeface="+mn-lt"/>
+                <a:ea typeface="+mn-ea"/>
+                <a:cs typeface="+mn-cs"/>
+              </a:defRPr>
+            </a:lvl4pPr>
+            <a:lvl5pPr marL="1828800" algn="l" defTabSz="914400" rtl="0" eaLnBrk="1" latinLnBrk="0" hangingPunct="1">
+              <a:defRPr sz="1800" kern="1200">
+                <a:solidFill>
+                  <a:schemeClr val="lt1"/>
+                </a:solidFill>
+                <a:latin typeface="+mn-lt"/>
+                <a:ea typeface="+mn-ea"/>
+                <a:cs typeface="+mn-cs"/>
+              </a:defRPr>
+            </a:lvl5pPr>
+            <a:lvl6pPr marL="2286000" algn="l" defTabSz="914400" rtl="0" eaLnBrk="1" latinLnBrk="0" hangingPunct="1">
+              <a:defRPr sz="1800" kern="1200">
+                <a:solidFill>
+                  <a:schemeClr val="lt1"/>
+                </a:solidFill>
+                <a:latin typeface="+mn-lt"/>
+                <a:ea typeface="+mn-ea"/>
+                <a:cs typeface="+mn-cs"/>
+              </a:defRPr>
+            </a:lvl6pPr>
+            <a:lvl7pPr marL="2743200" algn="l" defTabSz="914400" rtl="0" eaLnBrk="1" latinLnBrk="0" hangingPunct="1">
+              <a:defRPr sz="1800" kern="1200">
+                <a:solidFill>
+                  <a:schemeClr val="lt1"/>
+                </a:solidFill>
+                <a:latin typeface="+mn-lt"/>
+                <a:ea typeface="+mn-ea"/>
+                <a:cs typeface="+mn-cs"/>
+              </a:defRPr>
+            </a:lvl7pPr>
+            <a:lvl8pPr marL="3200400" algn="l" defTabSz="914400" rtl="0" eaLnBrk="1" latinLnBrk="0" hangingPunct="1">
+              <a:defRPr sz="1800" kern="1200">
+                <a:solidFill>
+                  <a:schemeClr val="lt1"/>
+                </a:solidFill>
+                <a:latin typeface="+mn-lt"/>
+                <a:ea typeface="+mn-ea"/>
+                <a:cs typeface="+mn-cs"/>
+              </a:defRPr>
+            </a:lvl8pPr>
+            <a:lvl9pPr marL="3657600" algn="l" defTabSz="914400" rtl="0" eaLnBrk="1" latinLnBrk="0" hangingPunct="1">
+              <a:defRPr sz="1800" kern="1200">
+                <a:solidFill>
+                  <a:schemeClr val="lt1"/>
+                </a:solidFill>
+                <a:latin typeface="+mn-lt"/>
+                <a:ea typeface="+mn-ea"/>
+                <a:cs typeface="+mn-cs"/>
+              </a:defRPr>
+            </a:lvl9pPr>
+          </a:lstStyle>
+          <a:p>
+            <a:r>
+              <a:rPr lang="it-IT" sz="1600" dirty="0" err="1"/>
+              <a:t>Economic</a:t>
+            </a:r>
+            <a:r>
+              <a:rPr lang="it-IT" sz="1600" dirty="0"/>
+              <a:t> </a:t>
+            </a:r>
+          </a:p>
+          <a:p>
+            <a:r>
+              <a:rPr lang="it-IT" sz="1600" dirty="0"/>
+              <a:t>model</a:t>
+            </a:r>
+          </a:p>
+        </p:txBody>
+      </p:sp>
+      <p:cxnSp>
+        <p:nvCxnSpPr>
+          <p:cNvPr id="15" name="Connector: Elbow 14">
+            <a:extLst>
+              <a:ext uri="{FF2B5EF4-FFF2-40B4-BE49-F238E27FC236}">
+                <a16:creationId xmlns:a16="http://schemas.microsoft.com/office/drawing/2014/main" id="{21B786BF-D84B-EBFA-01AF-1A67CF61F45E}"/>
+              </a:ext>
+            </a:extLst>
+          </p:cNvPr>
+          <p:cNvCxnSpPr>
+            <a:stCxn id="3" idx="3"/>
+          </p:cNvCxnSpPr>
+          <p:nvPr/>
+        </p:nvCxnSpPr>
+        <p:spPr>
+          <a:xfrm>
+            <a:off x="4673951" y="16673822"/>
+            <a:ext cx="592970" cy="320971"/>
+          </a:xfrm>
+          <a:prstGeom prst="bentConnector3">
+            <a:avLst/>
+          </a:prstGeom>
+          <a:ln w="19050">
+            <a:solidFill>
+              <a:schemeClr val="tx1"/>
+            </a:solidFill>
+            <a:headEnd type="none" w="med" len="med"/>
+            <a:tailEnd type="arrow" w="med" len="med"/>
+          </a:ln>
+        </p:spPr>
+        <p:style>
+          <a:lnRef idx="1">
+            <a:schemeClr val="accent1"/>
+          </a:lnRef>
+          <a:fillRef idx="0">
+            <a:schemeClr val="accent1"/>
+          </a:fillRef>
+          <a:effectRef idx="0">
+            <a:schemeClr val="accent1"/>
+          </a:effectRef>
+          <a:fontRef idx="minor">
+            <a:schemeClr val="tx1"/>
+          </a:fontRef>
+        </p:style>
+      </p:cxnSp>
+      <p:cxnSp>
+        <p:nvCxnSpPr>
+          <p:cNvPr id="16" name="Connector: Elbow 15">
+            <a:extLst>
+              <a:ext uri="{FF2B5EF4-FFF2-40B4-BE49-F238E27FC236}">
+                <a16:creationId xmlns:a16="http://schemas.microsoft.com/office/drawing/2014/main" id="{807F0E72-CE76-3037-0AFC-2940B9680730}"/>
+              </a:ext>
+            </a:extLst>
+          </p:cNvPr>
+          <p:cNvCxnSpPr>
+            <a:cxnSpLocks/>
+            <a:stCxn id="7" idx="3"/>
+          </p:cNvCxnSpPr>
+          <p:nvPr/>
+        </p:nvCxnSpPr>
+        <p:spPr>
+          <a:xfrm flipV="1">
+            <a:off x="4673951" y="17414106"/>
+            <a:ext cx="552168" cy="436444"/>
+          </a:xfrm>
+          <a:prstGeom prst="bentConnector3">
+            <a:avLst/>
+          </a:prstGeom>
+          <a:ln w="19050">
+            <a:solidFill>
+              <a:schemeClr val="tx1"/>
+            </a:solidFill>
+            <a:headEnd type="none" w="med" len="med"/>
+            <a:tailEnd type="arrow" w="med" len="med"/>
+          </a:ln>
+        </p:spPr>
+        <p:style>
+          <a:lnRef idx="1">
+            <a:schemeClr val="accent1"/>
+          </a:lnRef>
+          <a:fillRef idx="0">
+            <a:schemeClr val="accent1"/>
+          </a:fillRef>
+          <a:effectRef idx="0">
+            <a:schemeClr val="accent1"/>
+          </a:effectRef>
+          <a:fontRef idx="minor">
+            <a:schemeClr val="tx1"/>
+          </a:fontRef>
+        </p:style>
+      </p:cxnSp>
+      <p:cxnSp>
+        <p:nvCxnSpPr>
+          <p:cNvPr id="17" name="Connector: Elbow 16">
+            <a:extLst>
+              <a:ext uri="{FF2B5EF4-FFF2-40B4-BE49-F238E27FC236}">
+                <a16:creationId xmlns:a16="http://schemas.microsoft.com/office/drawing/2014/main" id="{E9BD7252-C997-B36A-AFA0-E84BE9E904BE}"/>
+              </a:ext>
+            </a:extLst>
+          </p:cNvPr>
+          <p:cNvCxnSpPr>
+            <a:cxnSpLocks/>
+            <a:endCxn id="13" idx="1"/>
+          </p:cNvCxnSpPr>
+          <p:nvPr/>
+        </p:nvCxnSpPr>
+        <p:spPr>
+          <a:xfrm flipV="1">
+            <a:off x="6075856" y="16673822"/>
+            <a:ext cx="592970" cy="385532"/>
+          </a:xfrm>
+          <a:prstGeom prst="bentConnector3">
+            <a:avLst/>
+          </a:prstGeom>
+          <a:ln w="19050">
+            <a:solidFill>
+              <a:schemeClr val="tx1"/>
+            </a:solidFill>
+            <a:headEnd type="none" w="med" len="med"/>
+            <a:tailEnd type="arrow" w="med" len="med"/>
+          </a:ln>
+        </p:spPr>
+        <p:style>
+          <a:lnRef idx="1">
+            <a:schemeClr val="accent1"/>
+          </a:lnRef>
+          <a:fillRef idx="0">
+            <a:schemeClr val="accent1"/>
+          </a:fillRef>
+          <a:effectRef idx="0">
+            <a:schemeClr val="accent1"/>
+          </a:effectRef>
+          <a:fontRef idx="minor">
+            <a:schemeClr val="tx1"/>
+          </a:fontRef>
+        </p:style>
+      </p:cxnSp>
+      <p:cxnSp>
+        <p:nvCxnSpPr>
+          <p:cNvPr id="18" name="Connector: Elbow 17">
+            <a:extLst>
+              <a:ext uri="{FF2B5EF4-FFF2-40B4-BE49-F238E27FC236}">
+                <a16:creationId xmlns:a16="http://schemas.microsoft.com/office/drawing/2014/main" id="{51741EC1-BD7B-A6BD-022C-734DB9157CCA}"/>
+              </a:ext>
+            </a:extLst>
+          </p:cNvPr>
+          <p:cNvCxnSpPr>
+            <a:cxnSpLocks/>
+            <a:endCxn id="14" idx="1"/>
+          </p:cNvCxnSpPr>
+          <p:nvPr/>
+        </p:nvCxnSpPr>
+        <p:spPr>
+          <a:xfrm>
+            <a:off x="6075856" y="17354850"/>
+            <a:ext cx="592970" cy="495700"/>
+          </a:xfrm>
+          <a:prstGeom prst="bentConnector3">
+            <a:avLst/>
+          </a:prstGeom>
+          <a:ln w="19050">
+            <a:solidFill>
+              <a:schemeClr val="tx1"/>
+            </a:solidFill>
+            <a:headEnd type="none" w="med" len="med"/>
+            <a:tailEnd type="arrow" w="med" len="med"/>
+          </a:ln>
+        </p:spPr>
+        <p:style>
+          <a:lnRef idx="1">
+            <a:schemeClr val="accent1"/>
+          </a:lnRef>
+          <a:fillRef idx="0">
+            <a:schemeClr val="accent1"/>
+          </a:fillRef>
+          <a:effectRef idx="0">
+            <a:schemeClr val="accent1"/>
+          </a:effectRef>
+          <a:fontRef idx="minor">
+            <a:schemeClr val="tx1"/>
+          </a:fontRef>
+        </p:style>
+      </p:cxnSp>
+      <p:pic>
+        <p:nvPicPr>
+          <p:cNvPr id="19" name="Picture 18" descr="database icon">
+            <a:hlinkClick r:id="rId2" tooltip="database icon"/>
+            <a:extLst>
+              <a:ext uri="{FF2B5EF4-FFF2-40B4-BE49-F238E27FC236}">
+                <a16:creationId xmlns:a16="http://schemas.microsoft.com/office/drawing/2014/main" id="{DBEA101C-77F6-AD19-FEED-CB3D562EE7B4}"/>
+              </a:ext>
+            </a:extLst>
+          </p:cNvPr>
+          <p:cNvPicPr>
+            <a:picLocks noChangeAspect="1" noChangeArrowheads="1"/>
+          </p:cNvPicPr>
+          <p:nvPr/>
+        </p:nvPicPr>
+        <p:blipFill>
+          <a:blip r:embed="rId3">
+            <a:extLst>
+              <a:ext uri="{28A0092B-C50C-407E-A947-70E740481C1C}">
+                <a14:useLocalDpi xmlns:a14="http://schemas.microsoft.com/office/drawing/2010/main" val="0"/>
+              </a:ext>
+            </a:extLst>
+          </a:blip>
+          <a:srcRect/>
+          <a:stretch>
+            <a:fillRect/>
+          </a:stretch>
+        </p:blipFill>
+        <p:spPr bwMode="auto">
+          <a:xfrm>
+            <a:off x="8418182" y="16841412"/>
+            <a:ext cx="808936" cy="808934"/>
+          </a:xfrm>
+          <a:prstGeom prst="rect">
+            <a:avLst/>
+          </a:prstGeom>
+          <a:noFill/>
+          <a:extLst>
+            <a:ext uri="{909E8E84-426E-40DD-AFC4-6F175D3DCCD1}">
+              <a14:hiddenFill xmlns:a14="http://schemas.microsoft.com/office/drawing/2010/main">
+                <a:solidFill>
+                  <a:srgbClr val="FFFFFF"/>
+                </a:solidFill>
+              </a14:hiddenFill>
+            </a:ext>
+          </a:extLst>
+        </p:spPr>
+      </p:pic>
+      <p:cxnSp>
+        <p:nvCxnSpPr>
+          <p:cNvPr id="20" name="Connector: Elbow 19">
+            <a:extLst>
+              <a:ext uri="{FF2B5EF4-FFF2-40B4-BE49-F238E27FC236}">
+                <a16:creationId xmlns:a16="http://schemas.microsoft.com/office/drawing/2014/main" id="{86E69AFA-C31A-A36F-AD11-BDD30B5BCC22}"/>
+              </a:ext>
+            </a:extLst>
+          </p:cNvPr>
+          <p:cNvCxnSpPr/>
+          <p:nvPr/>
+        </p:nvCxnSpPr>
+        <p:spPr>
+          <a:xfrm>
+            <a:off x="7825212" y="16673822"/>
+            <a:ext cx="592970" cy="320971"/>
+          </a:xfrm>
+          <a:prstGeom prst="bentConnector3">
+            <a:avLst/>
+          </a:prstGeom>
+          <a:ln w="19050">
+            <a:solidFill>
+              <a:schemeClr val="tx1"/>
+            </a:solidFill>
+            <a:headEnd type="none" w="med" len="med"/>
+            <a:tailEnd type="arrow" w="med" len="med"/>
+          </a:ln>
+        </p:spPr>
+        <p:style>
+          <a:lnRef idx="1">
+            <a:schemeClr val="accent1"/>
+          </a:lnRef>
+          <a:fillRef idx="0">
+            <a:schemeClr val="accent1"/>
+          </a:fillRef>
+          <a:effectRef idx="0">
+            <a:schemeClr val="accent1"/>
+          </a:effectRef>
+          <a:fontRef idx="minor">
+            <a:schemeClr val="tx1"/>
+          </a:fontRef>
+        </p:style>
+      </p:cxnSp>
+      <p:cxnSp>
+        <p:nvCxnSpPr>
+          <p:cNvPr id="21" name="Connector: Elbow 20">
+            <a:extLst>
+              <a:ext uri="{FF2B5EF4-FFF2-40B4-BE49-F238E27FC236}">
+                <a16:creationId xmlns:a16="http://schemas.microsoft.com/office/drawing/2014/main" id="{DB5C36E2-BAAB-D815-D7C8-A7B07525599D}"/>
+              </a:ext>
+            </a:extLst>
+          </p:cNvPr>
+          <p:cNvCxnSpPr>
+            <a:cxnSpLocks/>
+          </p:cNvCxnSpPr>
+          <p:nvPr/>
+        </p:nvCxnSpPr>
+        <p:spPr>
+          <a:xfrm flipV="1">
+            <a:off x="7825212" y="17414106"/>
+            <a:ext cx="552168" cy="436444"/>
+          </a:xfrm>
+          <a:prstGeom prst="bentConnector3">
+            <a:avLst/>
+          </a:prstGeom>
+          <a:ln w="19050">
+            <a:solidFill>
+              <a:schemeClr val="tx1"/>
+            </a:solidFill>
+            <a:headEnd type="none" w="med" len="med"/>
+            <a:tailEnd type="arrow" w="med" len="med"/>
+          </a:ln>
+        </p:spPr>
+        <p:style>
+          <a:lnRef idx="1">
+            <a:schemeClr val="accent1"/>
+          </a:lnRef>
+          <a:fillRef idx="0">
+            <a:schemeClr val="accent1"/>
+          </a:fillRef>
+          <a:effectRef idx="0">
+            <a:schemeClr val="accent1"/>
+          </a:effectRef>
+          <a:fontRef idx="minor">
+            <a:schemeClr val="tx1"/>
+          </a:fontRef>
+        </p:style>
+      </p:cxnSp>
+      <mc:AlternateContent xmlns:mc="http://schemas.openxmlformats.org/markup-compatibility/2006">
+        <mc:Choice xmlns:a14="http://schemas.microsoft.com/office/drawing/2010/main" Requires="a14">
+          <p:sp>
+            <p:nvSpPr>
+              <p:cNvPr id="22" name="TextBox 78">
+                <a:extLst>
+                  <a:ext uri="{FF2B5EF4-FFF2-40B4-BE49-F238E27FC236}">
+                    <a16:creationId xmlns:a16="http://schemas.microsoft.com/office/drawing/2014/main" id="{62DD9D91-E809-9B33-C779-20BC5E00991B}"/>
+                  </a:ext>
+                </a:extLst>
+              </p:cNvPr>
+              <p:cNvSpPr txBox="1"/>
+              <p:nvPr/>
+            </p:nvSpPr>
+            <p:spPr>
+              <a:xfrm>
+                <a:off x="6697338" y="15556455"/>
+                <a:ext cx="1270361" cy="523220"/>
+              </a:xfrm>
+              <a:prstGeom prst="rect">
+                <a:avLst/>
+              </a:prstGeom>
+              <a:noFill/>
+            </p:spPr>
+            <p:txBody>
+              <a:bodyPr wrap="square">
+                <a:spAutoFit/>
+              </a:bodyPr>
+              <a:lstStyle>
+                <a:defPPr>
+                  <a:defRPr lang="en-US"/>
+                </a:defPPr>
+                <a:lvl1pPr marL="0" algn="l" defTabSz="914400" rtl="0" eaLnBrk="1" latinLnBrk="0" hangingPunct="1">
+                  <a:defRPr sz="1800" kern="1200">
+                    <a:solidFill>
+                      <a:schemeClr val="tx1"/>
+                    </a:solidFill>
+                    <a:latin typeface="+mn-lt"/>
+                    <a:ea typeface="+mn-ea"/>
+                    <a:cs typeface="+mn-cs"/>
+                  </a:defRPr>
+                </a:lvl1pPr>
+                <a:lvl2pPr marL="457200" algn="l" defTabSz="914400" rtl="0" eaLnBrk="1" latinLnBrk="0" hangingPunct="1">
+                  <a:defRPr sz="1800" kern="1200">
+                    <a:solidFill>
+                      <a:schemeClr val="tx1"/>
+                    </a:solidFill>
+                    <a:latin typeface="+mn-lt"/>
+                    <a:ea typeface="+mn-ea"/>
+                    <a:cs typeface="+mn-cs"/>
+                  </a:defRPr>
+                </a:lvl2pPr>
+                <a:lvl3pPr marL="914400" algn="l" defTabSz="914400" rtl="0" eaLnBrk="1" latinLnBrk="0" hangingPunct="1">
+                  <a:defRPr sz="1800" kern="1200">
+                    <a:solidFill>
+                      <a:schemeClr val="tx1"/>
+                    </a:solidFill>
+                    <a:latin typeface="+mn-lt"/>
+                    <a:ea typeface="+mn-ea"/>
+                    <a:cs typeface="+mn-cs"/>
+                  </a:defRPr>
+                </a:lvl3pPr>
+                <a:lvl4pPr marL="1371600" algn="l" defTabSz="914400" rtl="0" eaLnBrk="1" latinLnBrk="0" hangingPunct="1">
+                  <a:defRPr sz="1800" kern="1200">
+                    <a:solidFill>
+                      <a:schemeClr val="tx1"/>
+                    </a:solidFill>
+                    <a:latin typeface="+mn-lt"/>
+                    <a:ea typeface="+mn-ea"/>
+                    <a:cs typeface="+mn-cs"/>
+                  </a:defRPr>
+                </a:lvl4pPr>
+                <a:lvl5pPr marL="1828800" algn="l" defTabSz="914400" rtl="0" eaLnBrk="1" latinLnBrk="0" hangingPunct="1">
+                  <a:defRPr sz="1800" kern="1200">
+                    <a:solidFill>
+                      <a:schemeClr val="tx1"/>
+                    </a:solidFill>
+                    <a:latin typeface="+mn-lt"/>
+                    <a:ea typeface="+mn-ea"/>
+                    <a:cs typeface="+mn-cs"/>
+                  </a:defRPr>
+                </a:lvl5pPr>
+                <a:lvl6pPr marL="2286000" algn="l" defTabSz="914400" rtl="0" eaLnBrk="1" latinLnBrk="0" hangingPunct="1">
+                  <a:defRPr sz="1800" kern="1200">
+                    <a:solidFill>
+                      <a:schemeClr val="tx1"/>
+                    </a:solidFill>
+                    <a:latin typeface="+mn-lt"/>
+                    <a:ea typeface="+mn-ea"/>
+                    <a:cs typeface="+mn-cs"/>
+                  </a:defRPr>
+                </a:lvl6pPr>
+                <a:lvl7pPr marL="2743200" algn="l" defTabSz="914400" rtl="0" eaLnBrk="1" latinLnBrk="0" hangingPunct="1">
+                  <a:defRPr sz="1800" kern="1200">
+                    <a:solidFill>
+                      <a:schemeClr val="tx1"/>
+                    </a:solidFill>
+                    <a:latin typeface="+mn-lt"/>
+                    <a:ea typeface="+mn-ea"/>
+                    <a:cs typeface="+mn-cs"/>
+                  </a:defRPr>
+                </a:lvl7pPr>
+                <a:lvl8pPr marL="3200400" algn="l" defTabSz="914400" rtl="0" eaLnBrk="1" latinLnBrk="0" hangingPunct="1">
+                  <a:defRPr sz="1800" kern="1200">
+                    <a:solidFill>
+                      <a:schemeClr val="tx1"/>
+                    </a:solidFill>
+                    <a:latin typeface="+mn-lt"/>
+                    <a:ea typeface="+mn-ea"/>
+                    <a:cs typeface="+mn-cs"/>
+                  </a:defRPr>
+                </a:lvl8pPr>
+                <a:lvl9pPr marL="3657600" algn="l" defTabSz="914400" rtl="0" eaLnBrk="1" latinLnBrk="0" hangingPunct="1">
+                  <a:defRPr sz="1800" kern="1200">
+                    <a:solidFill>
+                      <a:schemeClr val="tx1"/>
+                    </a:solidFill>
+                    <a:latin typeface="+mn-lt"/>
+                    <a:ea typeface="+mn-ea"/>
+                    <a:cs typeface="+mn-cs"/>
+                  </a:defRPr>
+                </a:lvl9pPr>
+              </a:lstStyle>
+              <a:p>
+                <a:pPr algn="ctr"/>
+                <a:r>
+                  <a:rPr lang="en-US" sz="1400" b="1" dirty="0">
+                    <a:latin typeface="Trebuchet MS" panose="020B0603020202020204" pitchFamily="34" charset="0"/>
+                  </a:rPr>
+                  <a:t>Iteration</a:t>
+                </a:r>
+                <a:endParaRPr lang="it-IT" sz="1400" b="1" i="0" dirty="0">
+                  <a:latin typeface="Cambria Math" panose="02040503050406030204" pitchFamily="18" charset="0"/>
+                </a:endParaRPr>
+              </a:p>
+              <a:p>
+                <a:pPr algn="ctr"/>
+                <a14:m>
+                  <m:oMathPara xmlns:m="http://schemas.openxmlformats.org/officeDocument/2006/math">
+                    <m:oMathParaPr>
+                      <m:jc m:val="centerGroup"/>
+                    </m:oMathParaPr>
+                    <m:oMath xmlns:m="http://schemas.openxmlformats.org/officeDocument/2006/math">
+                      <m:r>
+                        <a:rPr lang="it-IT" sz="1400" b="1" i="1" dirty="0" smtClean="0">
+                          <a:latin typeface="Cambria Math" panose="02040503050406030204" pitchFamily="18" charset="0"/>
+                        </a:rPr>
+                        <m:t>𝟐</m:t>
+                      </m:r>
+                    </m:oMath>
+                  </m:oMathPara>
+                </a14:m>
+                <a:endParaRPr lang="it-IT" sz="1400" b="1" dirty="0"/>
+              </a:p>
+            </p:txBody>
+          </p:sp>
+        </mc:Choice>
+        <mc:Fallback>
+          <p:sp>
+            <p:nvSpPr>
+              <p:cNvPr id="22" name="TextBox 78">
+                <a:extLst>
+                  <a:ext uri="{FF2B5EF4-FFF2-40B4-BE49-F238E27FC236}">
+                    <a16:creationId xmlns:a16="http://schemas.microsoft.com/office/drawing/2014/main" id="{62DD9D91-E809-9B33-C779-20BC5E00991B}"/>
+                  </a:ext>
+                </a:extLst>
+              </p:cNvPr>
+              <p:cNvSpPr txBox="1">
+                <a:spLocks noRot="1" noChangeAspect="1" noMove="1" noResize="1" noEditPoints="1" noAdjustHandles="1" noChangeArrowheads="1" noChangeShapeType="1" noTextEdit="1"/>
+              </p:cNvSpPr>
+              <p:nvPr/>
+            </p:nvSpPr>
+            <p:spPr>
+              <a:xfrm>
+                <a:off x="6697338" y="15556455"/>
+                <a:ext cx="1270361" cy="523220"/>
+              </a:xfrm>
+              <a:prstGeom prst="rect">
+                <a:avLst/>
+              </a:prstGeom>
+              <a:blipFill>
+                <a:blip r:embed="rId5"/>
+                <a:stretch>
+                  <a:fillRect t="-3488"/>
+                </a:stretch>
+              </a:blipFill>
+            </p:spPr>
+            <p:txBody>
+              <a:bodyPr/>
+              <a:lstStyle/>
+              <a:p>
+                <a:r>
+                  <a:rPr lang="it-IT">
+                    <a:noFill/>
+                  </a:rPr>
+                  <a:t> </a:t>
+                </a:r>
+              </a:p>
+            </p:txBody>
+          </p:sp>
+        </mc:Fallback>
+      </mc:AlternateContent>
+      <p:sp>
+        <p:nvSpPr>
+          <p:cNvPr id="23" name="TextBox 81">
+            <a:extLst>
+              <a:ext uri="{FF2B5EF4-FFF2-40B4-BE49-F238E27FC236}">
+                <a16:creationId xmlns:a16="http://schemas.microsoft.com/office/drawing/2014/main" id="{86F2D211-D305-34C3-5149-3FCF3817F60E}"/>
+              </a:ext>
+            </a:extLst>
+          </p:cNvPr>
+          <p:cNvSpPr txBox="1"/>
+          <p:nvPr/>
+        </p:nvSpPr>
+        <p:spPr>
+          <a:xfrm>
+            <a:off x="4824696" y="18307264"/>
+            <a:ext cx="1693385" cy="307777"/>
+          </a:xfrm>
+          <a:prstGeom prst="rect">
+            <a:avLst/>
+          </a:prstGeom>
+          <a:noFill/>
+        </p:spPr>
+        <p:txBody>
+          <a:bodyPr wrap="square">
+            <a:spAutoFit/>
+          </a:bodyPr>
+          <a:lstStyle>
+            <a:defPPr>
+              <a:defRPr lang="en-US"/>
+            </a:defPPr>
+            <a:lvl1pPr marL="0" algn="l" defTabSz="914400" rtl="0" eaLnBrk="1" latinLnBrk="0" hangingPunct="1">
+              <a:defRPr sz="1800" kern="1200">
+                <a:solidFill>
+                  <a:schemeClr val="tx1"/>
+                </a:solidFill>
+                <a:latin typeface="+mn-lt"/>
+                <a:ea typeface="+mn-ea"/>
+                <a:cs typeface="+mn-cs"/>
+              </a:defRPr>
+            </a:lvl1pPr>
+            <a:lvl2pPr marL="457200" algn="l" defTabSz="914400" rtl="0" eaLnBrk="1" latinLnBrk="0" hangingPunct="1">
+              <a:defRPr sz="1800" kern="1200">
+                <a:solidFill>
+                  <a:schemeClr val="tx1"/>
+                </a:solidFill>
+                <a:latin typeface="+mn-lt"/>
+                <a:ea typeface="+mn-ea"/>
+                <a:cs typeface="+mn-cs"/>
+              </a:defRPr>
+            </a:lvl2pPr>
+            <a:lvl3pPr marL="914400" algn="l" defTabSz="914400" rtl="0" eaLnBrk="1" latinLnBrk="0" hangingPunct="1">
+              <a:defRPr sz="1800" kern="1200">
+                <a:solidFill>
+                  <a:schemeClr val="tx1"/>
+                </a:solidFill>
+                <a:latin typeface="+mn-lt"/>
+                <a:ea typeface="+mn-ea"/>
+                <a:cs typeface="+mn-cs"/>
+              </a:defRPr>
+            </a:lvl3pPr>
+            <a:lvl4pPr marL="1371600" algn="l" defTabSz="914400" rtl="0" eaLnBrk="1" latinLnBrk="0" hangingPunct="1">
+              <a:defRPr sz="1800" kern="1200">
+                <a:solidFill>
+                  <a:schemeClr val="tx1"/>
+                </a:solidFill>
+                <a:latin typeface="+mn-lt"/>
+                <a:ea typeface="+mn-ea"/>
+                <a:cs typeface="+mn-cs"/>
+              </a:defRPr>
+            </a:lvl4pPr>
+            <a:lvl5pPr marL="1828800" algn="l" defTabSz="914400" rtl="0" eaLnBrk="1" latinLnBrk="0" hangingPunct="1">
+              <a:defRPr sz="1800" kern="1200">
+                <a:solidFill>
+                  <a:schemeClr val="tx1"/>
+                </a:solidFill>
+                <a:latin typeface="+mn-lt"/>
+                <a:ea typeface="+mn-ea"/>
+                <a:cs typeface="+mn-cs"/>
+              </a:defRPr>
+            </a:lvl5pPr>
+            <a:lvl6pPr marL="2286000" algn="l" defTabSz="914400" rtl="0" eaLnBrk="1" latinLnBrk="0" hangingPunct="1">
+              <a:defRPr sz="1800" kern="1200">
+                <a:solidFill>
+                  <a:schemeClr val="tx1"/>
+                </a:solidFill>
+                <a:latin typeface="+mn-lt"/>
+                <a:ea typeface="+mn-ea"/>
+                <a:cs typeface="+mn-cs"/>
+              </a:defRPr>
+            </a:lvl6pPr>
+            <a:lvl7pPr marL="2743200" algn="l" defTabSz="914400" rtl="0" eaLnBrk="1" latinLnBrk="0" hangingPunct="1">
+              <a:defRPr sz="1800" kern="1200">
+                <a:solidFill>
+                  <a:schemeClr val="tx1"/>
+                </a:solidFill>
+                <a:latin typeface="+mn-lt"/>
+                <a:ea typeface="+mn-ea"/>
+                <a:cs typeface="+mn-cs"/>
+              </a:defRPr>
+            </a:lvl7pPr>
+            <a:lvl8pPr marL="3200400" algn="l" defTabSz="914400" rtl="0" eaLnBrk="1" latinLnBrk="0" hangingPunct="1">
+              <a:defRPr sz="1800" kern="1200">
+                <a:solidFill>
+                  <a:schemeClr val="tx1"/>
+                </a:solidFill>
+                <a:latin typeface="+mn-lt"/>
+                <a:ea typeface="+mn-ea"/>
+                <a:cs typeface="+mn-cs"/>
+              </a:defRPr>
+            </a:lvl8pPr>
+            <a:lvl9pPr marL="3657600" algn="l" defTabSz="914400" rtl="0" eaLnBrk="1" latinLnBrk="0" hangingPunct="1">
+              <a:defRPr sz="1800" kern="1200">
+                <a:solidFill>
+                  <a:schemeClr val="tx1"/>
+                </a:solidFill>
+                <a:latin typeface="+mn-lt"/>
+                <a:ea typeface="+mn-ea"/>
+                <a:cs typeface="+mn-cs"/>
+              </a:defRPr>
+            </a:lvl9pPr>
+          </a:lstStyle>
+          <a:p>
+            <a:pPr algn="ctr"/>
+            <a:r>
+              <a:rPr lang="en-US" sz="1400" b="1" noProof="0" dirty="0"/>
+              <a:t>Database 1</a:t>
+            </a:r>
+          </a:p>
+        </p:txBody>
+      </p:sp>
+      <p:sp>
+        <p:nvSpPr>
+          <p:cNvPr id="24" name="TextBox 82">
+            <a:extLst>
+              <a:ext uri="{FF2B5EF4-FFF2-40B4-BE49-F238E27FC236}">
+                <a16:creationId xmlns:a16="http://schemas.microsoft.com/office/drawing/2014/main" id="{135EBAC4-2BAD-9067-7833-AFFB58B1D41A}"/>
+              </a:ext>
+            </a:extLst>
+          </p:cNvPr>
+          <p:cNvSpPr txBox="1"/>
+          <p:nvPr/>
+        </p:nvSpPr>
+        <p:spPr>
+          <a:xfrm>
+            <a:off x="7975957" y="18307264"/>
+            <a:ext cx="1693385" cy="307777"/>
+          </a:xfrm>
+          <a:prstGeom prst="rect">
+            <a:avLst/>
+          </a:prstGeom>
+          <a:noFill/>
+        </p:spPr>
+        <p:txBody>
+          <a:bodyPr wrap="square">
+            <a:spAutoFit/>
+          </a:bodyPr>
+          <a:lstStyle>
+            <a:defPPr>
+              <a:defRPr lang="en-US"/>
+            </a:defPPr>
+            <a:lvl1pPr marL="0" algn="l" defTabSz="914400" rtl="0" eaLnBrk="1" latinLnBrk="0" hangingPunct="1">
+              <a:defRPr sz="1800" kern="1200">
+                <a:solidFill>
+                  <a:schemeClr val="tx1"/>
+                </a:solidFill>
+                <a:latin typeface="+mn-lt"/>
+                <a:ea typeface="+mn-ea"/>
+                <a:cs typeface="+mn-cs"/>
+              </a:defRPr>
+            </a:lvl1pPr>
+            <a:lvl2pPr marL="457200" algn="l" defTabSz="914400" rtl="0" eaLnBrk="1" latinLnBrk="0" hangingPunct="1">
+              <a:defRPr sz="1800" kern="1200">
+                <a:solidFill>
+                  <a:schemeClr val="tx1"/>
+                </a:solidFill>
+                <a:latin typeface="+mn-lt"/>
+                <a:ea typeface="+mn-ea"/>
+                <a:cs typeface="+mn-cs"/>
+              </a:defRPr>
+            </a:lvl2pPr>
+            <a:lvl3pPr marL="914400" algn="l" defTabSz="914400" rtl="0" eaLnBrk="1" latinLnBrk="0" hangingPunct="1">
+              <a:defRPr sz="1800" kern="1200">
+                <a:solidFill>
+                  <a:schemeClr val="tx1"/>
+                </a:solidFill>
+                <a:latin typeface="+mn-lt"/>
+                <a:ea typeface="+mn-ea"/>
+                <a:cs typeface="+mn-cs"/>
+              </a:defRPr>
+            </a:lvl3pPr>
+            <a:lvl4pPr marL="1371600" algn="l" defTabSz="914400" rtl="0" eaLnBrk="1" latinLnBrk="0" hangingPunct="1">
+              <a:defRPr sz="1800" kern="1200">
+                <a:solidFill>
+                  <a:schemeClr val="tx1"/>
+                </a:solidFill>
+                <a:latin typeface="+mn-lt"/>
+                <a:ea typeface="+mn-ea"/>
+                <a:cs typeface="+mn-cs"/>
+              </a:defRPr>
+            </a:lvl4pPr>
+            <a:lvl5pPr marL="1828800" algn="l" defTabSz="914400" rtl="0" eaLnBrk="1" latinLnBrk="0" hangingPunct="1">
+              <a:defRPr sz="1800" kern="1200">
+                <a:solidFill>
+                  <a:schemeClr val="tx1"/>
+                </a:solidFill>
+                <a:latin typeface="+mn-lt"/>
+                <a:ea typeface="+mn-ea"/>
+                <a:cs typeface="+mn-cs"/>
+              </a:defRPr>
+            </a:lvl5pPr>
+            <a:lvl6pPr marL="2286000" algn="l" defTabSz="914400" rtl="0" eaLnBrk="1" latinLnBrk="0" hangingPunct="1">
+              <a:defRPr sz="1800" kern="1200">
+                <a:solidFill>
+                  <a:schemeClr val="tx1"/>
+                </a:solidFill>
+                <a:latin typeface="+mn-lt"/>
+                <a:ea typeface="+mn-ea"/>
+                <a:cs typeface="+mn-cs"/>
+              </a:defRPr>
+            </a:lvl6pPr>
+            <a:lvl7pPr marL="2743200" algn="l" defTabSz="914400" rtl="0" eaLnBrk="1" latinLnBrk="0" hangingPunct="1">
+              <a:defRPr sz="1800" kern="1200">
+                <a:solidFill>
+                  <a:schemeClr val="tx1"/>
+                </a:solidFill>
+                <a:latin typeface="+mn-lt"/>
+                <a:ea typeface="+mn-ea"/>
+                <a:cs typeface="+mn-cs"/>
+              </a:defRPr>
+            </a:lvl7pPr>
+            <a:lvl8pPr marL="3200400" algn="l" defTabSz="914400" rtl="0" eaLnBrk="1" latinLnBrk="0" hangingPunct="1">
+              <a:defRPr sz="1800" kern="1200">
+                <a:solidFill>
+                  <a:schemeClr val="tx1"/>
+                </a:solidFill>
+                <a:latin typeface="+mn-lt"/>
+                <a:ea typeface="+mn-ea"/>
+                <a:cs typeface="+mn-cs"/>
+              </a:defRPr>
+            </a:lvl8pPr>
+            <a:lvl9pPr marL="3657600" algn="l" defTabSz="914400" rtl="0" eaLnBrk="1" latinLnBrk="0" hangingPunct="1">
+              <a:defRPr sz="1800" kern="1200">
+                <a:solidFill>
+                  <a:schemeClr val="tx1"/>
+                </a:solidFill>
+                <a:latin typeface="+mn-lt"/>
+                <a:ea typeface="+mn-ea"/>
+                <a:cs typeface="+mn-cs"/>
+              </a:defRPr>
+            </a:lvl9pPr>
+          </a:lstStyle>
+          <a:p>
+            <a:pPr algn="ctr"/>
+            <a:r>
+              <a:rPr lang="en-US" sz="1400" b="1" noProof="0" dirty="0"/>
+              <a:t>Database 2</a:t>
+            </a:r>
+          </a:p>
+        </p:txBody>
+      </p:sp>
+      <p:sp>
+        <p:nvSpPr>
+          <p:cNvPr id="26" name="Left Brace 25">
+            <a:extLst>
+              <a:ext uri="{FF2B5EF4-FFF2-40B4-BE49-F238E27FC236}">
+                <a16:creationId xmlns:a16="http://schemas.microsoft.com/office/drawing/2014/main" id="{E6558D49-7CC8-6B91-4286-00C0157081D2}"/>
+              </a:ext>
+            </a:extLst>
+          </p:cNvPr>
+          <p:cNvSpPr/>
+          <p:nvPr/>
+        </p:nvSpPr>
+        <p:spPr>
+          <a:xfrm rot="16200000">
+            <a:off x="7110187" y="17246453"/>
+            <a:ext cx="277564" cy="3155163"/>
+          </a:xfrm>
+          <a:prstGeom prst="leftBrace">
+            <a:avLst/>
+          </a:prstGeom>
+          <a:ln w="19050">
+            <a:solidFill>
+              <a:schemeClr val="tx1"/>
+            </a:solidFill>
+          </a:ln>
+        </p:spPr>
+        <p:style>
+          <a:lnRef idx="1">
+            <a:schemeClr val="accent1"/>
+          </a:lnRef>
+          <a:fillRef idx="0">
+            <a:schemeClr val="accent1"/>
+          </a:fillRef>
+          <a:effectRef idx="0">
+            <a:schemeClr val="accent1"/>
+          </a:effectRef>
+          <a:fontRef idx="minor">
+            <a:schemeClr val="tx1"/>
+          </a:fontRef>
+        </p:style>
+        <p:txBody>
+          <a:bodyPr rtlCol="0" anchor="ctr"/>
+          <a:lstStyle>
+            <a:defPPr>
+              <a:defRPr lang="en-US"/>
+            </a:defPPr>
+            <a:lvl1pPr marL="0" algn="l" defTabSz="914400" rtl="0" eaLnBrk="1" latinLnBrk="0" hangingPunct="1">
+              <a:defRPr sz="1800" kern="1200">
+                <a:solidFill>
+                  <a:schemeClr val="tx1"/>
+                </a:solidFill>
+                <a:latin typeface="+mn-lt"/>
+                <a:ea typeface="+mn-ea"/>
+                <a:cs typeface="+mn-cs"/>
+              </a:defRPr>
+            </a:lvl1pPr>
+            <a:lvl2pPr marL="457200" algn="l" defTabSz="914400" rtl="0" eaLnBrk="1" latinLnBrk="0" hangingPunct="1">
+              <a:defRPr sz="1800" kern="1200">
+                <a:solidFill>
+                  <a:schemeClr val="tx1"/>
+                </a:solidFill>
+                <a:latin typeface="+mn-lt"/>
+                <a:ea typeface="+mn-ea"/>
+                <a:cs typeface="+mn-cs"/>
+              </a:defRPr>
+            </a:lvl2pPr>
+            <a:lvl3pPr marL="914400" algn="l" defTabSz="914400" rtl="0" eaLnBrk="1" latinLnBrk="0" hangingPunct="1">
+              <a:defRPr sz="1800" kern="1200">
+                <a:solidFill>
+                  <a:schemeClr val="tx1"/>
+                </a:solidFill>
+                <a:latin typeface="+mn-lt"/>
+                <a:ea typeface="+mn-ea"/>
+                <a:cs typeface="+mn-cs"/>
+              </a:defRPr>
+            </a:lvl3pPr>
+            <a:lvl4pPr marL="1371600" algn="l" defTabSz="914400" rtl="0" eaLnBrk="1" latinLnBrk="0" hangingPunct="1">
+              <a:defRPr sz="1800" kern="1200">
+                <a:solidFill>
+                  <a:schemeClr val="tx1"/>
+                </a:solidFill>
+                <a:latin typeface="+mn-lt"/>
+                <a:ea typeface="+mn-ea"/>
+                <a:cs typeface="+mn-cs"/>
+              </a:defRPr>
+            </a:lvl4pPr>
+            <a:lvl5pPr marL="1828800" algn="l" defTabSz="914400" rtl="0" eaLnBrk="1" latinLnBrk="0" hangingPunct="1">
+              <a:defRPr sz="1800" kern="1200">
+                <a:solidFill>
+                  <a:schemeClr val="tx1"/>
+                </a:solidFill>
+                <a:latin typeface="+mn-lt"/>
+                <a:ea typeface="+mn-ea"/>
+                <a:cs typeface="+mn-cs"/>
+              </a:defRPr>
+            </a:lvl5pPr>
+            <a:lvl6pPr marL="2286000" algn="l" defTabSz="914400" rtl="0" eaLnBrk="1" latinLnBrk="0" hangingPunct="1">
+              <a:defRPr sz="1800" kern="1200">
+                <a:solidFill>
+                  <a:schemeClr val="tx1"/>
+                </a:solidFill>
+                <a:latin typeface="+mn-lt"/>
+                <a:ea typeface="+mn-ea"/>
+                <a:cs typeface="+mn-cs"/>
+              </a:defRPr>
+            </a:lvl6pPr>
+            <a:lvl7pPr marL="2743200" algn="l" defTabSz="914400" rtl="0" eaLnBrk="1" latinLnBrk="0" hangingPunct="1">
+              <a:defRPr sz="1800" kern="1200">
+                <a:solidFill>
+                  <a:schemeClr val="tx1"/>
+                </a:solidFill>
+                <a:latin typeface="+mn-lt"/>
+                <a:ea typeface="+mn-ea"/>
+                <a:cs typeface="+mn-cs"/>
+              </a:defRPr>
+            </a:lvl7pPr>
+            <a:lvl8pPr marL="3200400" algn="l" defTabSz="914400" rtl="0" eaLnBrk="1" latinLnBrk="0" hangingPunct="1">
+              <a:defRPr sz="1800" kern="1200">
+                <a:solidFill>
+                  <a:schemeClr val="tx1"/>
+                </a:solidFill>
+                <a:latin typeface="+mn-lt"/>
+                <a:ea typeface="+mn-ea"/>
+                <a:cs typeface="+mn-cs"/>
+              </a:defRPr>
+            </a:lvl8pPr>
+            <a:lvl9pPr marL="3657600" algn="l" defTabSz="914400" rtl="0" eaLnBrk="1" latinLnBrk="0" hangingPunct="1">
+              <a:defRPr sz="1800" kern="1200">
+                <a:solidFill>
+                  <a:schemeClr val="tx1"/>
+                </a:solidFill>
+                <a:latin typeface="+mn-lt"/>
+                <a:ea typeface="+mn-ea"/>
+                <a:cs typeface="+mn-cs"/>
+              </a:defRPr>
+            </a:lvl9pPr>
+          </a:lstStyle>
+          <a:p>
+            <a:pPr algn="ctr"/>
+            <a:endParaRPr lang="it-IT"/>
+          </a:p>
+        </p:txBody>
+      </p:sp>
+      <p:sp>
+        <p:nvSpPr>
+          <p:cNvPr id="27" name="TextBox 89">
+            <a:extLst>
+              <a:ext uri="{FF2B5EF4-FFF2-40B4-BE49-F238E27FC236}">
+                <a16:creationId xmlns:a16="http://schemas.microsoft.com/office/drawing/2014/main" id="{516FF7AC-B88D-4C55-68FF-DD872303F2D4}"/>
+              </a:ext>
+            </a:extLst>
+          </p:cNvPr>
+          <p:cNvSpPr txBox="1"/>
+          <p:nvPr/>
+        </p:nvSpPr>
+        <p:spPr>
+          <a:xfrm>
+            <a:off x="5798893" y="19033028"/>
+            <a:ext cx="2840282" cy="523220"/>
+          </a:xfrm>
+          <a:prstGeom prst="rect">
+            <a:avLst/>
+          </a:prstGeom>
+          <a:noFill/>
+        </p:spPr>
+        <p:txBody>
+          <a:bodyPr wrap="square">
+            <a:spAutoFit/>
+          </a:bodyPr>
+          <a:lstStyle>
+            <a:defPPr>
+              <a:defRPr lang="en-US"/>
+            </a:defPPr>
+            <a:lvl1pPr marL="0" algn="l" defTabSz="914400" rtl="0" eaLnBrk="1" latinLnBrk="0" hangingPunct="1">
+              <a:defRPr sz="1800" kern="1200">
+                <a:solidFill>
+                  <a:schemeClr val="tx1"/>
+                </a:solidFill>
+                <a:latin typeface="+mn-lt"/>
+                <a:ea typeface="+mn-ea"/>
+                <a:cs typeface="+mn-cs"/>
+              </a:defRPr>
+            </a:lvl1pPr>
+            <a:lvl2pPr marL="457200" algn="l" defTabSz="914400" rtl="0" eaLnBrk="1" latinLnBrk="0" hangingPunct="1">
+              <a:defRPr sz="1800" kern="1200">
+                <a:solidFill>
+                  <a:schemeClr val="tx1"/>
+                </a:solidFill>
+                <a:latin typeface="+mn-lt"/>
+                <a:ea typeface="+mn-ea"/>
+                <a:cs typeface="+mn-cs"/>
+              </a:defRPr>
+            </a:lvl2pPr>
+            <a:lvl3pPr marL="914400" algn="l" defTabSz="914400" rtl="0" eaLnBrk="1" latinLnBrk="0" hangingPunct="1">
+              <a:defRPr sz="1800" kern="1200">
+                <a:solidFill>
+                  <a:schemeClr val="tx1"/>
+                </a:solidFill>
+                <a:latin typeface="+mn-lt"/>
+                <a:ea typeface="+mn-ea"/>
+                <a:cs typeface="+mn-cs"/>
+              </a:defRPr>
+            </a:lvl3pPr>
+            <a:lvl4pPr marL="1371600" algn="l" defTabSz="914400" rtl="0" eaLnBrk="1" latinLnBrk="0" hangingPunct="1">
+              <a:defRPr sz="1800" kern="1200">
+                <a:solidFill>
+                  <a:schemeClr val="tx1"/>
+                </a:solidFill>
+                <a:latin typeface="+mn-lt"/>
+                <a:ea typeface="+mn-ea"/>
+                <a:cs typeface="+mn-cs"/>
+              </a:defRPr>
+            </a:lvl4pPr>
+            <a:lvl5pPr marL="1828800" algn="l" defTabSz="914400" rtl="0" eaLnBrk="1" latinLnBrk="0" hangingPunct="1">
+              <a:defRPr sz="1800" kern="1200">
+                <a:solidFill>
+                  <a:schemeClr val="tx1"/>
+                </a:solidFill>
+                <a:latin typeface="+mn-lt"/>
+                <a:ea typeface="+mn-ea"/>
+                <a:cs typeface="+mn-cs"/>
+              </a:defRPr>
+            </a:lvl5pPr>
+            <a:lvl6pPr marL="2286000" algn="l" defTabSz="914400" rtl="0" eaLnBrk="1" latinLnBrk="0" hangingPunct="1">
+              <a:defRPr sz="1800" kern="1200">
+                <a:solidFill>
+                  <a:schemeClr val="tx1"/>
+                </a:solidFill>
+                <a:latin typeface="+mn-lt"/>
+                <a:ea typeface="+mn-ea"/>
+                <a:cs typeface="+mn-cs"/>
+              </a:defRPr>
+            </a:lvl6pPr>
+            <a:lvl7pPr marL="2743200" algn="l" defTabSz="914400" rtl="0" eaLnBrk="1" latinLnBrk="0" hangingPunct="1">
+              <a:defRPr sz="1800" kern="1200">
+                <a:solidFill>
+                  <a:schemeClr val="tx1"/>
+                </a:solidFill>
+                <a:latin typeface="+mn-lt"/>
+                <a:ea typeface="+mn-ea"/>
+                <a:cs typeface="+mn-cs"/>
+              </a:defRPr>
+            </a:lvl7pPr>
+            <a:lvl8pPr marL="3200400" algn="l" defTabSz="914400" rtl="0" eaLnBrk="1" latinLnBrk="0" hangingPunct="1">
+              <a:defRPr sz="1800" kern="1200">
+                <a:solidFill>
+                  <a:schemeClr val="tx1"/>
+                </a:solidFill>
+                <a:latin typeface="+mn-lt"/>
+                <a:ea typeface="+mn-ea"/>
+                <a:cs typeface="+mn-cs"/>
+              </a:defRPr>
+            </a:lvl8pPr>
+            <a:lvl9pPr marL="3657600" algn="l" defTabSz="914400" rtl="0" eaLnBrk="1" latinLnBrk="0" hangingPunct="1">
+              <a:defRPr sz="1800" kern="1200">
+                <a:solidFill>
+                  <a:schemeClr val="tx1"/>
+                </a:solidFill>
+                <a:latin typeface="+mn-lt"/>
+                <a:ea typeface="+mn-ea"/>
+                <a:cs typeface="+mn-cs"/>
+              </a:defRPr>
+            </a:lvl9pPr>
+          </a:lstStyle>
+          <a:p>
+            <a:pPr algn="ctr"/>
+            <a:r>
+              <a:rPr lang="en-US" sz="1400" b="1" noProof="0" dirty="0"/>
+              <a:t>Calculation of Norms, check for numerical convergence</a:t>
+            </a:r>
+          </a:p>
+        </p:txBody>
+      </p:sp>
+      <p:sp>
+        <p:nvSpPr>
+          <p:cNvPr id="28" name="Rectangle 27">
+            <a:extLst>
+              <a:ext uri="{FF2B5EF4-FFF2-40B4-BE49-F238E27FC236}">
+                <a16:creationId xmlns:a16="http://schemas.microsoft.com/office/drawing/2014/main" id="{4AEFC1EA-7BC9-2CAF-F9AB-1F291A920DD8}"/>
+              </a:ext>
+            </a:extLst>
+          </p:cNvPr>
+          <p:cNvSpPr/>
+          <p:nvPr/>
+        </p:nvSpPr>
+        <p:spPr>
+          <a:xfrm>
+            <a:off x="9780326" y="16352851"/>
+            <a:ext cx="1156386" cy="641942"/>
+          </a:xfrm>
+          <a:prstGeom prst="rect">
+            <a:avLst/>
+          </a:prstGeom>
+          <a:solidFill>
+            <a:srgbClr val="1A1A5B"/>
+          </a:solidFill>
+          <a:ln>
+            <a:noFill/>
+          </a:ln>
+        </p:spPr>
+        <p:style>
+          <a:lnRef idx="1">
+            <a:schemeClr val="accent1"/>
+          </a:lnRef>
+          <a:fillRef idx="3">
+            <a:schemeClr val="accent1"/>
+          </a:fillRef>
+          <a:effectRef idx="2">
+            <a:schemeClr val="accent1"/>
+          </a:effectRef>
+          <a:fontRef idx="minor">
+            <a:schemeClr val="lt1"/>
+          </a:fontRef>
+        </p:style>
+        <p:txBody>
+          <a:bodyPr rtlCol="0" anchor="ctr"/>
+          <a:lstStyle>
+            <a:defPPr>
+              <a:defRPr lang="en-US"/>
+            </a:defPPr>
+            <a:lvl1pPr marL="0" algn="l" defTabSz="914400" rtl="0" eaLnBrk="1" latinLnBrk="0" hangingPunct="1">
+              <a:defRPr sz="1800" kern="1200">
+                <a:solidFill>
+                  <a:schemeClr val="lt1"/>
+                </a:solidFill>
+                <a:latin typeface="+mn-lt"/>
+                <a:ea typeface="+mn-ea"/>
+                <a:cs typeface="+mn-cs"/>
+              </a:defRPr>
+            </a:lvl1pPr>
+            <a:lvl2pPr marL="457200" algn="l" defTabSz="914400" rtl="0" eaLnBrk="1" latinLnBrk="0" hangingPunct="1">
+              <a:defRPr sz="1800" kern="1200">
+                <a:solidFill>
+                  <a:schemeClr val="lt1"/>
+                </a:solidFill>
+                <a:latin typeface="+mn-lt"/>
+                <a:ea typeface="+mn-ea"/>
+                <a:cs typeface="+mn-cs"/>
+              </a:defRPr>
+            </a:lvl2pPr>
+            <a:lvl3pPr marL="914400" algn="l" defTabSz="914400" rtl="0" eaLnBrk="1" latinLnBrk="0" hangingPunct="1">
+              <a:defRPr sz="1800" kern="1200">
+                <a:solidFill>
+                  <a:schemeClr val="lt1"/>
+                </a:solidFill>
+                <a:latin typeface="+mn-lt"/>
+                <a:ea typeface="+mn-ea"/>
+                <a:cs typeface="+mn-cs"/>
+              </a:defRPr>
+            </a:lvl3pPr>
+            <a:lvl4pPr marL="1371600" algn="l" defTabSz="914400" rtl="0" eaLnBrk="1" latinLnBrk="0" hangingPunct="1">
+              <a:defRPr sz="1800" kern="1200">
+                <a:solidFill>
+                  <a:schemeClr val="lt1"/>
+                </a:solidFill>
+                <a:latin typeface="+mn-lt"/>
+                <a:ea typeface="+mn-ea"/>
+                <a:cs typeface="+mn-cs"/>
+              </a:defRPr>
+            </a:lvl4pPr>
+            <a:lvl5pPr marL="1828800" algn="l" defTabSz="914400" rtl="0" eaLnBrk="1" latinLnBrk="0" hangingPunct="1">
+              <a:defRPr sz="1800" kern="1200">
+                <a:solidFill>
+                  <a:schemeClr val="lt1"/>
+                </a:solidFill>
+                <a:latin typeface="+mn-lt"/>
+                <a:ea typeface="+mn-ea"/>
+                <a:cs typeface="+mn-cs"/>
+              </a:defRPr>
+            </a:lvl5pPr>
+            <a:lvl6pPr marL="2286000" algn="l" defTabSz="914400" rtl="0" eaLnBrk="1" latinLnBrk="0" hangingPunct="1">
+              <a:defRPr sz="1800" kern="1200">
+                <a:solidFill>
+                  <a:schemeClr val="lt1"/>
+                </a:solidFill>
+                <a:latin typeface="+mn-lt"/>
+                <a:ea typeface="+mn-ea"/>
+                <a:cs typeface="+mn-cs"/>
+              </a:defRPr>
+            </a:lvl6pPr>
+            <a:lvl7pPr marL="2743200" algn="l" defTabSz="914400" rtl="0" eaLnBrk="1" latinLnBrk="0" hangingPunct="1">
+              <a:defRPr sz="1800" kern="1200">
+                <a:solidFill>
+                  <a:schemeClr val="lt1"/>
+                </a:solidFill>
+                <a:latin typeface="+mn-lt"/>
+                <a:ea typeface="+mn-ea"/>
+                <a:cs typeface="+mn-cs"/>
+              </a:defRPr>
+            </a:lvl7pPr>
+            <a:lvl8pPr marL="3200400" algn="l" defTabSz="914400" rtl="0" eaLnBrk="1" latinLnBrk="0" hangingPunct="1">
+              <a:defRPr sz="1800" kern="1200">
+                <a:solidFill>
+                  <a:schemeClr val="lt1"/>
+                </a:solidFill>
+                <a:latin typeface="+mn-lt"/>
+                <a:ea typeface="+mn-ea"/>
+                <a:cs typeface="+mn-cs"/>
+              </a:defRPr>
+            </a:lvl8pPr>
+            <a:lvl9pPr marL="3657600" algn="l" defTabSz="914400" rtl="0" eaLnBrk="1" latinLnBrk="0" hangingPunct="1">
+              <a:defRPr sz="1800" kern="1200">
+                <a:solidFill>
+                  <a:schemeClr val="lt1"/>
+                </a:solidFill>
+                <a:latin typeface="+mn-lt"/>
+                <a:ea typeface="+mn-ea"/>
+                <a:cs typeface="+mn-cs"/>
+              </a:defRPr>
+            </a:lvl9pPr>
+          </a:lstStyle>
+          <a:p>
+            <a:r>
+              <a:rPr lang="it-IT" sz="1600" dirty="0"/>
+              <a:t>Energy </a:t>
+            </a:r>
+          </a:p>
+          <a:p>
+            <a:r>
+              <a:rPr lang="it-IT" sz="1600" dirty="0"/>
+              <a:t>model</a:t>
+            </a:r>
+          </a:p>
+        </p:txBody>
+      </p:sp>
+      <p:sp>
+        <p:nvSpPr>
+          <p:cNvPr id="29" name="Rectangle 28">
+            <a:extLst>
+              <a:ext uri="{FF2B5EF4-FFF2-40B4-BE49-F238E27FC236}">
+                <a16:creationId xmlns:a16="http://schemas.microsoft.com/office/drawing/2014/main" id="{DFDB5BA5-5348-CD3B-ECEE-01FC28AB1E0D}"/>
+              </a:ext>
+            </a:extLst>
+          </p:cNvPr>
+          <p:cNvSpPr/>
+          <p:nvPr/>
+        </p:nvSpPr>
+        <p:spPr>
+          <a:xfrm>
+            <a:off x="9780326" y="17529579"/>
+            <a:ext cx="1156386" cy="641942"/>
+          </a:xfrm>
+          <a:prstGeom prst="rect">
+            <a:avLst/>
+          </a:prstGeom>
+          <a:solidFill>
+            <a:srgbClr val="8393A1"/>
+          </a:solidFill>
+          <a:ln>
+            <a:noFill/>
+          </a:ln>
+        </p:spPr>
+        <p:style>
+          <a:lnRef idx="1">
+            <a:schemeClr val="accent1"/>
+          </a:lnRef>
+          <a:fillRef idx="3">
+            <a:schemeClr val="accent1"/>
+          </a:fillRef>
+          <a:effectRef idx="2">
+            <a:schemeClr val="accent1"/>
+          </a:effectRef>
+          <a:fontRef idx="minor">
+            <a:schemeClr val="lt1"/>
+          </a:fontRef>
+        </p:style>
+        <p:txBody>
+          <a:bodyPr rtlCol="0" anchor="ctr"/>
+          <a:lstStyle>
+            <a:defPPr>
+              <a:defRPr lang="en-US"/>
+            </a:defPPr>
+            <a:lvl1pPr marL="0" algn="l" defTabSz="914400" rtl="0" eaLnBrk="1" latinLnBrk="0" hangingPunct="1">
+              <a:defRPr sz="1800" kern="1200">
+                <a:solidFill>
+                  <a:schemeClr val="lt1"/>
+                </a:solidFill>
+                <a:latin typeface="+mn-lt"/>
+                <a:ea typeface="+mn-ea"/>
+                <a:cs typeface="+mn-cs"/>
+              </a:defRPr>
+            </a:lvl1pPr>
+            <a:lvl2pPr marL="457200" algn="l" defTabSz="914400" rtl="0" eaLnBrk="1" latinLnBrk="0" hangingPunct="1">
+              <a:defRPr sz="1800" kern="1200">
+                <a:solidFill>
+                  <a:schemeClr val="lt1"/>
+                </a:solidFill>
+                <a:latin typeface="+mn-lt"/>
+                <a:ea typeface="+mn-ea"/>
+                <a:cs typeface="+mn-cs"/>
+              </a:defRPr>
+            </a:lvl2pPr>
+            <a:lvl3pPr marL="914400" algn="l" defTabSz="914400" rtl="0" eaLnBrk="1" latinLnBrk="0" hangingPunct="1">
+              <a:defRPr sz="1800" kern="1200">
+                <a:solidFill>
+                  <a:schemeClr val="lt1"/>
+                </a:solidFill>
+                <a:latin typeface="+mn-lt"/>
+                <a:ea typeface="+mn-ea"/>
+                <a:cs typeface="+mn-cs"/>
+              </a:defRPr>
+            </a:lvl3pPr>
+            <a:lvl4pPr marL="1371600" algn="l" defTabSz="914400" rtl="0" eaLnBrk="1" latinLnBrk="0" hangingPunct="1">
+              <a:defRPr sz="1800" kern="1200">
+                <a:solidFill>
+                  <a:schemeClr val="lt1"/>
+                </a:solidFill>
+                <a:latin typeface="+mn-lt"/>
+                <a:ea typeface="+mn-ea"/>
+                <a:cs typeface="+mn-cs"/>
+              </a:defRPr>
+            </a:lvl4pPr>
+            <a:lvl5pPr marL="1828800" algn="l" defTabSz="914400" rtl="0" eaLnBrk="1" latinLnBrk="0" hangingPunct="1">
+              <a:defRPr sz="1800" kern="1200">
+                <a:solidFill>
+                  <a:schemeClr val="lt1"/>
+                </a:solidFill>
+                <a:latin typeface="+mn-lt"/>
+                <a:ea typeface="+mn-ea"/>
+                <a:cs typeface="+mn-cs"/>
+              </a:defRPr>
+            </a:lvl5pPr>
+            <a:lvl6pPr marL="2286000" algn="l" defTabSz="914400" rtl="0" eaLnBrk="1" latinLnBrk="0" hangingPunct="1">
+              <a:defRPr sz="1800" kern="1200">
+                <a:solidFill>
+                  <a:schemeClr val="lt1"/>
+                </a:solidFill>
+                <a:latin typeface="+mn-lt"/>
+                <a:ea typeface="+mn-ea"/>
+                <a:cs typeface="+mn-cs"/>
+              </a:defRPr>
+            </a:lvl6pPr>
+            <a:lvl7pPr marL="2743200" algn="l" defTabSz="914400" rtl="0" eaLnBrk="1" latinLnBrk="0" hangingPunct="1">
+              <a:defRPr sz="1800" kern="1200">
+                <a:solidFill>
+                  <a:schemeClr val="lt1"/>
+                </a:solidFill>
+                <a:latin typeface="+mn-lt"/>
+                <a:ea typeface="+mn-ea"/>
+                <a:cs typeface="+mn-cs"/>
+              </a:defRPr>
+            </a:lvl7pPr>
+            <a:lvl8pPr marL="3200400" algn="l" defTabSz="914400" rtl="0" eaLnBrk="1" latinLnBrk="0" hangingPunct="1">
+              <a:defRPr sz="1800" kern="1200">
+                <a:solidFill>
+                  <a:schemeClr val="lt1"/>
+                </a:solidFill>
+                <a:latin typeface="+mn-lt"/>
+                <a:ea typeface="+mn-ea"/>
+                <a:cs typeface="+mn-cs"/>
+              </a:defRPr>
+            </a:lvl8pPr>
+            <a:lvl9pPr marL="3657600" algn="l" defTabSz="914400" rtl="0" eaLnBrk="1" latinLnBrk="0" hangingPunct="1">
+              <a:defRPr sz="1800" kern="1200">
+                <a:solidFill>
+                  <a:schemeClr val="lt1"/>
+                </a:solidFill>
+                <a:latin typeface="+mn-lt"/>
+                <a:ea typeface="+mn-ea"/>
+                <a:cs typeface="+mn-cs"/>
+              </a:defRPr>
+            </a:lvl9pPr>
+          </a:lstStyle>
+          <a:p>
+            <a:r>
+              <a:rPr lang="it-IT" sz="1600" dirty="0" err="1"/>
+              <a:t>Economic</a:t>
+            </a:r>
+            <a:r>
+              <a:rPr lang="it-IT" sz="1600" dirty="0"/>
+              <a:t> </a:t>
+            </a:r>
+          </a:p>
+          <a:p>
+            <a:r>
+              <a:rPr lang="it-IT" sz="1600" dirty="0"/>
+              <a:t>model</a:t>
+            </a:r>
+          </a:p>
+        </p:txBody>
+      </p:sp>
+      <p:cxnSp>
+        <p:nvCxnSpPr>
+          <p:cNvPr id="30" name="Connector: Elbow 29">
+            <a:extLst>
+              <a:ext uri="{FF2B5EF4-FFF2-40B4-BE49-F238E27FC236}">
+                <a16:creationId xmlns:a16="http://schemas.microsoft.com/office/drawing/2014/main" id="{CF46DAEC-F66C-6267-CCF1-C6B1788B923B}"/>
+              </a:ext>
+            </a:extLst>
+          </p:cNvPr>
+          <p:cNvCxnSpPr>
+            <a:cxnSpLocks/>
+            <a:endCxn id="28" idx="1"/>
+          </p:cNvCxnSpPr>
+          <p:nvPr/>
+        </p:nvCxnSpPr>
+        <p:spPr>
+          <a:xfrm flipV="1">
+            <a:off x="9187356" y="16673822"/>
+            <a:ext cx="592970" cy="385532"/>
+          </a:xfrm>
+          <a:prstGeom prst="bentConnector3">
+            <a:avLst/>
+          </a:prstGeom>
+          <a:ln w="19050">
+            <a:solidFill>
+              <a:schemeClr val="tx1"/>
+            </a:solidFill>
+            <a:headEnd type="none" w="med" len="med"/>
+            <a:tailEnd type="arrow" w="med" len="med"/>
+          </a:ln>
+        </p:spPr>
+        <p:style>
+          <a:lnRef idx="1">
+            <a:schemeClr val="accent1"/>
+          </a:lnRef>
+          <a:fillRef idx="0">
+            <a:schemeClr val="accent1"/>
+          </a:fillRef>
+          <a:effectRef idx="0">
+            <a:schemeClr val="accent1"/>
+          </a:effectRef>
+          <a:fontRef idx="minor">
+            <a:schemeClr val="tx1"/>
+          </a:fontRef>
+        </p:style>
+      </p:cxnSp>
+      <p:cxnSp>
+        <p:nvCxnSpPr>
+          <p:cNvPr id="31" name="Connector: Elbow 30">
+            <a:extLst>
+              <a:ext uri="{FF2B5EF4-FFF2-40B4-BE49-F238E27FC236}">
+                <a16:creationId xmlns:a16="http://schemas.microsoft.com/office/drawing/2014/main" id="{FDC41627-6E38-FD7E-460A-F25A43792290}"/>
+              </a:ext>
+            </a:extLst>
+          </p:cNvPr>
+          <p:cNvCxnSpPr>
+            <a:cxnSpLocks/>
+            <a:endCxn id="29" idx="1"/>
+          </p:cNvCxnSpPr>
+          <p:nvPr/>
+        </p:nvCxnSpPr>
+        <p:spPr>
+          <a:xfrm>
+            <a:off x="9187356" y="17354850"/>
+            <a:ext cx="592970" cy="495700"/>
+          </a:xfrm>
+          <a:prstGeom prst="bentConnector3">
+            <a:avLst/>
+          </a:prstGeom>
+          <a:ln w="19050">
+            <a:solidFill>
+              <a:schemeClr val="tx1"/>
+            </a:solidFill>
+            <a:headEnd type="none" w="med" len="med"/>
+            <a:tailEnd type="arrow" w="med" len="med"/>
+          </a:ln>
+        </p:spPr>
+        <p:style>
+          <a:lnRef idx="1">
+            <a:schemeClr val="accent1"/>
+          </a:lnRef>
+          <a:fillRef idx="0">
+            <a:schemeClr val="accent1"/>
+          </a:fillRef>
+          <a:effectRef idx="0">
+            <a:schemeClr val="accent1"/>
+          </a:effectRef>
+          <a:fontRef idx="minor">
+            <a:schemeClr val="tx1"/>
+          </a:fontRef>
+        </p:style>
+      </p:cxnSp>
+      <p:pic>
+        <p:nvPicPr>
+          <p:cNvPr id="32" name="Picture 31" descr="database icon">
+            <a:hlinkClick r:id="rId2" tooltip="database icon"/>
+            <a:extLst>
+              <a:ext uri="{FF2B5EF4-FFF2-40B4-BE49-F238E27FC236}">
+                <a16:creationId xmlns:a16="http://schemas.microsoft.com/office/drawing/2014/main" id="{5D8C9A2D-79BC-7F09-951E-14EF099831B1}"/>
+              </a:ext>
+            </a:extLst>
+          </p:cNvPr>
+          <p:cNvPicPr>
+            <a:picLocks noChangeAspect="1" noChangeArrowheads="1"/>
+          </p:cNvPicPr>
+          <p:nvPr/>
+        </p:nvPicPr>
+        <p:blipFill>
+          <a:blip r:embed="rId3">
+            <a:extLst>
+              <a:ext uri="{28A0092B-C50C-407E-A947-70E740481C1C}">
+                <a14:useLocalDpi xmlns:a14="http://schemas.microsoft.com/office/drawing/2010/main" val="0"/>
+              </a:ext>
+            </a:extLst>
+          </a:blip>
+          <a:srcRect/>
+          <a:stretch>
+            <a:fillRect/>
+          </a:stretch>
+        </p:blipFill>
+        <p:spPr bwMode="auto">
+          <a:xfrm>
+            <a:off x="11529682" y="16841412"/>
+            <a:ext cx="808936" cy="808934"/>
+          </a:xfrm>
+          <a:prstGeom prst="rect">
+            <a:avLst/>
+          </a:prstGeom>
+          <a:noFill/>
+          <a:extLst>
+            <a:ext uri="{909E8E84-426E-40DD-AFC4-6F175D3DCCD1}">
+              <a14:hiddenFill xmlns:a14="http://schemas.microsoft.com/office/drawing/2010/main">
+                <a:solidFill>
+                  <a:srgbClr val="FFFFFF"/>
+                </a:solidFill>
+              </a14:hiddenFill>
+            </a:ext>
+          </a:extLst>
+        </p:spPr>
+      </p:pic>
+      <p:cxnSp>
+        <p:nvCxnSpPr>
+          <p:cNvPr id="33" name="Connector: Elbow 32">
+            <a:extLst>
+              <a:ext uri="{FF2B5EF4-FFF2-40B4-BE49-F238E27FC236}">
+                <a16:creationId xmlns:a16="http://schemas.microsoft.com/office/drawing/2014/main" id="{A56B41E5-4566-30A6-3799-6848267BE140}"/>
+              </a:ext>
+            </a:extLst>
+          </p:cNvPr>
+          <p:cNvCxnSpPr/>
+          <p:nvPr/>
+        </p:nvCxnSpPr>
+        <p:spPr>
+          <a:xfrm>
+            <a:off x="10936712" y="16673822"/>
+            <a:ext cx="592970" cy="320971"/>
+          </a:xfrm>
+          <a:prstGeom prst="bentConnector3">
+            <a:avLst/>
+          </a:prstGeom>
+          <a:ln w="19050">
+            <a:solidFill>
+              <a:schemeClr val="tx1"/>
+            </a:solidFill>
+            <a:headEnd type="none" w="med" len="med"/>
+            <a:tailEnd type="arrow" w="med" len="med"/>
+          </a:ln>
+        </p:spPr>
+        <p:style>
+          <a:lnRef idx="1">
+            <a:schemeClr val="accent1"/>
+          </a:lnRef>
+          <a:fillRef idx="0">
+            <a:schemeClr val="accent1"/>
+          </a:fillRef>
+          <a:effectRef idx="0">
+            <a:schemeClr val="accent1"/>
+          </a:effectRef>
+          <a:fontRef idx="minor">
+            <a:schemeClr val="tx1"/>
+          </a:fontRef>
+        </p:style>
+      </p:cxnSp>
+      <p:cxnSp>
+        <p:nvCxnSpPr>
+          <p:cNvPr id="34" name="Connector: Elbow 33">
+            <a:extLst>
+              <a:ext uri="{FF2B5EF4-FFF2-40B4-BE49-F238E27FC236}">
+                <a16:creationId xmlns:a16="http://schemas.microsoft.com/office/drawing/2014/main" id="{4F3D02EA-9178-DCB7-3550-C46EA907AA31}"/>
+              </a:ext>
+            </a:extLst>
+          </p:cNvPr>
+          <p:cNvCxnSpPr>
+            <a:cxnSpLocks/>
+          </p:cNvCxnSpPr>
+          <p:nvPr/>
+        </p:nvCxnSpPr>
+        <p:spPr>
+          <a:xfrm flipV="1">
+            <a:off x="10936712" y="17414106"/>
+            <a:ext cx="552168" cy="436444"/>
+          </a:xfrm>
+          <a:prstGeom prst="bentConnector3">
+            <a:avLst/>
+          </a:prstGeom>
+          <a:ln w="19050">
+            <a:solidFill>
+              <a:schemeClr val="tx1"/>
+            </a:solidFill>
+            <a:headEnd type="none" w="med" len="med"/>
+            <a:tailEnd type="arrow" w="med" len="med"/>
+          </a:ln>
+        </p:spPr>
+        <p:style>
+          <a:lnRef idx="1">
+            <a:schemeClr val="accent1"/>
+          </a:lnRef>
+          <a:fillRef idx="0">
+            <a:schemeClr val="accent1"/>
+          </a:fillRef>
+          <a:effectRef idx="0">
+            <a:schemeClr val="accent1"/>
+          </a:effectRef>
+          <a:fontRef idx="minor">
+            <a:schemeClr val="tx1"/>
+          </a:fontRef>
+        </p:style>
+      </p:cxnSp>
+      <mc:AlternateContent xmlns:mc="http://schemas.openxmlformats.org/markup-compatibility/2006">
+        <mc:Choice xmlns:a14="http://schemas.microsoft.com/office/drawing/2010/main" Requires="a14">
+          <p:sp>
+            <p:nvSpPr>
+              <p:cNvPr id="35" name="TextBox 8">
+                <a:extLst>
+                  <a:ext uri="{FF2B5EF4-FFF2-40B4-BE49-F238E27FC236}">
+                    <a16:creationId xmlns:a16="http://schemas.microsoft.com/office/drawing/2014/main" id="{EB0EEAD6-BAED-5174-E3F6-DB8F1020EC88}"/>
+                  </a:ext>
+                </a:extLst>
+              </p:cNvPr>
+              <p:cNvSpPr txBox="1"/>
+              <p:nvPr/>
+            </p:nvSpPr>
+            <p:spPr>
+              <a:xfrm>
+                <a:off x="9808838" y="15556455"/>
+                <a:ext cx="1270361" cy="523220"/>
+              </a:xfrm>
+              <a:prstGeom prst="rect">
+                <a:avLst/>
+              </a:prstGeom>
+              <a:noFill/>
+            </p:spPr>
+            <p:txBody>
+              <a:bodyPr wrap="square">
+                <a:spAutoFit/>
+              </a:bodyPr>
+              <a:lstStyle>
+                <a:defPPr>
+                  <a:defRPr lang="en-US"/>
+                </a:defPPr>
+                <a:lvl1pPr marL="0" algn="l" defTabSz="914400" rtl="0" eaLnBrk="1" latinLnBrk="0" hangingPunct="1">
+                  <a:defRPr sz="1800" kern="1200">
+                    <a:solidFill>
+                      <a:schemeClr val="tx1"/>
+                    </a:solidFill>
+                    <a:latin typeface="+mn-lt"/>
+                    <a:ea typeface="+mn-ea"/>
+                    <a:cs typeface="+mn-cs"/>
+                  </a:defRPr>
+                </a:lvl1pPr>
+                <a:lvl2pPr marL="457200" algn="l" defTabSz="914400" rtl="0" eaLnBrk="1" latinLnBrk="0" hangingPunct="1">
+                  <a:defRPr sz="1800" kern="1200">
+                    <a:solidFill>
+                      <a:schemeClr val="tx1"/>
+                    </a:solidFill>
+                    <a:latin typeface="+mn-lt"/>
+                    <a:ea typeface="+mn-ea"/>
+                    <a:cs typeface="+mn-cs"/>
+                  </a:defRPr>
+                </a:lvl2pPr>
+                <a:lvl3pPr marL="914400" algn="l" defTabSz="914400" rtl="0" eaLnBrk="1" latinLnBrk="0" hangingPunct="1">
+                  <a:defRPr sz="1800" kern="1200">
+                    <a:solidFill>
+                      <a:schemeClr val="tx1"/>
+                    </a:solidFill>
+                    <a:latin typeface="+mn-lt"/>
+                    <a:ea typeface="+mn-ea"/>
+                    <a:cs typeface="+mn-cs"/>
+                  </a:defRPr>
+                </a:lvl3pPr>
+                <a:lvl4pPr marL="1371600" algn="l" defTabSz="914400" rtl="0" eaLnBrk="1" latinLnBrk="0" hangingPunct="1">
+                  <a:defRPr sz="1800" kern="1200">
+                    <a:solidFill>
+                      <a:schemeClr val="tx1"/>
+                    </a:solidFill>
+                    <a:latin typeface="+mn-lt"/>
+                    <a:ea typeface="+mn-ea"/>
+                    <a:cs typeface="+mn-cs"/>
+                  </a:defRPr>
+                </a:lvl4pPr>
+                <a:lvl5pPr marL="1828800" algn="l" defTabSz="914400" rtl="0" eaLnBrk="1" latinLnBrk="0" hangingPunct="1">
+                  <a:defRPr sz="1800" kern="1200">
+                    <a:solidFill>
+                      <a:schemeClr val="tx1"/>
+                    </a:solidFill>
+                    <a:latin typeface="+mn-lt"/>
+                    <a:ea typeface="+mn-ea"/>
+                    <a:cs typeface="+mn-cs"/>
+                  </a:defRPr>
+                </a:lvl5pPr>
+                <a:lvl6pPr marL="2286000" algn="l" defTabSz="914400" rtl="0" eaLnBrk="1" latinLnBrk="0" hangingPunct="1">
+                  <a:defRPr sz="1800" kern="1200">
+                    <a:solidFill>
+                      <a:schemeClr val="tx1"/>
+                    </a:solidFill>
+                    <a:latin typeface="+mn-lt"/>
+                    <a:ea typeface="+mn-ea"/>
+                    <a:cs typeface="+mn-cs"/>
+                  </a:defRPr>
+                </a:lvl6pPr>
+                <a:lvl7pPr marL="2743200" algn="l" defTabSz="914400" rtl="0" eaLnBrk="1" latinLnBrk="0" hangingPunct="1">
+                  <a:defRPr sz="1800" kern="1200">
+                    <a:solidFill>
+                      <a:schemeClr val="tx1"/>
+                    </a:solidFill>
+                    <a:latin typeface="+mn-lt"/>
+                    <a:ea typeface="+mn-ea"/>
+                    <a:cs typeface="+mn-cs"/>
+                  </a:defRPr>
+                </a:lvl7pPr>
+                <a:lvl8pPr marL="3200400" algn="l" defTabSz="914400" rtl="0" eaLnBrk="1" latinLnBrk="0" hangingPunct="1">
+                  <a:defRPr sz="1800" kern="1200">
+                    <a:solidFill>
+                      <a:schemeClr val="tx1"/>
+                    </a:solidFill>
+                    <a:latin typeface="+mn-lt"/>
+                    <a:ea typeface="+mn-ea"/>
+                    <a:cs typeface="+mn-cs"/>
+                  </a:defRPr>
+                </a:lvl8pPr>
+                <a:lvl9pPr marL="3657600" algn="l" defTabSz="914400" rtl="0" eaLnBrk="1" latinLnBrk="0" hangingPunct="1">
+                  <a:defRPr sz="1800" kern="1200">
+                    <a:solidFill>
+                      <a:schemeClr val="tx1"/>
+                    </a:solidFill>
+                    <a:latin typeface="+mn-lt"/>
+                    <a:ea typeface="+mn-ea"/>
+                    <a:cs typeface="+mn-cs"/>
+                  </a:defRPr>
+                </a:lvl9pPr>
+              </a:lstStyle>
+              <a:p>
+                <a:pPr algn="ctr"/>
+                <a:r>
+                  <a:rPr lang="en-US" sz="1400" b="1" dirty="0">
+                    <a:latin typeface="Trebuchet MS" panose="020B0603020202020204" pitchFamily="34" charset="0"/>
+                  </a:rPr>
+                  <a:t>Iteration</a:t>
+                </a:r>
+                <a:endParaRPr lang="it-IT" sz="1400" b="1" i="0" dirty="0">
+                  <a:latin typeface="Cambria Math" panose="02040503050406030204" pitchFamily="18" charset="0"/>
+                </a:endParaRPr>
+              </a:p>
+              <a:p>
+                <a:pPr algn="ctr"/>
+                <a14:m>
+                  <m:oMathPara xmlns:m="http://schemas.openxmlformats.org/officeDocument/2006/math">
+                    <m:oMathParaPr>
+                      <m:jc m:val="centerGroup"/>
+                    </m:oMathParaPr>
+                    <m:oMath xmlns:m="http://schemas.openxmlformats.org/officeDocument/2006/math">
+                      <m:r>
+                        <a:rPr lang="it-IT" sz="1400" b="1" i="1" dirty="0" smtClean="0">
+                          <a:latin typeface="Cambria Math" panose="02040503050406030204" pitchFamily="18" charset="0"/>
+                        </a:rPr>
+                        <m:t>𝟐</m:t>
+                      </m:r>
+                    </m:oMath>
+                  </m:oMathPara>
+                </a14:m>
+                <a:endParaRPr lang="it-IT" sz="1400" b="1" dirty="0"/>
+              </a:p>
+            </p:txBody>
+          </p:sp>
+        </mc:Choice>
+        <mc:Fallback>
+          <p:sp>
+            <p:nvSpPr>
+              <p:cNvPr id="35" name="TextBox 8">
+                <a:extLst>
+                  <a:ext uri="{FF2B5EF4-FFF2-40B4-BE49-F238E27FC236}">
+                    <a16:creationId xmlns:a16="http://schemas.microsoft.com/office/drawing/2014/main" id="{EB0EEAD6-BAED-5174-E3F6-DB8F1020EC88}"/>
+                  </a:ext>
+                </a:extLst>
+              </p:cNvPr>
+              <p:cNvSpPr txBox="1">
+                <a:spLocks noRot="1" noChangeAspect="1" noMove="1" noResize="1" noEditPoints="1" noAdjustHandles="1" noChangeArrowheads="1" noChangeShapeType="1" noTextEdit="1"/>
+              </p:cNvSpPr>
+              <p:nvPr/>
+            </p:nvSpPr>
+            <p:spPr>
+              <a:xfrm>
+                <a:off x="9808838" y="15556455"/>
+                <a:ext cx="1270361" cy="523220"/>
+              </a:xfrm>
+              <a:prstGeom prst="rect">
+                <a:avLst/>
+              </a:prstGeom>
+              <a:blipFill>
+                <a:blip r:embed="rId5"/>
+                <a:stretch>
+                  <a:fillRect t="-3488"/>
+                </a:stretch>
+              </a:blipFill>
+            </p:spPr>
+            <p:txBody>
+              <a:bodyPr/>
+              <a:lstStyle/>
+              <a:p>
+                <a:r>
+                  <a:rPr lang="it-IT">
+                    <a:noFill/>
+                  </a:rPr>
+                  <a:t> </a:t>
+                </a:r>
+              </a:p>
+            </p:txBody>
+          </p:sp>
+        </mc:Fallback>
+      </mc:AlternateContent>
+      <p:sp>
+        <p:nvSpPr>
+          <p:cNvPr id="36" name="TextBox 11">
+            <a:extLst>
+              <a:ext uri="{FF2B5EF4-FFF2-40B4-BE49-F238E27FC236}">
+                <a16:creationId xmlns:a16="http://schemas.microsoft.com/office/drawing/2014/main" id="{E03722C0-BEF6-461D-BCC0-4E5EAD935030}"/>
+              </a:ext>
+            </a:extLst>
+          </p:cNvPr>
+          <p:cNvSpPr txBox="1"/>
+          <p:nvPr/>
+        </p:nvSpPr>
+        <p:spPr>
+          <a:xfrm>
+            <a:off x="11079199" y="18307264"/>
+            <a:ext cx="1693385" cy="307777"/>
+          </a:xfrm>
+          <a:prstGeom prst="rect">
+            <a:avLst/>
+          </a:prstGeom>
+          <a:noFill/>
+        </p:spPr>
+        <p:txBody>
+          <a:bodyPr wrap="square">
+            <a:spAutoFit/>
+          </a:bodyPr>
+          <a:lstStyle>
+            <a:defPPr>
+              <a:defRPr lang="en-US"/>
+            </a:defPPr>
+            <a:lvl1pPr marL="0" algn="l" defTabSz="914400" rtl="0" eaLnBrk="1" latinLnBrk="0" hangingPunct="1">
+              <a:defRPr sz="1800" kern="1200">
+                <a:solidFill>
+                  <a:schemeClr val="tx1"/>
+                </a:solidFill>
+                <a:latin typeface="+mn-lt"/>
+                <a:ea typeface="+mn-ea"/>
+                <a:cs typeface="+mn-cs"/>
+              </a:defRPr>
+            </a:lvl1pPr>
+            <a:lvl2pPr marL="457200" algn="l" defTabSz="914400" rtl="0" eaLnBrk="1" latinLnBrk="0" hangingPunct="1">
+              <a:defRPr sz="1800" kern="1200">
+                <a:solidFill>
+                  <a:schemeClr val="tx1"/>
+                </a:solidFill>
+                <a:latin typeface="+mn-lt"/>
+                <a:ea typeface="+mn-ea"/>
+                <a:cs typeface="+mn-cs"/>
+              </a:defRPr>
+            </a:lvl2pPr>
+            <a:lvl3pPr marL="914400" algn="l" defTabSz="914400" rtl="0" eaLnBrk="1" latinLnBrk="0" hangingPunct="1">
+              <a:defRPr sz="1800" kern="1200">
+                <a:solidFill>
+                  <a:schemeClr val="tx1"/>
+                </a:solidFill>
+                <a:latin typeface="+mn-lt"/>
+                <a:ea typeface="+mn-ea"/>
+                <a:cs typeface="+mn-cs"/>
+              </a:defRPr>
+            </a:lvl3pPr>
+            <a:lvl4pPr marL="1371600" algn="l" defTabSz="914400" rtl="0" eaLnBrk="1" latinLnBrk="0" hangingPunct="1">
+              <a:defRPr sz="1800" kern="1200">
+                <a:solidFill>
+                  <a:schemeClr val="tx1"/>
+                </a:solidFill>
+                <a:latin typeface="+mn-lt"/>
+                <a:ea typeface="+mn-ea"/>
+                <a:cs typeface="+mn-cs"/>
+              </a:defRPr>
+            </a:lvl4pPr>
+            <a:lvl5pPr marL="1828800" algn="l" defTabSz="914400" rtl="0" eaLnBrk="1" latinLnBrk="0" hangingPunct="1">
+              <a:defRPr sz="1800" kern="1200">
+                <a:solidFill>
+                  <a:schemeClr val="tx1"/>
+                </a:solidFill>
+                <a:latin typeface="+mn-lt"/>
+                <a:ea typeface="+mn-ea"/>
+                <a:cs typeface="+mn-cs"/>
+              </a:defRPr>
+            </a:lvl5pPr>
+            <a:lvl6pPr marL="2286000" algn="l" defTabSz="914400" rtl="0" eaLnBrk="1" latinLnBrk="0" hangingPunct="1">
+              <a:defRPr sz="1800" kern="1200">
+                <a:solidFill>
+                  <a:schemeClr val="tx1"/>
+                </a:solidFill>
+                <a:latin typeface="+mn-lt"/>
+                <a:ea typeface="+mn-ea"/>
+                <a:cs typeface="+mn-cs"/>
+              </a:defRPr>
+            </a:lvl6pPr>
+            <a:lvl7pPr marL="2743200" algn="l" defTabSz="914400" rtl="0" eaLnBrk="1" latinLnBrk="0" hangingPunct="1">
+              <a:defRPr sz="1800" kern="1200">
+                <a:solidFill>
+                  <a:schemeClr val="tx1"/>
+                </a:solidFill>
+                <a:latin typeface="+mn-lt"/>
+                <a:ea typeface="+mn-ea"/>
+                <a:cs typeface="+mn-cs"/>
+              </a:defRPr>
+            </a:lvl7pPr>
+            <a:lvl8pPr marL="3200400" algn="l" defTabSz="914400" rtl="0" eaLnBrk="1" latinLnBrk="0" hangingPunct="1">
+              <a:defRPr sz="1800" kern="1200">
+                <a:solidFill>
+                  <a:schemeClr val="tx1"/>
+                </a:solidFill>
+                <a:latin typeface="+mn-lt"/>
+                <a:ea typeface="+mn-ea"/>
+                <a:cs typeface="+mn-cs"/>
+              </a:defRPr>
+            </a:lvl8pPr>
+            <a:lvl9pPr marL="3657600" algn="l" defTabSz="914400" rtl="0" eaLnBrk="1" latinLnBrk="0" hangingPunct="1">
+              <a:defRPr sz="1800" kern="1200">
+                <a:solidFill>
+                  <a:schemeClr val="tx1"/>
+                </a:solidFill>
+                <a:latin typeface="+mn-lt"/>
+                <a:ea typeface="+mn-ea"/>
+                <a:cs typeface="+mn-cs"/>
+              </a:defRPr>
+            </a:lvl9pPr>
+          </a:lstStyle>
+          <a:p>
+            <a:pPr algn="ctr"/>
+            <a:r>
+              <a:rPr lang="en-US" sz="1400" b="1" noProof="0" dirty="0"/>
+              <a:t>Database 3</a:t>
+            </a:r>
+          </a:p>
+        </p:txBody>
+      </p:sp>
+    </p:spTree>
+    <p:extLst>
+      <p:ext uri="{BB962C8B-B14F-4D97-AF65-F5344CB8AC3E}">
+        <p14:creationId xmlns:p14="http://schemas.microsoft.com/office/powerpoint/2010/main" val="3933203682"/>
+      </p:ext>
+    </p:extLst>
+  </p:cSld>
+  <p:clrMapOvr>
+    <a:masterClrMapping/>
+  </p:clrMapOvr>
+</p:sld>
+</file>
+
+<file path=ppt/slides/slide3.xml><?xml version="1.0" encoding="utf-8"?>
+<p:sld xmlns:a="http://schemas.openxmlformats.org/drawingml/2006/main" xmlns:r="http://schemas.openxmlformats.org/officeDocument/2006/relationships" xmlns:p="http://schemas.openxmlformats.org/presentationml/2006/main">
+  <p:cSld>
+    <p:spTree>
+      <p:nvGrpSpPr>
+        <p:cNvPr id="1" name=""/>
+        <p:cNvGrpSpPr/>
+        <p:nvPr/>
+      </p:nvGrpSpPr>
+      <p:grpSpPr>
+        <a:xfrm>
+          <a:off x="0" y="0"/>
+          <a:ext cx="0" cy="0"/>
+          <a:chOff x="0" y="0"/>
+          <a:chExt cx="0" cy="0"/>
+        </a:xfrm>
+      </p:grpSpPr>
+      <p:sp>
+        <p:nvSpPr>
           <p:cNvPr id="22" name="Rettangolo 19">
             <a:extLst>
               <a:ext uri="{FF2B5EF4-FFF2-40B4-BE49-F238E27FC236}">
@@ -6114,7 +11409,7 @@
         <p:spPr>
           <a:xfrm>
             <a:off x="507019" y="2491740"/>
-            <a:ext cx="6345901" cy="6350000"/>
+            <a:ext cx="6693087" cy="6350000"/>
           </a:xfrm>
           <a:prstGeom prst="rect">
             <a:avLst/>
@@ -6217,7 +11512,7 @@
                 <a:ea typeface="Fira Code" pitchFamily="1" charset="0"/>
                 <a:cs typeface="Fira Code" pitchFamily="1" charset="0"/>
               </a:rPr>
-              <a:t>1. Conceptual model definition</a:t>
+              <a:t>Conceptual model definition</a:t>
             </a:r>
           </a:p>
         </p:txBody>
@@ -6326,7 +11621,7 @@
                 <a:ea typeface="Fira Code" pitchFamily="1" charset="0"/>
                 <a:cs typeface="Fira Code" pitchFamily="1" charset="0"/>
               </a:rPr>
-              <a:t>2. Generation of model directory</a:t>
+              <a:t>Generation of model directory</a:t>
             </a:r>
           </a:p>
         </p:txBody>
@@ -6388,7 +11683,7 @@
                 <a:ea typeface="Fira Code" pitchFamily="1" charset="0"/>
                 <a:cs typeface="Fira Code" pitchFamily="1" charset="0"/>
               </a:rPr>
-              <a:t>3. Fill model setup file/s</a:t>
+              <a:t>Fill model setup file/s</a:t>
             </a:r>
           </a:p>
         </p:txBody>
@@ -6450,7 +11745,7 @@
                 <a:ea typeface="Fira Code" pitchFamily="1" charset="0"/>
                 <a:cs typeface="Fira Code" pitchFamily="1" charset="0"/>
               </a:rPr>
-              <a:t>4. Generation of Model class instance</a:t>
+              <a:t>Model class instance generation</a:t>
             </a:r>
           </a:p>
         </p:txBody>
@@ -6512,7 +11807,7 @@
                 <a:ea typeface="Fira Code" pitchFamily="1" charset="0"/>
                 <a:cs typeface="Fira Code" pitchFamily="1" charset="0"/>
               </a:rPr>
-              <a:t>5. Fill sets data </a:t>
+              <a:t>Fill sets data </a:t>
             </a:r>
             <a:br>
               <a:rPr lang="en-US" sz="1063" noProof="1">
@@ -6595,7 +11890,7 @@
                 <a:ea typeface="Fira Code" pitchFamily="1" charset="0"/>
                 <a:cs typeface="Fira Code" pitchFamily="1" charset="0"/>
               </a:rPr>
-              <a:t>6. Initialization of data structures</a:t>
+              <a:t>Initialization of data structures</a:t>
             </a:r>
           </a:p>
         </p:txBody>
@@ -6657,7 +11952,7 @@
                 <a:ea typeface="Fira Code" pitchFamily="1" charset="0"/>
                 <a:cs typeface="Fira Code" pitchFamily="1" charset="0"/>
               </a:rPr>
-              <a:t>8. Initialization of </a:t>
+              <a:t>Initialization of </a:t>
             </a:r>
             <a:br>
               <a:rPr lang="en-US" sz="1063" noProof="1">
@@ -6740,7 +12035,28 @@
                 <a:ea typeface="Fira Code" pitchFamily="1" charset="0"/>
                 <a:cs typeface="Fira Code" pitchFamily="1" charset="0"/>
               </a:rPr>
-              <a:t>7. Fill/update exogenous model data</a:t>
+              <a:t>Fill/update </a:t>
+            </a:r>
+            <a:br>
+              <a:rPr lang="en-US" sz="1063" noProof="1">
+                <a:solidFill>
+                  <a:schemeClr val="tx1"/>
+                </a:solidFill>
+                <a:latin typeface="+mj-lt"/>
+                <a:ea typeface="Fira Code" pitchFamily="1" charset="0"/>
+                <a:cs typeface="Fira Code" pitchFamily="1" charset="0"/>
+              </a:rPr>
+            </a:br>
+            <a:r>
+              <a:rPr lang="en-US" sz="1063" noProof="1">
+                <a:solidFill>
+                  <a:schemeClr val="tx1"/>
+                </a:solidFill>
+                <a:latin typeface="+mj-lt"/>
+                <a:ea typeface="Fira Code" pitchFamily="1" charset="0"/>
+                <a:cs typeface="Fira Code" pitchFamily="1" charset="0"/>
+              </a:rPr>
+              <a:t>exogenous model data</a:t>
             </a:r>
           </a:p>
         </p:txBody>
@@ -6802,7 +12118,28 @@
                 <a:ea typeface="Fira Code" pitchFamily="1" charset="0"/>
                 <a:cs typeface="Fira Code" pitchFamily="1" charset="0"/>
               </a:rPr>
-              <a:t>9. Solution of numerical problem/s</a:t>
+              <a:t>Solution of </a:t>
+            </a:r>
+            <a:br>
+              <a:rPr lang="en-US" sz="1063" noProof="1">
+                <a:solidFill>
+                  <a:schemeClr val="tx1"/>
+                </a:solidFill>
+                <a:latin typeface="+mj-lt"/>
+                <a:ea typeface="Fira Code" pitchFamily="1" charset="0"/>
+                <a:cs typeface="Fira Code" pitchFamily="1" charset="0"/>
+              </a:rPr>
+            </a:br>
+            <a:r>
+              <a:rPr lang="en-US" sz="1063" noProof="1">
+                <a:solidFill>
+                  <a:schemeClr val="tx1"/>
+                </a:solidFill>
+                <a:latin typeface="+mj-lt"/>
+                <a:ea typeface="Fira Code" pitchFamily="1" charset="0"/>
+                <a:cs typeface="Fira Code" pitchFamily="1" charset="0"/>
+              </a:rPr>
+              <a:t>numerical problem/s</a:t>
             </a:r>
           </a:p>
         </p:txBody>
@@ -6864,7 +12201,7 @@
                 <a:ea typeface="Fira Code" pitchFamily="1" charset="0"/>
                 <a:cs typeface="Fira Code" pitchFamily="1" charset="0"/>
               </a:rPr>
-              <a:t>10. Export endogenous model data</a:t>
+              <a:t>Export endogenous model data</a:t>
             </a:r>
           </a:p>
         </p:txBody>
@@ -6884,7 +12221,7 @@
         <p:spPr>
           <a:xfrm>
             <a:off x="3717468" y="3331736"/>
-            <a:ext cx="1910853" cy="367229"/>
+            <a:ext cx="2122440" cy="367229"/>
           </a:xfrm>
           <a:prstGeom prst="rect">
             <a:avLst/>
@@ -6915,7 +12252,7 @@
           <a:lstStyle/>
           <a:p>
             <a:r>
-              <a:rPr lang="en-US" sz="800" noProof="1">
+              <a:rPr lang="en-US" sz="900" noProof="1">
                 <a:solidFill>
                   <a:schemeClr val="tx1"/>
                 </a:solidFill>
@@ -6926,7 +12263,7 @@
               <a:t>cvxlab.</a:t>
             </a:r>
             <a:r>
-              <a:rPr lang="en-US" sz="800" b="1" noProof="1">
+              <a:rPr lang="en-US" sz="900" b="1" noProof="1">
                 <a:solidFill>
                   <a:schemeClr val="tx1"/>
                 </a:solidFill>
@@ -7141,8 +12478,8 @@
         </p:nvSpPr>
         <p:spPr>
           <a:xfrm>
-            <a:off x="3717468" y="5850266"/>
-            <a:ext cx="2754572" cy="282652"/>
+            <a:off x="3717467" y="5850266"/>
+            <a:ext cx="3059583" cy="282652"/>
           </a:xfrm>
           <a:prstGeom prst="rect">
             <a:avLst/>
@@ -7178,7 +12515,7 @@
               </a:spcAft>
             </a:pPr>
             <a:r>
-              <a:rPr lang="en-US" sz="800" noProof="1">
+              <a:rPr lang="en-US" sz="900" noProof="1">
                 <a:solidFill>
                   <a:schemeClr val="tx1"/>
                 </a:solidFill>
@@ -7189,7 +12526,7 @@
               <a:t>model.</a:t>
             </a:r>
             <a:r>
-              <a:rPr lang="en-US" sz="800" b="1" noProof="1">
+              <a:rPr lang="en-US" sz="900" b="1" noProof="1">
                 <a:solidFill>
                   <a:schemeClr val="tx1"/>
                 </a:solidFill>
@@ -7217,7 +12554,7 @@
         <p:spPr>
           <a:xfrm>
             <a:off x="3717468" y="4567412"/>
-            <a:ext cx="2191719" cy="367229"/>
+            <a:ext cx="2434406" cy="367229"/>
           </a:xfrm>
           <a:prstGeom prst="rect">
             <a:avLst/>
@@ -7248,7 +12585,7 @@
           <a:lstStyle/>
           <a:p>
             <a:r>
-              <a:rPr lang="en-US" sz="800" noProof="1">
+              <a:rPr lang="en-US" sz="900" noProof="1">
                 <a:solidFill>
                   <a:schemeClr val="tx1"/>
                 </a:solidFill>
@@ -7259,7 +12596,7 @@
               <a:t>model = cvxlab.</a:t>
             </a:r>
             <a:r>
-              <a:rPr lang="en-US" sz="800" b="1" noProof="1">
+              <a:rPr lang="en-US" sz="900" b="1" noProof="1">
                 <a:solidFill>
                   <a:schemeClr val="tx1"/>
                 </a:solidFill>
@@ -7287,7 +12624,7 @@
         <p:spPr>
           <a:xfrm>
             <a:off x="3717468" y="7636337"/>
-            <a:ext cx="1910853" cy="367229"/>
+            <a:ext cx="2122440" cy="367229"/>
           </a:xfrm>
           <a:prstGeom prst="rect">
             <a:avLst/>
@@ -7318,7 +12655,7 @@
           <a:lstStyle/>
           <a:p>
             <a:r>
-              <a:rPr lang="en-US" sz="800" noProof="1">
+              <a:rPr lang="en-US" sz="900" noProof="1">
                 <a:solidFill>
                   <a:schemeClr val="tx1"/>
                 </a:solidFill>
@@ -7329,7 +12666,7 @@
               <a:t>model.</a:t>
             </a:r>
             <a:r>
-              <a:rPr lang="en-US" sz="800" b="1" noProof="1">
+              <a:rPr lang="en-US" sz="900" b="1" noProof="1">
                 <a:solidFill>
                   <a:schemeClr val="tx1"/>
                 </a:solidFill>
@@ -7356,8 +12693,8 @@
         </p:nvSpPr>
         <p:spPr>
           <a:xfrm>
-            <a:off x="3717468" y="8245633"/>
-            <a:ext cx="2234220" cy="367229"/>
+            <a:off x="3717467" y="8245633"/>
+            <a:ext cx="2481613" cy="367229"/>
           </a:xfrm>
           <a:prstGeom prst="rect">
             <a:avLst/>
@@ -7388,7 +12725,7 @@
           <a:lstStyle/>
           <a:p>
             <a:r>
-              <a:rPr lang="en-US" sz="800" noProof="1">
+              <a:rPr lang="en-US" sz="900" noProof="1">
                 <a:solidFill>
                   <a:schemeClr val="tx1"/>
                 </a:solidFill>
@@ -7399,7 +12736,7 @@
               <a:t>model.</a:t>
             </a:r>
             <a:r>
-              <a:rPr lang="en-US" sz="800" b="1" noProof="1">
+              <a:rPr lang="en-US" sz="900" b="1" noProof="1">
                 <a:solidFill>
                   <a:schemeClr val="tx1"/>
                 </a:solidFill>
@@ -7884,7 +13221,7 @@
         <p:spPr>
           <a:xfrm>
             <a:off x="3717468" y="7072869"/>
-            <a:ext cx="3135452" cy="290805"/>
+            <a:ext cx="3482638" cy="290805"/>
           </a:xfrm>
           <a:prstGeom prst="rect">
             <a:avLst/>
@@ -7920,7 +13257,7 @@
               </a:spcAft>
             </a:pPr>
             <a:r>
-              <a:rPr lang="en-US" sz="800" noProof="1">
+              <a:rPr lang="en-US" sz="900" noProof="1">
                 <a:solidFill>
                   <a:schemeClr val="tx1"/>
                 </a:solidFill>
@@ -7931,7 +13268,7 @@
               <a:t>model.</a:t>
             </a:r>
             <a:r>
-              <a:rPr lang="en-US" sz="800" b="1" noProof="1">
+              <a:rPr lang="en-US" sz="900" b="1" noProof="1">
                 <a:solidFill>
                   <a:schemeClr val="tx1"/>
                 </a:solidFill>
@@ -8062,7 +13399,7 @@
                 <a:ea typeface="Fira Code" pitchFamily="1" charset="0"/>
                 <a:cs typeface="Fira Code" pitchFamily="1" charset="0"/>
               </a:rPr>
-              <a:t>1. Generation of Model class instance</a:t>
+              <a:t>Model class instance generation</a:t>
             </a:r>
           </a:p>
         </p:txBody>
@@ -8124,7 +13461,7 @@
                 <a:ea typeface="Fira Code" pitchFamily="1" charset="0"/>
                 <a:cs typeface="Fira Code" pitchFamily="1" charset="0"/>
               </a:rPr>
-              <a:t>3. Initialization of </a:t>
+              <a:t>Initialization of </a:t>
             </a:r>
             <a:br>
               <a:rPr lang="en-US" sz="1063" noProof="1">
@@ -8207,7 +13544,7 @@
                 <a:ea typeface="Fira Code" pitchFamily="1" charset="0"/>
                 <a:cs typeface="Fira Code" pitchFamily="1" charset="0"/>
               </a:rPr>
-              <a:t>2. Fill/update exogenous model data</a:t>
+              <a:t>Fill/update exogenous model data</a:t>
             </a:r>
           </a:p>
         </p:txBody>
@@ -8269,7 +13606,7 @@
                 <a:ea typeface="Fira Code" pitchFamily="1" charset="0"/>
                 <a:cs typeface="Fira Code" pitchFamily="1" charset="0"/>
               </a:rPr>
-              <a:t>4. Solution of numerical problem/s</a:t>
+              <a:t>Solution of numerical problem/s</a:t>
             </a:r>
           </a:p>
         </p:txBody>
@@ -8331,7 +13668,7 @@
                 <a:ea typeface="Fira Code" pitchFamily="1" charset="0"/>
                 <a:cs typeface="Fira Code" pitchFamily="1" charset="0"/>
               </a:rPr>
-              <a:t>5. Export endogenous model data</a:t>
+              <a:t>Export endogenous model data</a:t>
             </a:r>
           </a:p>
         </p:txBody>
@@ -8397,8 +13734,8 @@
         </p:nvSpPr>
         <p:spPr>
           <a:xfrm>
-            <a:off x="4410086" y="10357530"/>
-            <a:ext cx="3082914" cy="215751"/>
+            <a:off x="4410085" y="10292198"/>
+            <a:ext cx="3453539" cy="365384"/>
           </a:xfrm>
           <a:prstGeom prst="rect">
             <a:avLst/>
@@ -8429,7 +13766,7 @@
           <a:lstStyle/>
           <a:p>
             <a:r>
-              <a:rPr lang="en-US" sz="800" noProof="1">
+              <a:rPr lang="en-US" sz="900" noProof="1">
                 <a:solidFill>
                   <a:schemeClr val="tx1"/>
                 </a:solidFill>
@@ -8440,7 +13777,7 @@
               <a:t>model = cvxlab.</a:t>
             </a:r>
             <a:r>
-              <a:rPr lang="en-US" sz="800" b="1" noProof="1">
+              <a:rPr lang="en-US" sz="900" b="1" noProof="1">
                 <a:solidFill>
                   <a:schemeClr val="tx1"/>
                 </a:solidFill>
@@ -8451,7 +13788,7 @@
               <a:t>Model(</a:t>
             </a:r>
             <a:r>
-              <a:rPr lang="en-US" sz="800" noProof="1">
+              <a:rPr lang="en-US" sz="900" i="1" noProof="1">
                 <a:solidFill>
                   <a:schemeClr val="tx1"/>
                 </a:solidFill>
@@ -8462,7 +13799,7 @@
               <a:t>use_existing_data=True</a:t>
             </a:r>
             <a:r>
-              <a:rPr lang="en-US" sz="800" b="1" noProof="1">
+              <a:rPr lang="en-US" sz="900" b="1" noProof="1">
                 <a:solidFill>
                   <a:schemeClr val="tx1"/>
                 </a:solidFill>
@@ -8490,7 +13827,7 @@
         <p:spPr>
           <a:xfrm>
             <a:off x="4410086" y="12210277"/>
-            <a:ext cx="1910853" cy="229694"/>
+            <a:ext cx="2140574" cy="229694"/>
           </a:xfrm>
           <a:prstGeom prst="rect">
             <a:avLst/>
@@ -8521,7 +13858,7 @@
           <a:lstStyle/>
           <a:p>
             <a:r>
-              <a:rPr lang="en-US" sz="800" noProof="1">
+              <a:rPr lang="en-US" sz="900" noProof="1">
                 <a:solidFill>
                   <a:schemeClr val="tx1"/>
                 </a:solidFill>
@@ -8532,7 +13869,7 @@
               <a:t>model.</a:t>
             </a:r>
             <a:r>
-              <a:rPr lang="en-US" sz="800" b="1" noProof="1">
+              <a:rPr lang="en-US" sz="900" b="1" noProof="1">
                 <a:solidFill>
                   <a:schemeClr val="tx1"/>
                 </a:solidFill>
@@ -8560,7 +13897,7 @@
         <p:spPr>
           <a:xfrm>
             <a:off x="4410086" y="12791337"/>
-            <a:ext cx="2234220" cy="286166"/>
+            <a:ext cx="2502816" cy="286166"/>
           </a:xfrm>
           <a:prstGeom prst="rect">
             <a:avLst/>
@@ -8591,7 +13928,7 @@
           <a:lstStyle/>
           <a:p>
             <a:r>
-              <a:rPr lang="en-US" sz="800" noProof="1">
+              <a:rPr lang="en-US" sz="900" noProof="1">
                 <a:solidFill>
                   <a:schemeClr val="tx1"/>
                 </a:solidFill>
@@ -8602,7 +13939,7 @@
               <a:t>model.</a:t>
             </a:r>
             <a:r>
-              <a:rPr lang="en-US" sz="800" b="1" noProof="1">
+              <a:rPr lang="en-US" sz="900" b="1" noProof="1">
                 <a:solidFill>
                   <a:schemeClr val="tx1"/>
                 </a:solidFill>
@@ -8777,8 +14114,8 @@
         </p:nvSpPr>
         <p:spPr>
           <a:xfrm>
-            <a:off x="4410086" y="11620687"/>
-            <a:ext cx="3184514" cy="189079"/>
+            <a:off x="4416435" y="11533948"/>
+            <a:ext cx="3527415" cy="356804"/>
           </a:xfrm>
           <a:prstGeom prst="rect">
             <a:avLst/>
@@ -8814,7 +14151,7 @@
               </a:spcAft>
             </a:pPr>
             <a:r>
-              <a:rPr lang="en-US" sz="800" noProof="1">
+              <a:rPr lang="en-US" sz="900" noProof="1">
                 <a:solidFill>
                   <a:schemeClr val="tx1"/>
                 </a:solidFill>
@@ -8825,7 +14162,7 @@
               <a:t>model.</a:t>
             </a:r>
             <a:r>
-              <a:rPr lang="en-US" sz="800" b="1" noProof="1">
+              <a:rPr lang="en-US" sz="900" b="1" noProof="1">
                 <a:solidFill>
                   <a:schemeClr val="tx1"/>
                 </a:solidFill>
@@ -8995,8 +14332,8 @@
         </p:nvSpPr>
         <p:spPr>
           <a:xfrm>
-            <a:off x="4410085" y="11026243"/>
-            <a:ext cx="3476017" cy="189079"/>
+            <a:off x="4410085" y="10866417"/>
+            <a:ext cx="3301355" cy="426783"/>
           </a:xfrm>
           <a:prstGeom prst="rect">
             <a:avLst/>
@@ -9032,7 +14369,7 @@
               </a:spcAft>
             </a:pPr>
             <a:r>
-              <a:rPr lang="en-US" sz="800" noProof="1">
+              <a:rPr lang="en-US" sz="900" noProof="1">
                 <a:solidFill>
                   <a:schemeClr val="tx1"/>
                 </a:solidFill>
@@ -9043,7 +14380,7 @@
               <a:t>model.</a:t>
             </a:r>
             <a:r>
-              <a:rPr lang="en-US" sz="800" b="1" noProof="1">
+              <a:rPr lang="en-US" sz="900" b="1" noProof="1">
                 <a:solidFill>
                   <a:schemeClr val="tx1"/>
                 </a:solidFill>
@@ -9054,7 +14391,7 @@
               <a:t>generate_input_data_files(</a:t>
             </a:r>
             <a:r>
-              <a:rPr lang="en-US" sz="800" noProof="1">
+              <a:rPr lang="en-US" sz="900" i="1" noProof="1">
                 <a:solidFill>
                   <a:schemeClr val="tx1"/>
                 </a:solidFill>
@@ -9062,10 +14399,10 @@
                 <a:ea typeface="Fira Code" pitchFamily="1" charset="0"/>
                 <a:cs typeface="Fira Code" pitchFamily="1" charset="0"/>
               </a:rPr>
-              <a:t>table_key_list=[...]</a:t>
-            </a:r>
-            <a:r>
-              <a:rPr lang="en-US" sz="800" b="1" noProof="1">
+              <a:t>...</a:t>
+            </a:r>
+            <a:r>
+              <a:rPr lang="en-US" sz="900" b="1" noProof="1">
                 <a:solidFill>
                   <a:schemeClr val="tx1"/>
                 </a:solidFill>
@@ -9080,10 +14417,10 @@
       </p:sp>
       <p:pic>
         <p:nvPicPr>
-          <p:cNvPr id="5" name="Picture 4">
-            <a:extLst>
-              <a:ext uri="{FF2B5EF4-FFF2-40B4-BE49-F238E27FC236}">
-                <a16:creationId xmlns:a16="http://schemas.microsoft.com/office/drawing/2014/main" id="{E3BC47EF-845F-EF3B-A693-C59144B59A10}"/>
+          <p:cNvPr id="3" name="Picture 2">
+            <a:extLst>
+              <a:ext uri="{FF2B5EF4-FFF2-40B4-BE49-F238E27FC236}">
+                <a16:creationId xmlns:a16="http://schemas.microsoft.com/office/drawing/2014/main" id="{28D1FC85-C025-F263-D11D-A7E19D908F2B}"/>
               </a:ext>
             </a:extLst>
           </p:cNvPr>
@@ -9100,8 +14437,8 @@
         </p:blipFill>
         <p:spPr>
           <a:xfrm>
-            <a:off x="6142327" y="11963837"/>
-            <a:ext cx="7437765" cy="3218967"/>
+            <a:off x="7383712" y="3246447"/>
+            <a:ext cx="6693988" cy="6346486"/>
           </a:xfrm>
           <a:prstGeom prst="rect">
             <a:avLst/>
@@ -9110,10 +14447,10 @@
       </p:pic>
       <p:pic>
         <p:nvPicPr>
-          <p:cNvPr id="2" name="Picture 1">
-            <a:extLst>
-              <a:ext uri="{FF2B5EF4-FFF2-40B4-BE49-F238E27FC236}">
-                <a16:creationId xmlns:a16="http://schemas.microsoft.com/office/drawing/2014/main" id="{A39E0929-888F-CC96-6B1C-68F78D9069A6}"/>
+          <p:cNvPr id="8" name="Picture 7">
+            <a:extLst>
+              <a:ext uri="{FF2B5EF4-FFF2-40B4-BE49-F238E27FC236}">
+                <a16:creationId xmlns:a16="http://schemas.microsoft.com/office/drawing/2014/main" id="{BD1CC652-94AE-9F04-A635-CAF2E459D4CD}"/>
               </a:ext>
             </a:extLst>
           </p:cNvPr>
@@ -9130,8 +14467,8 @@
         </p:blipFill>
         <p:spPr>
           <a:xfrm>
-            <a:off x="7475877" y="2490293"/>
-            <a:ext cx="6346486" cy="6346486"/>
+            <a:off x="6605958" y="10335319"/>
+            <a:ext cx="7437765" cy="3218967"/>
           </a:xfrm>
           <a:prstGeom prst="rect">
             <a:avLst/>
@@ -9151,7 +14488,7 @@
 </p:sld>
 </file>
 
-<file path=ppt/slides/slide3.xml><?xml version="1.0" encoding="utf-8"?>
+<file path=ppt/slides/slide4.xml><?xml version="1.0" encoding="utf-8"?>
 <p:sld xmlns:a="http://schemas.openxmlformats.org/drawingml/2006/main" xmlns:r="http://schemas.openxmlformats.org/officeDocument/2006/relationships" xmlns:p="http://schemas.openxmlformats.org/presentationml/2006/main">
   <p:cSld>
     <p:spTree>

--- a/docs/images/flowchart.pptx
+++ b/docs/images/flowchart.pptx
@@ -246,7 +246,7 @@
           <a:p>
             <a:fld id="{C4BA104D-BBF9-4279-8CEB-A5CF88D2DFAC}" type="datetimeFigureOut">
               <a:rPr lang="en-US" smtClean="0"/>
-              <a:t>3/24/2026</a:t>
+              <a:t>3/26/2026</a:t>
             </a:fld>
             <a:endParaRPr lang="en-US"/>
           </a:p>
@@ -416,7 +416,7 @@
           <a:p>
             <a:fld id="{C4BA104D-BBF9-4279-8CEB-A5CF88D2DFAC}" type="datetimeFigureOut">
               <a:rPr lang="en-US" smtClean="0"/>
-              <a:t>3/24/2026</a:t>
+              <a:t>3/26/2026</a:t>
             </a:fld>
             <a:endParaRPr lang="en-US"/>
           </a:p>
@@ -596,7 +596,7 @@
           <a:p>
             <a:fld id="{C4BA104D-BBF9-4279-8CEB-A5CF88D2DFAC}" type="datetimeFigureOut">
               <a:rPr lang="en-US" smtClean="0"/>
-              <a:t>3/24/2026</a:t>
+              <a:t>3/26/2026</a:t>
             </a:fld>
             <a:endParaRPr lang="en-US"/>
           </a:p>
@@ -896,7 +896,7 @@
           <a:p>
             <a:fld id="{C4BA104D-BBF9-4279-8CEB-A5CF88D2DFAC}" type="datetimeFigureOut">
               <a:rPr lang="en-US" smtClean="0"/>
-              <a:t>3/24/2026</a:t>
+              <a:t>3/26/2026</a:t>
             </a:fld>
             <a:endParaRPr lang="en-US"/>
           </a:p>
@@ -1142,7 +1142,7 @@
           <a:p>
             <a:fld id="{C4BA104D-BBF9-4279-8CEB-A5CF88D2DFAC}" type="datetimeFigureOut">
               <a:rPr lang="en-US" smtClean="0"/>
-              <a:t>3/24/2026</a:t>
+              <a:t>3/26/2026</a:t>
             </a:fld>
             <a:endParaRPr lang="en-US"/>
           </a:p>
@@ -1374,7 +1374,7 @@
           <a:p>
             <a:fld id="{C4BA104D-BBF9-4279-8CEB-A5CF88D2DFAC}" type="datetimeFigureOut">
               <a:rPr lang="en-US" smtClean="0"/>
-              <a:t>3/24/2026</a:t>
+              <a:t>3/26/2026</a:t>
             </a:fld>
             <a:endParaRPr lang="en-US"/>
           </a:p>
@@ -1741,7 +1741,7 @@
           <a:p>
             <a:fld id="{C4BA104D-BBF9-4279-8CEB-A5CF88D2DFAC}" type="datetimeFigureOut">
               <a:rPr lang="en-US" smtClean="0"/>
-              <a:t>3/24/2026</a:t>
+              <a:t>3/26/2026</a:t>
             </a:fld>
             <a:endParaRPr lang="en-US"/>
           </a:p>
@@ -1859,7 +1859,7 @@
           <a:p>
             <a:fld id="{C4BA104D-BBF9-4279-8CEB-A5CF88D2DFAC}" type="datetimeFigureOut">
               <a:rPr lang="en-US" smtClean="0"/>
-              <a:t>3/24/2026</a:t>
+              <a:t>3/26/2026</a:t>
             </a:fld>
             <a:endParaRPr lang="en-US"/>
           </a:p>
@@ -1954,7 +1954,7 @@
           <a:p>
             <a:fld id="{C4BA104D-BBF9-4279-8CEB-A5CF88D2DFAC}" type="datetimeFigureOut">
               <a:rPr lang="en-US" smtClean="0"/>
-              <a:t>3/24/2026</a:t>
+              <a:t>3/26/2026</a:t>
             </a:fld>
             <a:endParaRPr lang="en-US"/>
           </a:p>
@@ -2231,7 +2231,7 @@
           <a:p>
             <a:fld id="{C4BA104D-BBF9-4279-8CEB-A5CF88D2DFAC}" type="datetimeFigureOut">
               <a:rPr lang="en-US" smtClean="0"/>
-              <a:t>3/24/2026</a:t>
+              <a:t>3/26/2026</a:t>
             </a:fld>
             <a:endParaRPr lang="en-US"/>
           </a:p>
@@ -2488,7 +2488,7 @@
           <a:p>
             <a:fld id="{C4BA104D-BBF9-4279-8CEB-A5CF88D2DFAC}" type="datetimeFigureOut">
               <a:rPr lang="en-US" smtClean="0"/>
-              <a:t>3/24/2026</a:t>
+              <a:t>3/26/2026</a:t>
             </a:fld>
             <a:endParaRPr lang="en-US"/>
           </a:p>
@@ -2701,7 +2701,7 @@
           <a:p>
             <a:fld id="{C4BA104D-BBF9-4279-8CEB-A5CF88D2DFAC}" type="datetimeFigureOut">
               <a:rPr lang="en-US" smtClean="0"/>
-              <a:t>3/24/2026</a:t>
+              <a:t>3/26/2026</a:t>
             </a:fld>
             <a:endParaRPr lang="en-US"/>
           </a:p>
@@ -8253,8 +8253,8 @@
           </a:extLst>
         </p:spPr>
       </p:pic>
-      <mc:AlternateContent xmlns:mc="http://schemas.openxmlformats.org/markup-compatibility/2006">
-        <mc:Choice xmlns:a14="http://schemas.microsoft.com/office/drawing/2010/main" Requires="a14">
+      <mc:AlternateContent xmlns:mc="http://schemas.openxmlformats.org/markup-compatibility/2006" xmlns:a14="http://schemas.microsoft.com/office/drawing/2010/main">
+        <mc:Choice Requires="a14">
           <p:sp>
             <p:nvSpPr>
               <p:cNvPr id="5" name="TextBox 14">
@@ -8416,7 +8416,7 @@
             </p:txBody>
           </p:sp>
         </mc:Choice>
-        <mc:Fallback>
+        <mc:Fallback xmlns="">
           <p:sp>
             <p:nvSpPr>
               <p:cNvPr id="5" name="TextBox 14">
@@ -9761,8 +9761,8 @@
           </a:fontRef>
         </p:style>
       </p:cxnSp>
-      <mc:AlternateContent xmlns:mc="http://schemas.openxmlformats.org/markup-compatibility/2006">
-        <mc:Choice xmlns:a14="http://schemas.microsoft.com/office/drawing/2010/main" Requires="a14">
+      <mc:AlternateContent xmlns:mc="http://schemas.openxmlformats.org/markup-compatibility/2006" xmlns:a14="http://schemas.microsoft.com/office/drawing/2010/main">
+        <mc:Choice Requires="a14">
           <p:sp>
             <p:nvSpPr>
               <p:cNvPr id="22" name="TextBox 78">
@@ -9918,7 +9918,7 @@
             </p:txBody>
           </p:sp>
         </mc:Choice>
-        <mc:Fallback>
+        <mc:Fallback xmlns="">
           <p:sp>
             <p:nvSpPr>
               <p:cNvPr id="22" name="TextBox 78">
@@ -11032,8 +11032,8 @@
           </a:fontRef>
         </p:style>
       </p:cxnSp>
-      <mc:AlternateContent xmlns:mc="http://schemas.openxmlformats.org/markup-compatibility/2006">
-        <mc:Choice xmlns:a14="http://schemas.microsoft.com/office/drawing/2010/main" Requires="a14">
+      <mc:AlternateContent xmlns:mc="http://schemas.openxmlformats.org/markup-compatibility/2006" xmlns:a14="http://schemas.microsoft.com/office/drawing/2010/main">
+        <mc:Choice Requires="a14">
           <p:sp>
             <p:nvSpPr>
               <p:cNvPr id="35" name="TextBox 8">
@@ -11189,7 +11189,7 @@
             </p:txBody>
           </p:sp>
         </mc:Choice>
-        <mc:Fallback>
+        <mc:Fallback xmlns="">
           <p:sp>
             <p:nvSpPr>
               <p:cNvPr id="35" name="TextBox 8">
@@ -14415,66 +14415,6 @@
           </a:p>
         </p:txBody>
       </p:sp>
-      <p:pic>
-        <p:nvPicPr>
-          <p:cNvPr id="3" name="Picture 2">
-            <a:extLst>
-              <a:ext uri="{FF2B5EF4-FFF2-40B4-BE49-F238E27FC236}">
-                <a16:creationId xmlns:a16="http://schemas.microsoft.com/office/drawing/2014/main" id="{28D1FC85-C025-F263-D11D-A7E19D908F2B}"/>
-              </a:ext>
-            </a:extLst>
-          </p:cNvPr>
-          <p:cNvPicPr>
-            <a:picLocks noChangeAspect="1"/>
-          </p:cNvPicPr>
-          <p:nvPr/>
-        </p:nvPicPr>
-        <p:blipFill>
-          <a:blip r:embed="rId2"/>
-          <a:stretch>
-            <a:fillRect/>
-          </a:stretch>
-        </p:blipFill>
-        <p:spPr>
-          <a:xfrm>
-            <a:off x="7383712" y="3246447"/>
-            <a:ext cx="6693988" cy="6346486"/>
-          </a:xfrm>
-          <a:prstGeom prst="rect">
-            <a:avLst/>
-          </a:prstGeom>
-        </p:spPr>
-      </p:pic>
-      <p:pic>
-        <p:nvPicPr>
-          <p:cNvPr id="8" name="Picture 7">
-            <a:extLst>
-              <a:ext uri="{FF2B5EF4-FFF2-40B4-BE49-F238E27FC236}">
-                <a16:creationId xmlns:a16="http://schemas.microsoft.com/office/drawing/2014/main" id="{BD1CC652-94AE-9F04-A635-CAF2E459D4CD}"/>
-              </a:ext>
-            </a:extLst>
-          </p:cNvPr>
-          <p:cNvPicPr>
-            <a:picLocks noChangeAspect="1"/>
-          </p:cNvPicPr>
-          <p:nvPr/>
-        </p:nvPicPr>
-        <p:blipFill>
-          <a:blip r:embed="rId3"/>
-          <a:stretch>
-            <a:fillRect/>
-          </a:stretch>
-        </p:blipFill>
-        <p:spPr>
-          <a:xfrm>
-            <a:off x="6605958" y="10335319"/>
-            <a:ext cx="7437765" cy="3218967"/>
-          </a:xfrm>
-          <a:prstGeom prst="rect">
-            <a:avLst/>
-          </a:prstGeom>
-        </p:spPr>
-      </p:pic>
     </p:spTree>
     <p:extLst>
       <p:ext uri="{BB962C8B-B14F-4D97-AF65-F5344CB8AC3E}">
